--- a/U1-Distribution-of-Velocities/figures/all-figs.pptx
+++ b/U1-Distribution-of-Velocities/figures/all-figs.pptx
@@ -7,6 +7,8 @@
   <p:sldIdLst>
     <p:sldId id="256" r:id="rId2"/>
     <p:sldId id="257" r:id="rId3"/>
+    <p:sldId id="258" r:id="rId4"/>
+    <p:sldId id="259" r:id="rId5"/>
   </p:sldIdLst>
   <p:sldSz cx="12192000" cy="6858000"/>
   <p:notesSz cx="6858000" cy="9144000"/>
@@ -273,7 +275,7 @@
           <a:p>
             <a:fld id="{B47390B5-D7E4-4A9A-ABAD-920B3BD530F5}" type="datetimeFigureOut">
               <a:rPr lang="en-IN" smtClean="0"/>
-              <a:t>19-08-2026</a:t>
+              <a:t>25-08-2026</a:t>
             </a:fld>
             <a:endParaRPr lang="en-IN"/>
           </a:p>
@@ -473,7 +475,7 @@
           <a:p>
             <a:fld id="{B47390B5-D7E4-4A9A-ABAD-920B3BD530F5}" type="datetimeFigureOut">
               <a:rPr lang="en-IN" smtClean="0"/>
-              <a:t>19-08-2026</a:t>
+              <a:t>25-08-2026</a:t>
             </a:fld>
             <a:endParaRPr lang="en-IN"/>
           </a:p>
@@ -683,7 +685,7 @@
           <a:p>
             <a:fld id="{B47390B5-D7E4-4A9A-ABAD-920B3BD530F5}" type="datetimeFigureOut">
               <a:rPr lang="en-IN" smtClean="0"/>
-              <a:t>19-08-2026</a:t>
+              <a:t>25-08-2026</a:t>
             </a:fld>
             <a:endParaRPr lang="en-IN"/>
           </a:p>
@@ -883,7 +885,7 @@
           <a:p>
             <a:fld id="{B47390B5-D7E4-4A9A-ABAD-920B3BD530F5}" type="datetimeFigureOut">
               <a:rPr lang="en-IN" smtClean="0"/>
-              <a:t>19-08-2026</a:t>
+              <a:t>25-08-2026</a:t>
             </a:fld>
             <a:endParaRPr lang="en-IN"/>
           </a:p>
@@ -1159,7 +1161,7 @@
           <a:p>
             <a:fld id="{B47390B5-D7E4-4A9A-ABAD-920B3BD530F5}" type="datetimeFigureOut">
               <a:rPr lang="en-IN" smtClean="0"/>
-              <a:t>19-08-2026</a:t>
+              <a:t>25-08-2026</a:t>
             </a:fld>
             <a:endParaRPr lang="en-IN"/>
           </a:p>
@@ -1427,7 +1429,7 @@
           <a:p>
             <a:fld id="{B47390B5-D7E4-4A9A-ABAD-920B3BD530F5}" type="datetimeFigureOut">
               <a:rPr lang="en-IN" smtClean="0"/>
-              <a:t>19-08-2026</a:t>
+              <a:t>25-08-2026</a:t>
             </a:fld>
             <a:endParaRPr lang="en-IN"/>
           </a:p>
@@ -1842,7 +1844,7 @@
           <a:p>
             <a:fld id="{B47390B5-D7E4-4A9A-ABAD-920B3BD530F5}" type="datetimeFigureOut">
               <a:rPr lang="en-IN" smtClean="0"/>
-              <a:t>19-08-2026</a:t>
+              <a:t>25-08-2026</a:t>
             </a:fld>
             <a:endParaRPr lang="en-IN"/>
           </a:p>
@@ -1984,7 +1986,7 @@
           <a:p>
             <a:fld id="{B47390B5-D7E4-4A9A-ABAD-920B3BD530F5}" type="datetimeFigureOut">
               <a:rPr lang="en-IN" smtClean="0"/>
-              <a:t>19-08-2026</a:t>
+              <a:t>25-08-2026</a:t>
             </a:fld>
             <a:endParaRPr lang="en-IN"/>
           </a:p>
@@ -2097,7 +2099,7 @@
           <a:p>
             <a:fld id="{B47390B5-D7E4-4A9A-ABAD-920B3BD530F5}" type="datetimeFigureOut">
               <a:rPr lang="en-IN" smtClean="0"/>
-              <a:t>19-08-2026</a:t>
+              <a:t>25-08-2026</a:t>
             </a:fld>
             <a:endParaRPr lang="en-IN"/>
           </a:p>
@@ -2410,7 +2412,7 @@
           <a:p>
             <a:fld id="{B47390B5-D7E4-4A9A-ABAD-920B3BD530F5}" type="datetimeFigureOut">
               <a:rPr lang="en-IN" smtClean="0"/>
-              <a:t>19-08-2026</a:t>
+              <a:t>25-08-2026</a:t>
             </a:fld>
             <a:endParaRPr lang="en-IN"/>
           </a:p>
@@ -2699,7 +2701,7 @@
           <a:p>
             <a:fld id="{B47390B5-D7E4-4A9A-ABAD-920B3BD530F5}" type="datetimeFigureOut">
               <a:rPr lang="en-IN" smtClean="0"/>
-              <a:t>19-08-2026</a:t>
+              <a:t>25-08-2026</a:t>
             </a:fld>
             <a:endParaRPr lang="en-IN"/>
           </a:p>
@@ -2942,7 +2944,7 @@
           <a:p>
             <a:fld id="{B47390B5-D7E4-4A9A-ABAD-920B3BD530F5}" type="datetimeFigureOut">
               <a:rPr lang="en-IN" smtClean="0"/>
-              <a:t>19-08-2026</a:t>
+              <a:t>25-08-2026</a:t>
             </a:fld>
             <a:endParaRPr lang="en-IN"/>
           </a:p>
@@ -4997,8 +4999,8 @@
           </a:fontRef>
         </p:style>
       </p:cxnSp>
-      <mc:AlternateContent xmlns:mc="http://schemas.openxmlformats.org/markup-compatibility/2006">
-        <mc:Choice xmlns:a14="http://schemas.microsoft.com/office/drawing/2010/main" Requires="a14">
+      <mc:AlternateContent xmlns:mc="http://schemas.openxmlformats.org/markup-compatibility/2006" xmlns:a14="http://schemas.microsoft.com/office/drawing/2010/main">
+        <mc:Choice Requires="a14">
           <p:sp>
             <p:nvSpPr>
               <p:cNvPr id="16" name="TextBox 15">
@@ -5027,6 +5029,7 @@
               </a:bodyPr>
               <a:lstStyle/>
               <a:p>
+                <a:pPr/>
                 <a14:m>
                   <m:oMathPara xmlns:m="http://schemas.openxmlformats.org/officeDocument/2006/math">
                     <m:oMath>
@@ -5063,7 +5066,7 @@
             </p:txBody>
           </p:sp>
         </mc:Choice>
-        <mc:Fallback>
+        <mc:Fallback xmlns="">
           <p:sp>
             <p:nvSpPr>
               <p:cNvPr id="16" name="TextBox 15">
@@ -5108,8 +5111,8 @@
           </p:sp>
         </mc:Fallback>
       </mc:AlternateContent>
-      <mc:AlternateContent xmlns:mc="http://schemas.openxmlformats.org/markup-compatibility/2006">
-        <mc:Choice xmlns:a14="http://schemas.microsoft.com/office/drawing/2010/main" Requires="a14">
+      <mc:AlternateContent xmlns:mc="http://schemas.openxmlformats.org/markup-compatibility/2006" xmlns:a14="http://schemas.microsoft.com/office/drawing/2010/main">
+        <mc:Choice Requires="a14">
           <p:sp>
             <p:nvSpPr>
               <p:cNvPr id="18" name="TextBox 17">
@@ -5175,7 +5178,7 @@
             </p:txBody>
           </p:sp>
         </mc:Choice>
-        <mc:Fallback>
+        <mc:Fallback xmlns="">
           <p:sp>
             <p:nvSpPr>
               <p:cNvPr id="18" name="TextBox 17">
@@ -5220,8 +5223,8 @@
           </p:sp>
         </mc:Fallback>
       </mc:AlternateContent>
-      <mc:AlternateContent xmlns:mc="http://schemas.openxmlformats.org/markup-compatibility/2006">
-        <mc:Choice xmlns:a14="http://schemas.microsoft.com/office/drawing/2010/main" Requires="a14">
+      <mc:AlternateContent xmlns:mc="http://schemas.openxmlformats.org/markup-compatibility/2006" xmlns:a14="http://schemas.microsoft.com/office/drawing/2010/main">
+        <mc:Choice Requires="a14">
           <p:sp>
             <p:nvSpPr>
               <p:cNvPr id="20" name="TextBox 19">
@@ -5287,7 +5290,7 @@
             </p:txBody>
           </p:sp>
         </mc:Choice>
-        <mc:Fallback>
+        <mc:Fallback xmlns="">
           <p:sp>
             <p:nvSpPr>
               <p:cNvPr id="20" name="TextBox 19">
@@ -5332,8 +5335,8 @@
           </p:sp>
         </mc:Fallback>
       </mc:AlternateContent>
-      <mc:AlternateContent xmlns:mc="http://schemas.openxmlformats.org/markup-compatibility/2006">
-        <mc:Choice xmlns:a14="http://schemas.microsoft.com/office/drawing/2010/main" Requires="a14">
+      <mc:AlternateContent xmlns:mc="http://schemas.openxmlformats.org/markup-compatibility/2006" xmlns:a14="http://schemas.microsoft.com/office/drawing/2010/main">
+        <mc:Choice Requires="a14">
           <p:sp>
             <p:nvSpPr>
               <p:cNvPr id="22" name="TextBox 21">
@@ -5380,7 +5383,7 @@
             </p:txBody>
           </p:sp>
         </mc:Choice>
-        <mc:Fallback>
+        <mc:Fallback xmlns="">
           <p:sp>
             <p:nvSpPr>
               <p:cNvPr id="22" name="TextBox 21">
@@ -5425,8 +5428,8 @@
           </p:sp>
         </mc:Fallback>
       </mc:AlternateContent>
-      <mc:AlternateContent xmlns:mc="http://schemas.openxmlformats.org/markup-compatibility/2006">
-        <mc:Choice xmlns:a14="http://schemas.microsoft.com/office/drawing/2010/main" Requires="a14">
+      <mc:AlternateContent xmlns:mc="http://schemas.openxmlformats.org/markup-compatibility/2006" xmlns:a14="http://schemas.microsoft.com/office/drawing/2010/main">
+        <mc:Choice Requires="a14">
           <p:sp>
             <p:nvSpPr>
               <p:cNvPr id="24" name="TextBox 23">
@@ -5485,7 +5488,7 @@
             </p:txBody>
           </p:sp>
         </mc:Choice>
-        <mc:Fallback>
+        <mc:Fallback xmlns="">
           <p:sp>
             <p:nvSpPr>
               <p:cNvPr id="24" name="TextBox 23">
@@ -5530,8 +5533,8 @@
           </p:sp>
         </mc:Fallback>
       </mc:AlternateContent>
-      <mc:AlternateContent xmlns:mc="http://schemas.openxmlformats.org/markup-compatibility/2006">
-        <mc:Choice xmlns:a14="http://schemas.microsoft.com/office/drawing/2010/main" Requires="a14">
+      <mc:AlternateContent xmlns:mc="http://schemas.openxmlformats.org/markup-compatibility/2006" xmlns:a14="http://schemas.microsoft.com/office/drawing/2010/main">
+        <mc:Choice Requires="a14">
           <p:sp>
             <p:nvSpPr>
               <p:cNvPr id="26" name="TextBox 25">
@@ -5596,7 +5599,7 @@
             </p:txBody>
           </p:sp>
         </mc:Choice>
-        <mc:Fallback>
+        <mc:Fallback xmlns="">
           <p:sp>
             <p:nvSpPr>
               <p:cNvPr id="26" name="TextBox 25">
@@ -5645,6 +5648,1463 @@
     <p:extLst>
       <p:ext uri="{BB962C8B-B14F-4D97-AF65-F5344CB8AC3E}">
         <p14:creationId xmlns:p14="http://schemas.microsoft.com/office/powerpoint/2010/main" val="4221904114"/>
+      </p:ext>
+    </p:extLst>
+  </p:cSld>
+  <p:clrMapOvr>
+    <a:masterClrMapping/>
+  </p:clrMapOvr>
+</p:sld>
+</file>
+
+<file path=ppt/slides/slide3.xml><?xml version="1.0" encoding="utf-8"?>
+<p:sld xmlns:a="http://schemas.openxmlformats.org/drawingml/2006/main" xmlns:r="http://schemas.openxmlformats.org/officeDocument/2006/relationships" xmlns:p="http://schemas.openxmlformats.org/presentationml/2006/main">
+  <p:cSld>
+    <p:spTree>
+      <p:nvGrpSpPr>
+        <p:cNvPr id="1" name=""/>
+        <p:cNvGrpSpPr/>
+        <p:nvPr/>
+      </p:nvGrpSpPr>
+      <p:grpSpPr>
+        <a:xfrm>
+          <a:off x="0" y="0"/>
+          <a:ext cx="0" cy="0"/>
+          <a:chOff x="0" y="0"/>
+          <a:chExt cx="0" cy="0"/>
+        </a:xfrm>
+      </p:grpSpPr>
+      <p:sp>
+        <p:nvSpPr>
+          <p:cNvPr id="6" name="Circle: Hollow 5">
+            <a:extLst>
+              <a:ext uri="{FF2B5EF4-FFF2-40B4-BE49-F238E27FC236}">
+                <a16:creationId xmlns:a16="http://schemas.microsoft.com/office/drawing/2014/main" id="{EEFDF4C7-AC45-A3D0-1DC4-D2DC1BDE77DC}"/>
+              </a:ext>
+            </a:extLst>
+          </p:cNvPr>
+          <p:cNvSpPr/>
+          <p:nvPr/>
+        </p:nvSpPr>
+        <p:spPr>
+          <a:xfrm>
+            <a:off x="4316628" y="1649628"/>
+            <a:ext cx="3558744" cy="3558744"/>
+          </a:xfrm>
+          <a:prstGeom prst="donut">
+            <a:avLst>
+              <a:gd name="adj" fmla="val 7603"/>
+            </a:avLst>
+          </a:prstGeom>
+          <a:solidFill>
+            <a:schemeClr val="bg1">
+              <a:lumMod val="50000"/>
+            </a:schemeClr>
+          </a:solidFill>
+          <a:ln>
+            <a:noFill/>
+          </a:ln>
+        </p:spPr>
+        <p:style>
+          <a:lnRef idx="2">
+            <a:schemeClr val="accent1">
+              <a:shade val="15000"/>
+            </a:schemeClr>
+          </a:lnRef>
+          <a:fillRef idx="1">
+            <a:schemeClr val="accent1"/>
+          </a:fillRef>
+          <a:effectRef idx="0">
+            <a:schemeClr val="accent1"/>
+          </a:effectRef>
+          <a:fontRef idx="minor">
+            <a:schemeClr val="lt1"/>
+          </a:fontRef>
+        </p:style>
+        <p:txBody>
+          <a:bodyPr rtlCol="0" anchor="ctr"/>
+          <a:lstStyle/>
+          <a:p>
+            <a:pPr algn="ctr"/>
+            <a:endParaRPr lang="en-IN">
+              <a:solidFill>
+                <a:schemeClr val="tx1"/>
+              </a:solidFill>
+            </a:endParaRPr>
+          </a:p>
+        </p:txBody>
+      </p:sp>
+      <p:cxnSp>
+        <p:nvCxnSpPr>
+          <p:cNvPr id="2" name="Straight Connector 1">
+            <a:extLst>
+              <a:ext uri="{FF2B5EF4-FFF2-40B4-BE49-F238E27FC236}">
+                <a16:creationId xmlns:a16="http://schemas.microsoft.com/office/drawing/2014/main" id="{29B33153-66C4-3761-64D5-5D8E17111A63}"/>
+              </a:ext>
+            </a:extLst>
+          </p:cNvPr>
+          <p:cNvCxnSpPr>
+            <a:cxnSpLocks/>
+          </p:cNvCxnSpPr>
+          <p:nvPr/>
+        </p:nvCxnSpPr>
+        <p:spPr>
+          <a:xfrm flipV="1">
+            <a:off x="6096000" y="886597"/>
+            <a:ext cx="0" cy="5084806"/>
+          </a:xfrm>
+          <a:prstGeom prst="line">
+            <a:avLst/>
+          </a:prstGeom>
+          <a:ln w="28575">
+            <a:solidFill>
+              <a:schemeClr val="tx1">
+                <a:lumMod val="65000"/>
+                <a:lumOff val="35000"/>
+              </a:schemeClr>
+            </a:solidFill>
+          </a:ln>
+        </p:spPr>
+        <p:style>
+          <a:lnRef idx="1">
+            <a:schemeClr val="accent1"/>
+          </a:lnRef>
+          <a:fillRef idx="0">
+            <a:schemeClr val="accent1"/>
+          </a:fillRef>
+          <a:effectRef idx="0">
+            <a:schemeClr val="accent1"/>
+          </a:effectRef>
+          <a:fontRef idx="minor">
+            <a:schemeClr val="tx1"/>
+          </a:fontRef>
+        </p:style>
+      </p:cxnSp>
+      <p:cxnSp>
+        <p:nvCxnSpPr>
+          <p:cNvPr id="5" name="Straight Connector 4">
+            <a:extLst>
+              <a:ext uri="{FF2B5EF4-FFF2-40B4-BE49-F238E27FC236}">
+                <a16:creationId xmlns:a16="http://schemas.microsoft.com/office/drawing/2014/main" id="{FEF5EC7F-5090-BC6F-8473-51EAB692F782}"/>
+              </a:ext>
+            </a:extLst>
+          </p:cNvPr>
+          <p:cNvCxnSpPr>
+            <a:cxnSpLocks/>
+          </p:cNvCxnSpPr>
+          <p:nvPr/>
+        </p:nvCxnSpPr>
+        <p:spPr>
+          <a:xfrm rot="5400000" flipV="1">
+            <a:off x="6096000" y="886597"/>
+            <a:ext cx="0" cy="5084806"/>
+          </a:xfrm>
+          <a:prstGeom prst="line">
+            <a:avLst/>
+          </a:prstGeom>
+          <a:ln w="28575">
+            <a:solidFill>
+              <a:schemeClr val="tx1">
+                <a:lumMod val="65000"/>
+                <a:lumOff val="35000"/>
+              </a:schemeClr>
+            </a:solidFill>
+          </a:ln>
+        </p:spPr>
+        <p:style>
+          <a:lnRef idx="1">
+            <a:schemeClr val="accent1"/>
+          </a:lnRef>
+          <a:fillRef idx="0">
+            <a:schemeClr val="accent1"/>
+          </a:fillRef>
+          <a:effectRef idx="0">
+            <a:schemeClr val="accent1"/>
+          </a:effectRef>
+          <a:fontRef idx="minor">
+            <a:schemeClr val="tx1"/>
+          </a:fontRef>
+        </p:style>
+      </p:cxnSp>
+      <p:cxnSp>
+        <p:nvCxnSpPr>
+          <p:cNvPr id="7" name="Straight Arrow Connector 6">
+            <a:extLst>
+              <a:ext uri="{FF2B5EF4-FFF2-40B4-BE49-F238E27FC236}">
+                <a16:creationId xmlns:a16="http://schemas.microsoft.com/office/drawing/2014/main" id="{B149DC70-BC43-74F9-A4B7-270E30DA5442}"/>
+              </a:ext>
+            </a:extLst>
+          </p:cNvPr>
+          <p:cNvCxnSpPr>
+            <a:cxnSpLocks/>
+          </p:cNvCxnSpPr>
+          <p:nvPr/>
+        </p:nvCxnSpPr>
+        <p:spPr>
+          <a:xfrm flipV="1">
+            <a:off x="6096000" y="2217420"/>
+            <a:ext cx="891540" cy="1211580"/>
+          </a:xfrm>
+          <a:prstGeom prst="straightConnector1">
+            <a:avLst/>
+          </a:prstGeom>
+          <a:ln w="31750" cap="rnd">
+            <a:solidFill>
+              <a:schemeClr val="tx1"/>
+            </a:solidFill>
+            <a:round/>
+            <a:headEnd w="lg" len="lg"/>
+            <a:tailEnd type="triangle" w="lg" len="lg"/>
+          </a:ln>
+        </p:spPr>
+        <p:style>
+          <a:lnRef idx="1">
+            <a:schemeClr val="accent1"/>
+          </a:lnRef>
+          <a:fillRef idx="0">
+            <a:schemeClr val="accent1"/>
+          </a:fillRef>
+          <a:effectRef idx="0">
+            <a:schemeClr val="accent1"/>
+          </a:effectRef>
+          <a:fontRef idx="minor">
+            <a:schemeClr val="tx1"/>
+          </a:fontRef>
+        </p:style>
+      </p:cxnSp>
+      <p:cxnSp>
+        <p:nvCxnSpPr>
+          <p:cNvPr id="9" name="Straight Arrow Connector 8">
+            <a:extLst>
+              <a:ext uri="{FF2B5EF4-FFF2-40B4-BE49-F238E27FC236}">
+                <a16:creationId xmlns:a16="http://schemas.microsoft.com/office/drawing/2014/main" id="{482C3AC5-C371-095E-F336-E42C7FC671B4}"/>
+              </a:ext>
+            </a:extLst>
+          </p:cNvPr>
+          <p:cNvCxnSpPr>
+            <a:cxnSpLocks/>
+          </p:cNvCxnSpPr>
+          <p:nvPr/>
+        </p:nvCxnSpPr>
+        <p:spPr>
+          <a:xfrm flipV="1">
+            <a:off x="6096000" y="2397125"/>
+            <a:ext cx="1447800" cy="1031875"/>
+          </a:xfrm>
+          <a:prstGeom prst="straightConnector1">
+            <a:avLst/>
+          </a:prstGeom>
+          <a:ln w="31750" cap="rnd">
+            <a:solidFill>
+              <a:schemeClr val="tx1"/>
+            </a:solidFill>
+            <a:round/>
+            <a:headEnd w="lg" len="lg"/>
+            <a:tailEnd type="triangle" w="lg" len="lg"/>
+          </a:ln>
+        </p:spPr>
+        <p:style>
+          <a:lnRef idx="1">
+            <a:schemeClr val="accent1"/>
+          </a:lnRef>
+          <a:fillRef idx="0">
+            <a:schemeClr val="accent1"/>
+          </a:fillRef>
+          <a:effectRef idx="0">
+            <a:schemeClr val="accent1"/>
+          </a:effectRef>
+          <a:fontRef idx="minor">
+            <a:schemeClr val="tx1"/>
+          </a:fontRef>
+        </p:style>
+      </p:cxnSp>
+      <mc:AlternateContent xmlns:mc="http://schemas.openxmlformats.org/markup-compatibility/2006">
+        <mc:Choice xmlns:a14="http://schemas.microsoft.com/office/drawing/2010/main" Requires="a14">
+          <p:sp>
+            <p:nvSpPr>
+              <p:cNvPr id="12" name="TextBox 11">
+                <a:extLst>
+                  <a:ext uri="{FF2B5EF4-FFF2-40B4-BE49-F238E27FC236}">
+                    <a16:creationId xmlns:a16="http://schemas.microsoft.com/office/drawing/2014/main" id="{728AD938-F315-BAF2-76C9-79D05A1B73D6}"/>
+                  </a:ext>
+                </a:extLst>
+              </p:cNvPr>
+              <p:cNvSpPr txBox="1"/>
+              <p:nvPr/>
+            </p:nvSpPr>
+            <p:spPr>
+              <a:xfrm>
+                <a:off x="6413280" y="2359065"/>
+                <a:ext cx="253274" cy="369332"/>
+              </a:xfrm>
+              <a:prstGeom prst="rect">
+                <a:avLst/>
+              </a:prstGeom>
+              <a:noFill/>
+            </p:spPr>
+            <p:txBody>
+              <a:bodyPr wrap="none" lIns="0" tIns="0" rIns="0" bIns="0" rtlCol="0">
+                <a:spAutoFit/>
+              </a:bodyPr>
+              <a:lstStyle/>
+              <a:p>
+                <a:pPr/>
+                <a14:m>
+                  <m:oMathPara xmlns:m="http://schemas.openxmlformats.org/officeDocument/2006/math">
+                    <m:oMath>
+                      <m:acc>
+                        <m:accPr>
+                          <m:chr m:val="⃗"/>
+                          <m:ctrlPr>
+                            <a:rPr lang="en-US" sz="2400" b="1" i="1" smtClean="0">
+                              <a:latin typeface="Cambria Math" panose="02040503050406030204" pitchFamily="18" charset="0"/>
+                            </a:rPr>
+                          </m:ctrlPr>
+                        </m:accPr>
+                        <m:e>
+                          <m:r>
+                            <a:rPr lang="en-US" sz="2400" b="1" i="1" smtClean="0">
+                              <a:latin typeface="Cambria Math" panose="02040503050406030204" pitchFamily="18" charset="0"/>
+                            </a:rPr>
+                            <m:t>𝒗</m:t>
+                          </m:r>
+                        </m:e>
+                      </m:acc>
+                    </m:oMath>
+                  </m:oMathPara>
+                </a14:m>
+                <a:endParaRPr lang="en-IN" sz="2400" dirty="0"/>
+              </a:p>
+            </p:txBody>
+          </p:sp>
+        </mc:Choice>
+        <mc:Fallback>
+          <p:sp>
+            <p:nvSpPr>
+              <p:cNvPr id="12" name="TextBox 11">
+                <a:extLst>
+                  <a:ext uri="{FF2B5EF4-FFF2-40B4-BE49-F238E27FC236}">
+                    <a16:creationId xmlns:a16="http://schemas.microsoft.com/office/drawing/2014/main" id="{728AD938-F315-BAF2-76C9-79D05A1B73D6}"/>
+                  </a:ext>
+                </a:extLst>
+              </p:cNvPr>
+              <p:cNvSpPr txBox="1">
+                <a:spLocks noRot="1" noChangeAspect="1" noMove="1" noResize="1" noEditPoints="1" noAdjustHandles="1" noChangeArrowheads="1" noChangeShapeType="1" noTextEdit="1"/>
+              </p:cNvSpPr>
+              <p:nvPr/>
+            </p:nvSpPr>
+            <p:spPr>
+              <a:xfrm>
+                <a:off x="6413280" y="2359065"/>
+                <a:ext cx="253274" cy="369332"/>
+              </a:xfrm>
+              <a:prstGeom prst="rect">
+                <a:avLst/>
+              </a:prstGeom>
+              <a:blipFill>
+                <a:blip r:embed="rId2"/>
+                <a:stretch>
+                  <a:fillRect l="-16667" r="-19048"/>
+                </a:stretch>
+              </a:blipFill>
+            </p:spPr>
+            <p:txBody>
+              <a:bodyPr/>
+              <a:lstStyle/>
+              <a:p>
+                <a:r>
+                  <a:rPr lang="en-IN">
+                    <a:noFill/>
+                  </a:rPr>
+                  <a:t> </a:t>
+                </a:r>
+              </a:p>
+            </p:txBody>
+          </p:sp>
+        </mc:Fallback>
+      </mc:AlternateContent>
+      <mc:AlternateContent xmlns:mc="http://schemas.openxmlformats.org/markup-compatibility/2006">
+        <mc:Choice xmlns:a14="http://schemas.microsoft.com/office/drawing/2010/main" Requires="a14">
+          <p:sp>
+            <p:nvSpPr>
+              <p:cNvPr id="14" name="TextBox 13">
+                <a:extLst>
+                  <a:ext uri="{FF2B5EF4-FFF2-40B4-BE49-F238E27FC236}">
+                    <a16:creationId xmlns:a16="http://schemas.microsoft.com/office/drawing/2014/main" id="{9B58FC68-9773-6D54-E682-C007B374DCC5}"/>
+                  </a:ext>
+                </a:extLst>
+              </p:cNvPr>
+              <p:cNvSpPr txBox="1"/>
+              <p:nvPr/>
+            </p:nvSpPr>
+            <p:spPr>
+              <a:xfrm>
+                <a:off x="6730250" y="2960438"/>
+                <a:ext cx="684483" cy="369332"/>
+              </a:xfrm>
+              <a:prstGeom prst="rect">
+                <a:avLst/>
+              </a:prstGeom>
+              <a:noFill/>
+            </p:spPr>
+            <p:txBody>
+              <a:bodyPr wrap="none" lIns="0" tIns="0" rIns="0" bIns="0" rtlCol="0">
+                <a:spAutoFit/>
+              </a:bodyPr>
+              <a:lstStyle/>
+              <a:p>
+                <a:pPr/>
+                <a14:m>
+                  <m:oMath xmlns:m="http://schemas.openxmlformats.org/officeDocument/2006/math">
+                    <m:acc>
+                      <m:accPr>
+                        <m:chr m:val="⃗"/>
+                        <m:ctrlPr>
+                          <a:rPr lang="en-US" sz="2400" b="1" i="1" smtClean="0">
+                            <a:latin typeface="Cambria Math" panose="02040503050406030204" pitchFamily="18" charset="0"/>
+                          </a:rPr>
+                        </m:ctrlPr>
+                      </m:accPr>
+                      <m:e>
+                        <m:r>
+                          <a:rPr lang="en-US" sz="2400" b="1" i="1" smtClean="0">
+                            <a:latin typeface="Cambria Math" panose="02040503050406030204" pitchFamily="18" charset="0"/>
+                          </a:rPr>
+                          <m:t>𝒗</m:t>
+                        </m:r>
+                      </m:e>
+                    </m:acc>
+                  </m:oMath>
+                </a14:m>
+                <a:r>
+                  <a:rPr lang="en-IN" sz="2400" dirty="0"/>
+                  <a:t>+d</a:t>
+                </a:r>
+                <a14:m>
+                  <m:oMath xmlns:m="http://schemas.openxmlformats.org/officeDocument/2006/math">
+                    <m:acc>
+                      <m:accPr>
+                        <m:chr m:val="⃗"/>
+                        <m:ctrlPr>
+                          <a:rPr lang="en-US" sz="2400" b="1" i="1">
+                            <a:latin typeface="Cambria Math" panose="02040503050406030204" pitchFamily="18" charset="0"/>
+                          </a:rPr>
+                        </m:ctrlPr>
+                      </m:accPr>
+                      <m:e>
+                        <m:r>
+                          <a:rPr lang="en-US" sz="2400" b="1" i="1">
+                            <a:latin typeface="Cambria Math" panose="02040503050406030204" pitchFamily="18" charset="0"/>
+                          </a:rPr>
+                          <m:t>𝒗</m:t>
+                        </m:r>
+                      </m:e>
+                    </m:acc>
+                  </m:oMath>
+                </a14:m>
+                <a:endParaRPr lang="en-IN" sz="2400" dirty="0"/>
+              </a:p>
+            </p:txBody>
+          </p:sp>
+        </mc:Choice>
+        <mc:Fallback>
+          <p:sp>
+            <p:nvSpPr>
+              <p:cNvPr id="14" name="TextBox 13">
+                <a:extLst>
+                  <a:ext uri="{FF2B5EF4-FFF2-40B4-BE49-F238E27FC236}">
+                    <a16:creationId xmlns:a16="http://schemas.microsoft.com/office/drawing/2014/main" id="{9B58FC68-9773-6D54-E682-C007B374DCC5}"/>
+                  </a:ext>
+                </a:extLst>
+              </p:cNvPr>
+              <p:cNvSpPr txBox="1">
+                <a:spLocks noRot="1" noChangeAspect="1" noMove="1" noResize="1" noEditPoints="1" noAdjustHandles="1" noChangeArrowheads="1" noChangeShapeType="1" noTextEdit="1"/>
+              </p:cNvSpPr>
+              <p:nvPr/>
+            </p:nvSpPr>
+            <p:spPr>
+              <a:xfrm>
+                <a:off x="6730250" y="2960438"/>
+                <a:ext cx="684483" cy="369332"/>
+              </a:xfrm>
+              <a:prstGeom prst="rect">
+                <a:avLst/>
+              </a:prstGeom>
+              <a:blipFill>
+                <a:blip r:embed="rId3"/>
+                <a:stretch>
+                  <a:fillRect l="-11607" t="-26667" r="-11607" b="-50000"/>
+                </a:stretch>
+              </a:blipFill>
+            </p:spPr>
+            <p:txBody>
+              <a:bodyPr/>
+              <a:lstStyle/>
+              <a:p>
+                <a:r>
+                  <a:rPr lang="en-IN">
+                    <a:noFill/>
+                  </a:rPr>
+                  <a:t> </a:t>
+                </a:r>
+              </a:p>
+            </p:txBody>
+          </p:sp>
+        </mc:Fallback>
+      </mc:AlternateContent>
+      <mc:AlternateContent xmlns:mc="http://schemas.openxmlformats.org/markup-compatibility/2006">
+        <mc:Choice xmlns:a14="http://schemas.microsoft.com/office/drawing/2010/main" Requires="a14">
+          <p:sp>
+            <p:nvSpPr>
+              <p:cNvPr id="18" name="TextBox 17">
+                <a:extLst>
+                  <a:ext uri="{FF2B5EF4-FFF2-40B4-BE49-F238E27FC236}">
+                    <a16:creationId xmlns:a16="http://schemas.microsoft.com/office/drawing/2014/main" id="{7A125CAE-8F71-4B0D-DE56-35217BD93430}"/>
+                  </a:ext>
+                </a:extLst>
+              </p:cNvPr>
+              <p:cNvSpPr txBox="1"/>
+              <p:nvPr/>
+            </p:nvSpPr>
+            <p:spPr>
+              <a:xfrm>
+                <a:off x="8297809" y="3429000"/>
+                <a:ext cx="369460" cy="369332"/>
+              </a:xfrm>
+              <a:prstGeom prst="rect">
+                <a:avLst/>
+              </a:prstGeom>
+              <a:noFill/>
+            </p:spPr>
+            <p:txBody>
+              <a:bodyPr wrap="none" lIns="0" tIns="0" rIns="0" bIns="0" rtlCol="0">
+                <a:spAutoFit/>
+              </a:bodyPr>
+              <a:lstStyle/>
+              <a:p>
+                <a:pPr/>
+                <a14:m>
+                  <m:oMathPara xmlns:m="http://schemas.openxmlformats.org/officeDocument/2006/math">
+                    <m:oMath>
+                      <m:sSub>
+                        <m:sSubPr>
+                          <m:ctrlPr>
+                            <a:rPr lang="en-US" sz="2400" b="0" i="1" smtClean="0">
+                              <a:latin typeface="Cambria Math" panose="02040503050406030204" pitchFamily="18" charset="0"/>
+                            </a:rPr>
+                          </m:ctrlPr>
+                        </m:sSubPr>
+                        <m:e>
+                          <m:r>
+                            <a:rPr lang="en-US" sz="2400" b="0" i="1" smtClean="0">
+                              <a:latin typeface="Cambria Math" panose="02040503050406030204" pitchFamily="18" charset="0"/>
+                            </a:rPr>
+                            <m:t>𝑣</m:t>
+                          </m:r>
+                        </m:e>
+                        <m:sub>
+                          <m:r>
+                            <a:rPr lang="en-US" sz="2400" b="0" i="1" smtClean="0">
+                              <a:latin typeface="Cambria Math" panose="02040503050406030204" pitchFamily="18" charset="0"/>
+                            </a:rPr>
+                            <m:t>𝑥</m:t>
+                          </m:r>
+                        </m:sub>
+                      </m:sSub>
+                    </m:oMath>
+                  </m:oMathPara>
+                </a14:m>
+                <a:endParaRPr lang="en-IN" sz="2400" dirty="0"/>
+              </a:p>
+            </p:txBody>
+          </p:sp>
+        </mc:Choice>
+        <mc:Fallback>
+          <p:sp>
+            <p:nvSpPr>
+              <p:cNvPr id="18" name="TextBox 17">
+                <a:extLst>
+                  <a:ext uri="{FF2B5EF4-FFF2-40B4-BE49-F238E27FC236}">
+                    <a16:creationId xmlns:a16="http://schemas.microsoft.com/office/drawing/2014/main" id="{7A125CAE-8F71-4B0D-DE56-35217BD93430}"/>
+                  </a:ext>
+                </a:extLst>
+              </p:cNvPr>
+              <p:cNvSpPr txBox="1">
+                <a:spLocks noRot="1" noChangeAspect="1" noMove="1" noResize="1" noEditPoints="1" noAdjustHandles="1" noChangeArrowheads="1" noChangeShapeType="1" noTextEdit="1"/>
+              </p:cNvSpPr>
+              <p:nvPr/>
+            </p:nvSpPr>
+            <p:spPr>
+              <a:xfrm>
+                <a:off x="8297809" y="3429000"/>
+                <a:ext cx="369460" cy="369332"/>
+              </a:xfrm>
+              <a:prstGeom prst="rect">
+                <a:avLst/>
+              </a:prstGeom>
+              <a:blipFill>
+                <a:blip r:embed="rId4"/>
+                <a:stretch>
+                  <a:fillRect l="-11475" r="-1639" b="-10000"/>
+                </a:stretch>
+              </a:blipFill>
+            </p:spPr>
+            <p:txBody>
+              <a:bodyPr/>
+              <a:lstStyle/>
+              <a:p>
+                <a:r>
+                  <a:rPr lang="en-IN">
+                    <a:noFill/>
+                  </a:rPr>
+                  <a:t> </a:t>
+                </a:r>
+              </a:p>
+            </p:txBody>
+          </p:sp>
+        </mc:Fallback>
+      </mc:AlternateContent>
+      <mc:AlternateContent xmlns:mc="http://schemas.openxmlformats.org/markup-compatibility/2006">
+        <mc:Choice xmlns:a14="http://schemas.microsoft.com/office/drawing/2010/main" Requires="a14">
+          <p:sp>
+            <p:nvSpPr>
+              <p:cNvPr id="20" name="TextBox 19">
+                <a:extLst>
+                  <a:ext uri="{FF2B5EF4-FFF2-40B4-BE49-F238E27FC236}">
+                    <a16:creationId xmlns:a16="http://schemas.microsoft.com/office/drawing/2014/main" id="{163FBF60-F846-B9AE-65D7-EC0B089F5A76}"/>
+                  </a:ext>
+                </a:extLst>
+              </p:cNvPr>
+              <p:cNvSpPr txBox="1"/>
+              <p:nvPr/>
+            </p:nvSpPr>
+            <p:spPr>
+              <a:xfrm>
+                <a:off x="5662040" y="735183"/>
+                <a:ext cx="378502" cy="398507"/>
+              </a:xfrm>
+              <a:prstGeom prst="rect">
+                <a:avLst/>
+              </a:prstGeom>
+              <a:noFill/>
+            </p:spPr>
+            <p:txBody>
+              <a:bodyPr wrap="none" lIns="0" tIns="0" rIns="0" bIns="0" rtlCol="0">
+                <a:spAutoFit/>
+              </a:bodyPr>
+              <a:lstStyle/>
+              <a:p>
+                <a:pPr/>
+                <a14:m>
+                  <m:oMathPara xmlns:m="http://schemas.openxmlformats.org/officeDocument/2006/math">
+                    <m:oMath>
+                      <m:sSub>
+                        <m:sSubPr>
+                          <m:ctrlPr>
+                            <a:rPr lang="en-US" sz="2400" b="0" i="1" smtClean="0">
+                              <a:latin typeface="Cambria Math" panose="02040503050406030204" pitchFamily="18" charset="0"/>
+                            </a:rPr>
+                          </m:ctrlPr>
+                        </m:sSubPr>
+                        <m:e>
+                          <m:r>
+                            <a:rPr lang="en-US" sz="2400" b="0" i="1" smtClean="0">
+                              <a:latin typeface="Cambria Math" panose="02040503050406030204" pitchFamily="18" charset="0"/>
+                            </a:rPr>
+                            <m:t>𝑣</m:t>
+                          </m:r>
+                        </m:e>
+                        <m:sub>
+                          <m:r>
+                            <a:rPr lang="en-US" sz="2400" b="0" i="1" smtClean="0">
+                              <a:latin typeface="Cambria Math" panose="02040503050406030204" pitchFamily="18" charset="0"/>
+                            </a:rPr>
+                            <m:t>𝑦</m:t>
+                          </m:r>
+                        </m:sub>
+                      </m:sSub>
+                    </m:oMath>
+                  </m:oMathPara>
+                </a14:m>
+                <a:endParaRPr lang="en-IN" sz="2400" dirty="0"/>
+              </a:p>
+            </p:txBody>
+          </p:sp>
+        </mc:Choice>
+        <mc:Fallback>
+          <p:sp>
+            <p:nvSpPr>
+              <p:cNvPr id="20" name="TextBox 19">
+                <a:extLst>
+                  <a:ext uri="{FF2B5EF4-FFF2-40B4-BE49-F238E27FC236}">
+                    <a16:creationId xmlns:a16="http://schemas.microsoft.com/office/drawing/2014/main" id="{163FBF60-F846-B9AE-65D7-EC0B089F5A76}"/>
+                  </a:ext>
+                </a:extLst>
+              </p:cNvPr>
+              <p:cNvSpPr txBox="1">
+                <a:spLocks noRot="1" noChangeAspect="1" noMove="1" noResize="1" noEditPoints="1" noAdjustHandles="1" noChangeArrowheads="1" noChangeShapeType="1" noTextEdit="1"/>
+              </p:cNvSpPr>
+              <p:nvPr/>
+            </p:nvSpPr>
+            <p:spPr>
+              <a:xfrm>
+                <a:off x="5662040" y="735183"/>
+                <a:ext cx="378502" cy="398507"/>
+              </a:xfrm>
+              <a:prstGeom prst="rect">
+                <a:avLst/>
+              </a:prstGeom>
+              <a:blipFill>
+                <a:blip r:embed="rId5"/>
+                <a:stretch>
+                  <a:fillRect l="-11290" r="-6452" b="-20000"/>
+                </a:stretch>
+              </a:blipFill>
+            </p:spPr>
+            <p:txBody>
+              <a:bodyPr/>
+              <a:lstStyle/>
+              <a:p>
+                <a:r>
+                  <a:rPr lang="en-IN">
+                    <a:noFill/>
+                  </a:rPr>
+                  <a:t> </a:t>
+                </a:r>
+              </a:p>
+            </p:txBody>
+          </p:sp>
+        </mc:Fallback>
+      </mc:AlternateContent>
+    </p:spTree>
+    <p:extLst>
+      <p:ext uri="{BB962C8B-B14F-4D97-AF65-F5344CB8AC3E}">
+        <p14:creationId xmlns:p14="http://schemas.microsoft.com/office/powerpoint/2010/main" val="270472301"/>
+      </p:ext>
+    </p:extLst>
+  </p:cSld>
+  <p:clrMapOvr>
+    <a:masterClrMapping/>
+  </p:clrMapOvr>
+</p:sld>
+</file>
+
+<file path=ppt/slides/slide4.xml><?xml version="1.0" encoding="utf-8"?>
+<p:sld xmlns:a="http://schemas.openxmlformats.org/drawingml/2006/main" xmlns:r="http://schemas.openxmlformats.org/officeDocument/2006/relationships" xmlns:p="http://schemas.openxmlformats.org/presentationml/2006/main">
+  <p:cSld>
+    <p:spTree>
+      <p:nvGrpSpPr>
+        <p:cNvPr id="1" name=""/>
+        <p:cNvGrpSpPr/>
+        <p:nvPr/>
+      </p:nvGrpSpPr>
+      <p:grpSpPr>
+        <a:xfrm>
+          <a:off x="0" y="0"/>
+          <a:ext cx="0" cy="0"/>
+          <a:chOff x="0" y="0"/>
+          <a:chExt cx="0" cy="0"/>
+        </a:xfrm>
+      </p:grpSpPr>
+      <p:pic>
+        <p:nvPicPr>
+          <p:cNvPr id="3" name="Picture 2">
+            <a:extLst>
+              <a:ext uri="{FF2B5EF4-FFF2-40B4-BE49-F238E27FC236}">
+                <a16:creationId xmlns:a16="http://schemas.microsoft.com/office/drawing/2014/main" id="{AB7EF53B-4D42-982B-BCF8-079F79408092}"/>
+              </a:ext>
+            </a:extLst>
+          </p:cNvPr>
+          <p:cNvPicPr>
+            <a:picLocks noChangeAspect="1"/>
+          </p:cNvPicPr>
+          <p:nvPr/>
+        </p:nvPicPr>
+        <p:blipFill>
+          <a:blip r:embed="rId2">
+            <a:extLst>
+              <a:ext uri="{28A0092B-C50C-407E-A947-70E740481C1C}">
+                <a14:useLocalDpi xmlns:a14="http://schemas.microsoft.com/office/drawing/2010/main" val="0"/>
+              </a:ext>
+            </a:extLst>
+          </a:blip>
+          <a:srcRect l="11746" t="20140" r="8254" b="9325"/>
+          <a:stretch>
+            <a:fillRect/>
+          </a:stretch>
+        </p:blipFill>
+        <p:spPr>
+          <a:xfrm>
+            <a:off x="2598057" y="1168402"/>
+            <a:ext cx="7315200" cy="3869869"/>
+          </a:xfrm>
+          <a:prstGeom prst="rect">
+            <a:avLst/>
+          </a:prstGeom>
+        </p:spPr>
+      </p:pic>
+      <p:sp>
+        <p:nvSpPr>
+          <p:cNvPr id="4" name="Freeform: Shape 3">
+            <a:extLst>
+              <a:ext uri="{FF2B5EF4-FFF2-40B4-BE49-F238E27FC236}">
+                <a16:creationId xmlns:a16="http://schemas.microsoft.com/office/drawing/2014/main" id="{A5A85255-046C-8845-BB60-17EDA84904FF}"/>
+              </a:ext>
+            </a:extLst>
+          </p:cNvPr>
+          <p:cNvSpPr/>
+          <p:nvPr/>
+        </p:nvSpPr>
+        <p:spPr>
+          <a:xfrm>
+            <a:off x="6096000" y="2499519"/>
+            <a:ext cx="259557" cy="2436018"/>
+          </a:xfrm>
+          <a:custGeom>
+            <a:avLst/>
+            <a:gdLst>
+              <a:gd name="csX0" fmla="*/ 1618 w 276225"/>
+              <a:gd name="csY0" fmla="*/ 0 h 2433635"/>
+              <a:gd name="csX1" fmla="*/ 0 w 276225"/>
+              <a:gd name="csY1" fmla="*/ 2433635 h 2433635"/>
+              <a:gd name="csX2" fmla="*/ 276225 w 276225"/>
+              <a:gd name="csY2" fmla="*/ 2433635 h 2433635"/>
+              <a:gd name="csX3" fmla="*/ 276225 w 276225"/>
+              <a:gd name="csY3" fmla="*/ 414335 h 2433635"/>
+              <a:gd name="csX4" fmla="*/ 1618 w 276225"/>
+              <a:gd name="csY4" fmla="*/ 0 h 2433635"/>
+            </a:gdLst>
+            <a:ahLst/>
+            <a:cxnLst>
+              <a:cxn ang="0">
+                <a:pos x="csX0" y="csY0"/>
+              </a:cxn>
+              <a:cxn ang="0">
+                <a:pos x="csX1" y="csY1"/>
+              </a:cxn>
+              <a:cxn ang="0">
+                <a:pos x="csX2" y="csY2"/>
+              </a:cxn>
+              <a:cxn ang="0">
+                <a:pos x="csX3" y="csY3"/>
+              </a:cxn>
+              <a:cxn ang="0">
+                <a:pos x="csX4" y="csY4"/>
+              </a:cxn>
+            </a:cxnLst>
+            <a:rect l="l" t="t" r="r" b="b"/>
+            <a:pathLst>
+              <a:path w="276225" h="2433635">
+                <a:moveTo>
+                  <a:pt x="1618" y="0"/>
+                </a:moveTo>
+                <a:cubicBezTo>
+                  <a:pt x="-3145" y="812006"/>
+                  <a:pt x="4763" y="1621629"/>
+                  <a:pt x="0" y="2433635"/>
+                </a:cubicBezTo>
+                <a:lnTo>
+                  <a:pt x="276225" y="2433635"/>
+                </a:lnTo>
+                <a:lnTo>
+                  <a:pt x="276225" y="414335"/>
+                </a:lnTo>
+                <a:lnTo>
+                  <a:pt x="1618" y="0"/>
+                </a:lnTo>
+                <a:close/>
+              </a:path>
+            </a:pathLst>
+          </a:custGeom>
+          <a:solidFill>
+            <a:schemeClr val="tx1">
+              <a:lumMod val="65000"/>
+              <a:lumOff val="35000"/>
+            </a:schemeClr>
+          </a:solidFill>
+          <a:ln>
+            <a:noFill/>
+          </a:ln>
+        </p:spPr>
+        <p:style>
+          <a:lnRef idx="2">
+            <a:schemeClr val="accent1">
+              <a:shade val="15000"/>
+            </a:schemeClr>
+          </a:lnRef>
+          <a:fillRef idx="1">
+            <a:schemeClr val="accent1"/>
+          </a:fillRef>
+          <a:effectRef idx="0">
+            <a:schemeClr val="accent1"/>
+          </a:effectRef>
+          <a:fontRef idx="minor">
+            <a:schemeClr val="lt1"/>
+          </a:fontRef>
+        </p:style>
+        <p:txBody>
+          <a:bodyPr rtlCol="0" anchor="ctr"/>
+          <a:lstStyle/>
+          <a:p>
+            <a:pPr algn="ctr"/>
+            <a:endParaRPr lang="en-IN" dirty="0"/>
+          </a:p>
+        </p:txBody>
+      </p:sp>
+      <mc:AlternateContent xmlns:mc="http://schemas.openxmlformats.org/markup-compatibility/2006">
+        <mc:Choice xmlns:a14="http://schemas.microsoft.com/office/drawing/2010/main" Requires="a14">
+          <p:sp>
+            <p:nvSpPr>
+              <p:cNvPr id="6" name="TextBox 5">
+                <a:extLst>
+                  <a:ext uri="{FF2B5EF4-FFF2-40B4-BE49-F238E27FC236}">
+                    <a16:creationId xmlns:a16="http://schemas.microsoft.com/office/drawing/2014/main" id="{CA2AF016-20D3-2DD7-CA7E-6007C3136B5C}"/>
+                  </a:ext>
+                </a:extLst>
+              </p:cNvPr>
+              <p:cNvSpPr txBox="1"/>
+              <p:nvPr/>
+            </p:nvSpPr>
+            <p:spPr>
+              <a:xfrm>
+                <a:off x="2453039" y="4935537"/>
+                <a:ext cx="284822" cy="369332"/>
+              </a:xfrm>
+              <a:prstGeom prst="rect">
+                <a:avLst/>
+              </a:prstGeom>
+              <a:noFill/>
+            </p:spPr>
+            <p:txBody>
+              <a:bodyPr wrap="none" lIns="0" tIns="0" rIns="0" bIns="0" rtlCol="0">
+                <a:spAutoFit/>
+              </a:bodyPr>
+              <a:lstStyle/>
+              <a:p>
+                <a:pPr/>
+                <a14:m>
+                  <m:oMathPara xmlns:m="http://schemas.openxmlformats.org/officeDocument/2006/math">
+                    <m:oMath>
+                      <m:r>
+                        <a:rPr lang="en-US" sz="2400" b="0" i="1" smtClean="0">
+                          <a:latin typeface="Cambria Math" panose="02040503050406030204" pitchFamily="18" charset="0"/>
+                        </a:rPr>
+                        <m:t>𝑂</m:t>
+                      </m:r>
+                    </m:oMath>
+                  </m:oMathPara>
+                </a14:m>
+                <a:endParaRPr lang="en-IN" sz="2400" dirty="0"/>
+              </a:p>
+            </p:txBody>
+          </p:sp>
+        </mc:Choice>
+        <mc:Fallback>
+          <p:sp>
+            <p:nvSpPr>
+              <p:cNvPr id="6" name="TextBox 5">
+                <a:extLst>
+                  <a:ext uri="{FF2B5EF4-FFF2-40B4-BE49-F238E27FC236}">
+                    <a16:creationId xmlns:a16="http://schemas.microsoft.com/office/drawing/2014/main" id="{CA2AF016-20D3-2DD7-CA7E-6007C3136B5C}"/>
+                  </a:ext>
+                </a:extLst>
+              </p:cNvPr>
+              <p:cNvSpPr txBox="1">
+                <a:spLocks noRot="1" noChangeAspect="1" noMove="1" noResize="1" noEditPoints="1" noAdjustHandles="1" noChangeArrowheads="1" noChangeShapeType="1" noTextEdit="1"/>
+              </p:cNvSpPr>
+              <p:nvPr/>
+            </p:nvSpPr>
+            <p:spPr>
+              <a:xfrm>
+                <a:off x="2453039" y="4935537"/>
+                <a:ext cx="284822" cy="369332"/>
+              </a:xfrm>
+              <a:prstGeom prst="rect">
+                <a:avLst/>
+              </a:prstGeom>
+              <a:blipFill>
+                <a:blip r:embed="rId3"/>
+                <a:stretch>
+                  <a:fillRect l="-23404" r="-23404" b="-6667"/>
+                </a:stretch>
+              </a:blipFill>
+            </p:spPr>
+            <p:txBody>
+              <a:bodyPr/>
+              <a:lstStyle/>
+              <a:p>
+                <a:r>
+                  <a:rPr lang="en-IN">
+                    <a:noFill/>
+                  </a:rPr>
+                  <a:t> </a:t>
+                </a:r>
+              </a:p>
+            </p:txBody>
+          </p:sp>
+        </mc:Fallback>
+      </mc:AlternateContent>
+      <p:cxnSp>
+        <p:nvCxnSpPr>
+          <p:cNvPr id="10" name="Straight Arrow Connector 9">
+            <a:extLst>
+              <a:ext uri="{FF2B5EF4-FFF2-40B4-BE49-F238E27FC236}">
+                <a16:creationId xmlns:a16="http://schemas.microsoft.com/office/drawing/2014/main" id="{74301FAD-6A55-91DE-A1D9-7C7EE2D1A197}"/>
+              </a:ext>
+            </a:extLst>
+          </p:cNvPr>
+          <p:cNvCxnSpPr>
+            <a:cxnSpLocks/>
+          </p:cNvCxnSpPr>
+          <p:nvPr/>
+        </p:nvCxnSpPr>
+        <p:spPr>
+          <a:xfrm>
+            <a:off x="2686050" y="4779449"/>
+            <a:ext cx="3409950" cy="0"/>
+          </a:xfrm>
+          <a:prstGeom prst="straightConnector1">
+            <a:avLst/>
+          </a:prstGeom>
+          <a:ln w="12700">
+            <a:solidFill>
+              <a:schemeClr val="tx1"/>
+            </a:solidFill>
+            <a:headEnd type="triangle"/>
+            <a:tailEnd type="triangle"/>
+          </a:ln>
+        </p:spPr>
+        <p:style>
+          <a:lnRef idx="1">
+            <a:schemeClr val="accent1"/>
+          </a:lnRef>
+          <a:fillRef idx="0">
+            <a:schemeClr val="accent1"/>
+          </a:fillRef>
+          <a:effectRef idx="0">
+            <a:schemeClr val="accent1"/>
+          </a:effectRef>
+          <a:fontRef idx="minor">
+            <a:schemeClr val="tx1"/>
+          </a:fontRef>
+        </p:style>
+      </p:cxnSp>
+      <mc:AlternateContent xmlns:mc="http://schemas.openxmlformats.org/markup-compatibility/2006">
+        <mc:Choice xmlns:a14="http://schemas.microsoft.com/office/drawing/2010/main" Requires="a14">
+          <p:sp>
+            <p:nvSpPr>
+              <p:cNvPr id="8" name="TextBox 7">
+                <a:extLst>
+                  <a:ext uri="{FF2B5EF4-FFF2-40B4-BE49-F238E27FC236}">
+                    <a16:creationId xmlns:a16="http://schemas.microsoft.com/office/drawing/2014/main" id="{13A18735-D52F-839F-48AE-791746F3FCD8}"/>
+                  </a:ext>
+                </a:extLst>
+              </p:cNvPr>
+              <p:cNvSpPr txBox="1"/>
+              <p:nvPr/>
+            </p:nvSpPr>
+            <p:spPr>
+              <a:xfrm>
+                <a:off x="4172248" y="4566205"/>
+                <a:ext cx="244682" cy="369332"/>
+              </a:xfrm>
+              <a:prstGeom prst="rect">
+                <a:avLst/>
+              </a:prstGeom>
+              <a:solidFill>
+                <a:schemeClr val="bg1"/>
+              </a:solidFill>
+            </p:spPr>
+            <p:txBody>
+              <a:bodyPr wrap="none" lIns="0" tIns="0" rIns="0" bIns="0" rtlCol="0">
+                <a:spAutoFit/>
+              </a:bodyPr>
+              <a:lstStyle/>
+              <a:p>
+                <a:pPr/>
+                <a14:m>
+                  <m:oMathPara xmlns:m="http://schemas.openxmlformats.org/officeDocument/2006/math">
+                    <m:oMath>
+                      <m:r>
+                        <a:rPr lang="en-US" sz="2400" b="0" i="1" smtClean="0">
+                          <a:latin typeface="Cambria Math" panose="02040503050406030204" pitchFamily="18" charset="0"/>
+                        </a:rPr>
+                        <m:t>𝑣</m:t>
+                      </m:r>
+                    </m:oMath>
+                  </m:oMathPara>
+                </a14:m>
+                <a:endParaRPr lang="en-IN" sz="2400" dirty="0"/>
+              </a:p>
+            </p:txBody>
+          </p:sp>
+        </mc:Choice>
+        <mc:Fallback>
+          <p:sp>
+            <p:nvSpPr>
+              <p:cNvPr id="8" name="TextBox 7">
+                <a:extLst>
+                  <a:ext uri="{FF2B5EF4-FFF2-40B4-BE49-F238E27FC236}">
+                    <a16:creationId xmlns:a16="http://schemas.microsoft.com/office/drawing/2014/main" id="{13A18735-D52F-839F-48AE-791746F3FCD8}"/>
+                  </a:ext>
+                </a:extLst>
+              </p:cNvPr>
+              <p:cNvSpPr txBox="1">
+                <a:spLocks noRot="1" noChangeAspect="1" noMove="1" noResize="1" noEditPoints="1" noAdjustHandles="1" noChangeArrowheads="1" noChangeShapeType="1" noTextEdit="1"/>
+              </p:cNvSpPr>
+              <p:nvPr/>
+            </p:nvSpPr>
+            <p:spPr>
+              <a:xfrm>
+                <a:off x="4172248" y="4566205"/>
+                <a:ext cx="244682" cy="369332"/>
+              </a:xfrm>
+              <a:prstGeom prst="rect">
+                <a:avLst/>
+              </a:prstGeom>
+              <a:blipFill>
+                <a:blip r:embed="rId4"/>
+                <a:stretch>
+                  <a:fillRect l="-17073" r="-12195"/>
+                </a:stretch>
+              </a:blipFill>
+            </p:spPr>
+            <p:txBody>
+              <a:bodyPr/>
+              <a:lstStyle/>
+              <a:p>
+                <a:r>
+                  <a:rPr lang="en-IN">
+                    <a:noFill/>
+                  </a:rPr>
+                  <a:t> </a:t>
+                </a:r>
+              </a:p>
+            </p:txBody>
+          </p:sp>
+        </mc:Fallback>
+      </mc:AlternateContent>
+      <p:cxnSp>
+        <p:nvCxnSpPr>
+          <p:cNvPr id="13" name="Straight Arrow Connector 12">
+            <a:extLst>
+              <a:ext uri="{FF2B5EF4-FFF2-40B4-BE49-F238E27FC236}">
+                <a16:creationId xmlns:a16="http://schemas.microsoft.com/office/drawing/2014/main" id="{26A99968-D0B6-D8B9-16CF-E4E770A9F8D0}"/>
+              </a:ext>
+            </a:extLst>
+          </p:cNvPr>
+          <p:cNvCxnSpPr/>
+          <p:nvPr/>
+        </p:nvCxnSpPr>
+        <p:spPr>
+          <a:xfrm>
+            <a:off x="5676900" y="5120203"/>
+            <a:ext cx="419100" cy="0"/>
+          </a:xfrm>
+          <a:prstGeom prst="straightConnector1">
+            <a:avLst/>
+          </a:prstGeom>
+          <a:ln w="12700">
+            <a:solidFill>
+              <a:schemeClr val="tx1"/>
+            </a:solidFill>
+            <a:tailEnd type="triangle"/>
+          </a:ln>
+        </p:spPr>
+        <p:style>
+          <a:lnRef idx="1">
+            <a:schemeClr val="accent1"/>
+          </a:lnRef>
+          <a:fillRef idx="0">
+            <a:schemeClr val="accent1"/>
+          </a:fillRef>
+          <a:effectRef idx="0">
+            <a:schemeClr val="accent1"/>
+          </a:effectRef>
+          <a:fontRef idx="minor">
+            <a:schemeClr val="tx1"/>
+          </a:fontRef>
+        </p:style>
+      </p:cxnSp>
+      <p:cxnSp>
+        <p:nvCxnSpPr>
+          <p:cNvPr id="14" name="Straight Arrow Connector 13">
+            <a:extLst>
+              <a:ext uri="{FF2B5EF4-FFF2-40B4-BE49-F238E27FC236}">
+                <a16:creationId xmlns:a16="http://schemas.microsoft.com/office/drawing/2014/main" id="{B3F5C09C-64BB-3CF4-C7FE-862ACA8F55DD}"/>
+              </a:ext>
+            </a:extLst>
+          </p:cNvPr>
+          <p:cNvCxnSpPr>
+            <a:cxnSpLocks/>
+          </p:cNvCxnSpPr>
+          <p:nvPr/>
+        </p:nvCxnSpPr>
+        <p:spPr>
+          <a:xfrm flipH="1">
+            <a:off x="6348425" y="5120203"/>
+            <a:ext cx="419100" cy="0"/>
+          </a:xfrm>
+          <a:prstGeom prst="straightConnector1">
+            <a:avLst/>
+          </a:prstGeom>
+          <a:ln w="12700">
+            <a:solidFill>
+              <a:schemeClr val="tx1"/>
+            </a:solidFill>
+            <a:tailEnd type="triangle"/>
+          </a:ln>
+        </p:spPr>
+        <p:style>
+          <a:lnRef idx="1">
+            <a:schemeClr val="accent1"/>
+          </a:lnRef>
+          <a:fillRef idx="0">
+            <a:schemeClr val="accent1"/>
+          </a:fillRef>
+          <a:effectRef idx="0">
+            <a:schemeClr val="accent1"/>
+          </a:effectRef>
+          <a:fontRef idx="minor">
+            <a:schemeClr val="tx1"/>
+          </a:fontRef>
+        </p:style>
+      </p:cxnSp>
+      <mc:AlternateContent xmlns:mc="http://schemas.openxmlformats.org/markup-compatibility/2006">
+        <mc:Choice xmlns:a14="http://schemas.microsoft.com/office/drawing/2010/main" Requires="a14">
+          <p:sp>
+            <p:nvSpPr>
+              <p:cNvPr id="16" name="TextBox 15">
+                <a:extLst>
+                  <a:ext uri="{FF2B5EF4-FFF2-40B4-BE49-F238E27FC236}">
+                    <a16:creationId xmlns:a16="http://schemas.microsoft.com/office/drawing/2014/main" id="{3B25B025-2924-3CA3-0FEC-2BE253D6B026}"/>
+                  </a:ext>
+                </a:extLst>
+              </p:cNvPr>
+              <p:cNvSpPr txBox="1"/>
+              <p:nvPr/>
+            </p:nvSpPr>
+            <p:spPr>
+              <a:xfrm>
+                <a:off x="6053724" y="5115609"/>
+                <a:ext cx="337657" cy="369332"/>
+              </a:xfrm>
+              <a:prstGeom prst="rect">
+                <a:avLst/>
+              </a:prstGeom>
+              <a:noFill/>
+            </p:spPr>
+            <p:txBody>
+              <a:bodyPr wrap="none" lIns="0" tIns="0" rIns="0" bIns="0" rtlCol="0">
+                <a:spAutoFit/>
+              </a:bodyPr>
+              <a:lstStyle/>
+              <a:p>
+                <a:pPr/>
+                <a:r>
+                  <a:rPr lang="en-US" sz="2400" b="0" dirty="0"/>
+                  <a:t>d</a:t>
+                </a:r>
+                <a14:m>
+                  <m:oMath xmlns:m="http://schemas.openxmlformats.org/officeDocument/2006/math">
+                    <m:r>
+                      <a:rPr lang="en-US" sz="2400" b="0" i="1" smtClean="0">
+                        <a:latin typeface="Cambria Math" panose="02040503050406030204" pitchFamily="18" charset="0"/>
+                      </a:rPr>
+                      <m:t>𝑣</m:t>
+                    </m:r>
+                  </m:oMath>
+                </a14:m>
+                <a:endParaRPr lang="en-IN" sz="2400" dirty="0"/>
+              </a:p>
+            </p:txBody>
+          </p:sp>
+        </mc:Choice>
+        <mc:Fallback>
+          <p:sp>
+            <p:nvSpPr>
+              <p:cNvPr id="16" name="TextBox 15">
+                <a:extLst>
+                  <a:ext uri="{FF2B5EF4-FFF2-40B4-BE49-F238E27FC236}">
+                    <a16:creationId xmlns:a16="http://schemas.microsoft.com/office/drawing/2014/main" id="{3B25B025-2924-3CA3-0FEC-2BE253D6B026}"/>
+                  </a:ext>
+                </a:extLst>
+              </p:cNvPr>
+              <p:cNvSpPr txBox="1">
+                <a:spLocks noRot="1" noChangeAspect="1" noMove="1" noResize="1" noEditPoints="1" noAdjustHandles="1" noChangeArrowheads="1" noChangeShapeType="1" noTextEdit="1"/>
+              </p:cNvSpPr>
+              <p:nvPr/>
+            </p:nvSpPr>
+            <p:spPr>
+              <a:xfrm>
+                <a:off x="6053724" y="5115609"/>
+                <a:ext cx="337657" cy="369332"/>
+              </a:xfrm>
+              <a:prstGeom prst="rect">
+                <a:avLst/>
+              </a:prstGeom>
+              <a:blipFill>
+                <a:blip r:embed="rId5"/>
+                <a:stretch>
+                  <a:fillRect l="-54545" t="-24590" r="-20000" b="-49180"/>
+                </a:stretch>
+              </a:blipFill>
+            </p:spPr>
+            <p:txBody>
+              <a:bodyPr/>
+              <a:lstStyle/>
+              <a:p>
+                <a:r>
+                  <a:rPr lang="en-IN">
+                    <a:noFill/>
+                  </a:rPr>
+                  <a:t> </a:t>
+                </a:r>
+              </a:p>
+            </p:txBody>
+          </p:sp>
+        </mc:Fallback>
+      </mc:AlternateContent>
+      <mc:AlternateContent xmlns:mc="http://schemas.openxmlformats.org/markup-compatibility/2006">
+        <mc:Choice xmlns:a14="http://schemas.microsoft.com/office/drawing/2010/main" Requires="a14">
+          <p:sp>
+            <p:nvSpPr>
+              <p:cNvPr id="17" name="TextBox 16">
+                <a:extLst>
+                  <a:ext uri="{FF2B5EF4-FFF2-40B4-BE49-F238E27FC236}">
+                    <a16:creationId xmlns:a16="http://schemas.microsoft.com/office/drawing/2014/main" id="{D1A2CBCB-5241-A7A3-8B81-81950129526B}"/>
+                  </a:ext>
+                </a:extLst>
+              </p:cNvPr>
+              <p:cNvSpPr txBox="1"/>
+              <p:nvPr/>
+            </p:nvSpPr>
+            <p:spPr>
+              <a:xfrm>
+                <a:off x="2150970" y="1181100"/>
+                <a:ext cx="450830" cy="524118"/>
+              </a:xfrm>
+              <a:prstGeom prst="rect">
+                <a:avLst/>
+              </a:prstGeom>
+              <a:noFill/>
+            </p:spPr>
+            <p:txBody>
+              <a:bodyPr wrap="none" lIns="0" tIns="0" rIns="0" bIns="0" rtlCol="0">
+                <a:spAutoFit/>
+              </a:bodyPr>
+              <a:lstStyle/>
+              <a:p>
+                <a14:m>
+                  <m:oMathPara xmlns:m="http://schemas.openxmlformats.org/officeDocument/2006/math">
+                    <m:oMath>
+                      <m:f>
+                        <m:fPr>
+                          <m:ctrlPr>
+                            <a:rPr lang="en-US" b="0" i="1" smtClean="0">
+                              <a:latin typeface="Cambria Math" panose="02040503050406030204" pitchFamily="18" charset="0"/>
+                            </a:rPr>
+                          </m:ctrlPr>
+                        </m:fPr>
+                        <m:num>
+                          <m:r>
+                            <a:rPr lang="en-US" b="0" i="1" smtClean="0">
+                              <a:latin typeface="Cambria Math" panose="02040503050406030204" pitchFamily="18" charset="0"/>
+                            </a:rPr>
+                            <m:t>𝑑</m:t>
+                          </m:r>
+                          <m:sSub>
+                            <m:sSubPr>
+                              <m:ctrlPr>
+                                <a:rPr lang="en-US" b="0" i="1" smtClean="0">
+                                  <a:latin typeface="Cambria Math" panose="02040503050406030204" pitchFamily="18" charset="0"/>
+                                </a:rPr>
+                              </m:ctrlPr>
+                            </m:sSubPr>
+                            <m:e>
+                              <m:r>
+                                <a:rPr lang="en-US" b="0" i="1" smtClean="0">
+                                  <a:latin typeface="Cambria Math" panose="02040503050406030204" pitchFamily="18" charset="0"/>
+                                </a:rPr>
+                                <m:t>𝑁</m:t>
+                              </m:r>
+                            </m:e>
+                            <m:sub>
+                              <m:r>
+                                <a:rPr lang="en-US" b="0" i="1" smtClean="0">
+                                  <a:latin typeface="Cambria Math" panose="02040503050406030204" pitchFamily="18" charset="0"/>
+                                </a:rPr>
+                                <m:t>𝑣</m:t>
+                              </m:r>
+                            </m:sub>
+                          </m:sSub>
+                        </m:num>
+                        <m:den>
+                          <m:r>
+                            <a:rPr lang="en-US" b="0" i="1" smtClean="0">
+                              <a:latin typeface="Cambria Math" panose="02040503050406030204" pitchFamily="18" charset="0"/>
+                            </a:rPr>
+                            <m:t>𝑑𝑣</m:t>
+                          </m:r>
+                        </m:den>
+                      </m:f>
+                    </m:oMath>
+                  </m:oMathPara>
+                </a14:m>
+                <a:endParaRPr lang="en-IN" dirty="0"/>
+              </a:p>
+            </p:txBody>
+          </p:sp>
+        </mc:Choice>
+        <mc:Fallback>
+          <p:sp>
+            <p:nvSpPr>
+              <p:cNvPr id="17" name="TextBox 16">
+                <a:extLst>
+                  <a:ext uri="{FF2B5EF4-FFF2-40B4-BE49-F238E27FC236}">
+                    <a16:creationId xmlns:a16="http://schemas.microsoft.com/office/drawing/2014/main" id="{D1A2CBCB-5241-A7A3-8B81-81950129526B}"/>
+                  </a:ext>
+                </a:extLst>
+              </p:cNvPr>
+              <p:cNvSpPr txBox="1">
+                <a:spLocks noRot="1" noChangeAspect="1" noMove="1" noResize="1" noEditPoints="1" noAdjustHandles="1" noChangeArrowheads="1" noChangeShapeType="1" noTextEdit="1"/>
+              </p:cNvSpPr>
+              <p:nvPr/>
+            </p:nvSpPr>
+            <p:spPr>
+              <a:xfrm>
+                <a:off x="2150970" y="1181100"/>
+                <a:ext cx="450830" cy="524118"/>
+              </a:xfrm>
+              <a:prstGeom prst="rect">
+                <a:avLst/>
+              </a:prstGeom>
+              <a:blipFill>
+                <a:blip r:embed="rId6"/>
+                <a:stretch>
+                  <a:fillRect/>
+                </a:stretch>
+              </a:blipFill>
+            </p:spPr>
+            <p:txBody>
+              <a:bodyPr/>
+              <a:lstStyle/>
+              <a:p>
+                <a:r>
+                  <a:rPr lang="en-IN">
+                    <a:noFill/>
+                  </a:rPr>
+                  <a:t> </a:t>
+                </a:r>
+              </a:p>
+            </p:txBody>
+          </p:sp>
+        </mc:Fallback>
+      </mc:AlternateContent>
+    </p:spTree>
+    <p:extLst>
+      <p:ext uri="{BB962C8B-B14F-4D97-AF65-F5344CB8AC3E}">
+        <p14:creationId xmlns:p14="http://schemas.microsoft.com/office/powerpoint/2010/main" val="1641853962"/>
       </p:ext>
     </p:extLst>
   </p:cSld>

--- a/U1-Distribution-of-Velocities/figures/all-figs.pptx
+++ b/U1-Distribution-of-Velocities/figures/all-figs.pptx
@@ -9,6 +9,7 @@
     <p:sldId id="257" r:id="rId3"/>
     <p:sldId id="258" r:id="rId4"/>
     <p:sldId id="259" r:id="rId5"/>
+    <p:sldId id="260" r:id="rId6"/>
   </p:sldIdLst>
   <p:sldSz cx="12192000" cy="6858000"/>
   <p:notesSz cx="6858000" cy="9144000"/>
@@ -275,7 +276,7 @@
           <a:p>
             <a:fld id="{B47390B5-D7E4-4A9A-ABAD-920B3BD530F5}" type="datetimeFigureOut">
               <a:rPr lang="en-IN" smtClean="0"/>
-              <a:t>25-08-2026</a:t>
+              <a:t>27-08-2026</a:t>
             </a:fld>
             <a:endParaRPr lang="en-IN"/>
           </a:p>
@@ -475,7 +476,7 @@
           <a:p>
             <a:fld id="{B47390B5-D7E4-4A9A-ABAD-920B3BD530F5}" type="datetimeFigureOut">
               <a:rPr lang="en-IN" smtClean="0"/>
-              <a:t>25-08-2026</a:t>
+              <a:t>27-08-2026</a:t>
             </a:fld>
             <a:endParaRPr lang="en-IN"/>
           </a:p>
@@ -685,7 +686,7 @@
           <a:p>
             <a:fld id="{B47390B5-D7E4-4A9A-ABAD-920B3BD530F5}" type="datetimeFigureOut">
               <a:rPr lang="en-IN" smtClean="0"/>
-              <a:t>25-08-2026</a:t>
+              <a:t>27-08-2026</a:t>
             </a:fld>
             <a:endParaRPr lang="en-IN"/>
           </a:p>
@@ -885,7 +886,7 @@
           <a:p>
             <a:fld id="{B47390B5-D7E4-4A9A-ABAD-920B3BD530F5}" type="datetimeFigureOut">
               <a:rPr lang="en-IN" smtClean="0"/>
-              <a:t>25-08-2026</a:t>
+              <a:t>27-08-2026</a:t>
             </a:fld>
             <a:endParaRPr lang="en-IN"/>
           </a:p>
@@ -1161,7 +1162,7 @@
           <a:p>
             <a:fld id="{B47390B5-D7E4-4A9A-ABAD-920B3BD530F5}" type="datetimeFigureOut">
               <a:rPr lang="en-IN" smtClean="0"/>
-              <a:t>25-08-2026</a:t>
+              <a:t>27-08-2026</a:t>
             </a:fld>
             <a:endParaRPr lang="en-IN"/>
           </a:p>
@@ -1429,7 +1430,7 @@
           <a:p>
             <a:fld id="{B47390B5-D7E4-4A9A-ABAD-920B3BD530F5}" type="datetimeFigureOut">
               <a:rPr lang="en-IN" smtClean="0"/>
-              <a:t>25-08-2026</a:t>
+              <a:t>27-08-2026</a:t>
             </a:fld>
             <a:endParaRPr lang="en-IN"/>
           </a:p>
@@ -1844,7 +1845,7 @@
           <a:p>
             <a:fld id="{B47390B5-D7E4-4A9A-ABAD-920B3BD530F5}" type="datetimeFigureOut">
               <a:rPr lang="en-IN" smtClean="0"/>
-              <a:t>25-08-2026</a:t>
+              <a:t>27-08-2026</a:t>
             </a:fld>
             <a:endParaRPr lang="en-IN"/>
           </a:p>
@@ -1986,7 +1987,7 @@
           <a:p>
             <a:fld id="{B47390B5-D7E4-4A9A-ABAD-920B3BD530F5}" type="datetimeFigureOut">
               <a:rPr lang="en-IN" smtClean="0"/>
-              <a:t>25-08-2026</a:t>
+              <a:t>27-08-2026</a:t>
             </a:fld>
             <a:endParaRPr lang="en-IN"/>
           </a:p>
@@ -2099,7 +2100,7 @@
           <a:p>
             <a:fld id="{B47390B5-D7E4-4A9A-ABAD-920B3BD530F5}" type="datetimeFigureOut">
               <a:rPr lang="en-IN" smtClean="0"/>
-              <a:t>25-08-2026</a:t>
+              <a:t>27-08-2026</a:t>
             </a:fld>
             <a:endParaRPr lang="en-IN"/>
           </a:p>
@@ -2412,7 +2413,7 @@
           <a:p>
             <a:fld id="{B47390B5-D7E4-4A9A-ABAD-920B3BD530F5}" type="datetimeFigureOut">
               <a:rPr lang="en-IN" smtClean="0"/>
-              <a:t>25-08-2026</a:t>
+              <a:t>27-08-2026</a:t>
             </a:fld>
             <a:endParaRPr lang="en-IN"/>
           </a:p>
@@ -2701,7 +2702,7 @@
           <a:p>
             <a:fld id="{B47390B5-D7E4-4A9A-ABAD-920B3BD530F5}" type="datetimeFigureOut">
               <a:rPr lang="en-IN" smtClean="0"/>
-              <a:t>25-08-2026</a:t>
+              <a:t>27-08-2026</a:t>
             </a:fld>
             <a:endParaRPr lang="en-IN"/>
           </a:p>
@@ -2944,7 +2945,7 @@
           <a:p>
             <a:fld id="{B47390B5-D7E4-4A9A-ABAD-920B3BD530F5}" type="datetimeFigureOut">
               <a:rPr lang="en-IN" smtClean="0"/>
-              <a:t>25-08-2026</a:t>
+              <a:t>27-08-2026</a:t>
             </a:fld>
             <a:endParaRPr lang="en-IN"/>
           </a:p>
@@ -5918,8 +5919,8 @@
           </a:fontRef>
         </p:style>
       </p:cxnSp>
-      <mc:AlternateContent xmlns:mc="http://schemas.openxmlformats.org/markup-compatibility/2006">
-        <mc:Choice xmlns:a14="http://schemas.microsoft.com/office/drawing/2010/main" Requires="a14">
+      <mc:AlternateContent xmlns:mc="http://schemas.openxmlformats.org/markup-compatibility/2006" xmlns:a14="http://schemas.microsoft.com/office/drawing/2010/main">
+        <mc:Choice Requires="a14">
           <p:sp>
             <p:nvSpPr>
               <p:cNvPr id="12" name="TextBox 11">
@@ -5978,7 +5979,7 @@
             </p:txBody>
           </p:sp>
         </mc:Choice>
-        <mc:Fallback>
+        <mc:Fallback xmlns="">
           <p:sp>
             <p:nvSpPr>
               <p:cNvPr id="12" name="TextBox 11">
@@ -6023,8 +6024,8 @@
           </p:sp>
         </mc:Fallback>
       </mc:AlternateContent>
-      <mc:AlternateContent xmlns:mc="http://schemas.openxmlformats.org/markup-compatibility/2006">
-        <mc:Choice xmlns:a14="http://schemas.microsoft.com/office/drawing/2010/main" Requires="a14">
+      <mc:AlternateContent xmlns:mc="http://schemas.openxmlformats.org/markup-compatibility/2006" xmlns:a14="http://schemas.microsoft.com/office/drawing/2010/main">
+        <mc:Choice Requires="a14">
           <p:sp>
             <p:nvSpPr>
               <p:cNvPr id="14" name="TextBox 13">
@@ -6053,7 +6054,6 @@
               </a:bodyPr>
               <a:lstStyle/>
               <a:p>
-                <a:pPr/>
                 <a14:m>
                   <m:oMath xmlns:m="http://schemas.openxmlformats.org/officeDocument/2006/math">
                     <m:acc>
@@ -6107,7 +6107,7 @@
             </p:txBody>
           </p:sp>
         </mc:Choice>
-        <mc:Fallback>
+        <mc:Fallback xmlns="">
           <p:sp>
             <p:nvSpPr>
               <p:cNvPr id="14" name="TextBox 13">
@@ -6152,8 +6152,8 @@
           </p:sp>
         </mc:Fallback>
       </mc:AlternateContent>
-      <mc:AlternateContent xmlns:mc="http://schemas.openxmlformats.org/markup-compatibility/2006">
-        <mc:Choice xmlns:a14="http://schemas.microsoft.com/office/drawing/2010/main" Requires="a14">
+      <mc:AlternateContent xmlns:mc="http://schemas.openxmlformats.org/markup-compatibility/2006" xmlns:a14="http://schemas.microsoft.com/office/drawing/2010/main">
+        <mc:Choice Requires="a14">
           <p:sp>
             <p:nvSpPr>
               <p:cNvPr id="18" name="TextBox 17">
@@ -6219,7 +6219,7 @@
             </p:txBody>
           </p:sp>
         </mc:Choice>
-        <mc:Fallback>
+        <mc:Fallback xmlns="">
           <p:sp>
             <p:nvSpPr>
               <p:cNvPr id="18" name="TextBox 17">
@@ -6264,8 +6264,8 @@
           </p:sp>
         </mc:Fallback>
       </mc:AlternateContent>
-      <mc:AlternateContent xmlns:mc="http://schemas.openxmlformats.org/markup-compatibility/2006">
-        <mc:Choice xmlns:a14="http://schemas.microsoft.com/office/drawing/2010/main" Requires="a14">
+      <mc:AlternateContent xmlns:mc="http://schemas.openxmlformats.org/markup-compatibility/2006" xmlns:a14="http://schemas.microsoft.com/office/drawing/2010/main">
+        <mc:Choice Requires="a14">
           <p:sp>
             <p:nvSpPr>
               <p:cNvPr id="20" name="TextBox 19">
@@ -6331,7 +6331,7 @@
             </p:txBody>
           </p:sp>
         </mc:Choice>
-        <mc:Fallback>
+        <mc:Fallback xmlns="">
           <p:sp>
             <p:nvSpPr>
               <p:cNvPr id="20" name="TextBox 19">
@@ -6551,8 +6551,8 @@
           </a:p>
         </p:txBody>
       </p:sp>
-      <mc:AlternateContent xmlns:mc="http://schemas.openxmlformats.org/markup-compatibility/2006">
-        <mc:Choice xmlns:a14="http://schemas.microsoft.com/office/drawing/2010/main" Requires="a14">
+      <mc:AlternateContent xmlns:mc="http://schemas.openxmlformats.org/markup-compatibility/2006" xmlns:a14="http://schemas.microsoft.com/office/drawing/2010/main">
+        <mc:Choice Requires="a14">
           <p:sp>
             <p:nvSpPr>
               <p:cNvPr id="6" name="TextBox 5">
@@ -6599,7 +6599,7 @@
             </p:txBody>
           </p:sp>
         </mc:Choice>
-        <mc:Fallback>
+        <mc:Fallback xmlns="">
           <p:sp>
             <p:nvSpPr>
               <p:cNvPr id="6" name="TextBox 5">
@@ -6689,8 +6689,8 @@
           </a:fontRef>
         </p:style>
       </p:cxnSp>
-      <mc:AlternateContent xmlns:mc="http://schemas.openxmlformats.org/markup-compatibility/2006">
-        <mc:Choice xmlns:a14="http://schemas.microsoft.com/office/drawing/2010/main" Requires="a14">
+      <mc:AlternateContent xmlns:mc="http://schemas.openxmlformats.org/markup-compatibility/2006" xmlns:a14="http://schemas.microsoft.com/office/drawing/2010/main">
+        <mc:Choice Requires="a14">
           <p:sp>
             <p:nvSpPr>
               <p:cNvPr id="8" name="TextBox 7">
@@ -6739,7 +6739,7 @@
             </p:txBody>
           </p:sp>
         </mc:Choice>
-        <mc:Fallback>
+        <mc:Fallback xmlns="">
           <p:sp>
             <p:nvSpPr>
               <p:cNvPr id="8" name="TextBox 7">
@@ -6870,8 +6870,8 @@
           </a:fontRef>
         </p:style>
       </p:cxnSp>
-      <mc:AlternateContent xmlns:mc="http://schemas.openxmlformats.org/markup-compatibility/2006">
-        <mc:Choice xmlns:a14="http://schemas.microsoft.com/office/drawing/2010/main" Requires="a14">
+      <mc:AlternateContent xmlns:mc="http://schemas.openxmlformats.org/markup-compatibility/2006" xmlns:a14="http://schemas.microsoft.com/office/drawing/2010/main">
+        <mc:Choice Requires="a14">
           <p:sp>
             <p:nvSpPr>
               <p:cNvPr id="16" name="TextBox 15">
@@ -6900,7 +6900,6 @@
               </a:bodyPr>
               <a:lstStyle/>
               <a:p>
-                <a:pPr/>
                 <a:r>
                   <a:rPr lang="en-US" sz="2400" b="0" dirty="0"/>
                   <a:t>d</a:t>
@@ -6920,7 +6919,7 @@
             </p:txBody>
           </p:sp>
         </mc:Choice>
-        <mc:Fallback>
+        <mc:Fallback xmlns="">
           <p:sp>
             <p:nvSpPr>
               <p:cNvPr id="16" name="TextBox 15">
@@ -6965,8 +6964,8 @@
           </p:sp>
         </mc:Fallback>
       </mc:AlternateContent>
-      <mc:AlternateContent xmlns:mc="http://schemas.openxmlformats.org/markup-compatibility/2006">
-        <mc:Choice xmlns:a14="http://schemas.microsoft.com/office/drawing/2010/main" Requires="a14">
+      <mc:AlternateContent xmlns:mc="http://schemas.openxmlformats.org/markup-compatibility/2006" xmlns:a14="http://schemas.microsoft.com/office/drawing/2010/main">
+        <mc:Choice Requires="a14">
           <p:sp>
             <p:nvSpPr>
               <p:cNvPr id="17" name="TextBox 16">
@@ -6995,6 +6994,7 @@
               </a:bodyPr>
               <a:lstStyle/>
               <a:p>
+                <a:pPr/>
                 <a14:m>
                   <m:oMathPara xmlns:m="http://schemas.openxmlformats.org/officeDocument/2006/math">
                     <m:oMath>
@@ -7056,7 +7056,7 @@
             </p:txBody>
           </p:sp>
         </mc:Choice>
-        <mc:Fallback>
+        <mc:Fallback xmlns="">
           <p:sp>
             <p:nvSpPr>
               <p:cNvPr id="17" name="TextBox 16">
@@ -7105,6 +7105,4047 @@
     <p:extLst>
       <p:ext uri="{BB962C8B-B14F-4D97-AF65-F5344CB8AC3E}">
         <p14:creationId xmlns:p14="http://schemas.microsoft.com/office/powerpoint/2010/main" val="1641853962"/>
+      </p:ext>
+    </p:extLst>
+  </p:cSld>
+  <p:clrMapOvr>
+    <a:masterClrMapping/>
+  </p:clrMapOvr>
+</p:sld>
+</file>
+
+<file path=ppt/slides/slide5.xml><?xml version="1.0" encoding="utf-8"?>
+<p:sld xmlns:a="http://schemas.openxmlformats.org/drawingml/2006/main" xmlns:r="http://schemas.openxmlformats.org/officeDocument/2006/relationships" xmlns:p="http://schemas.openxmlformats.org/presentationml/2006/main">
+  <p:cSld>
+    <p:spTree>
+      <p:nvGrpSpPr>
+        <p:cNvPr id="1" name=""/>
+        <p:cNvGrpSpPr/>
+        <p:nvPr/>
+      </p:nvGrpSpPr>
+      <p:grpSpPr>
+        <a:xfrm>
+          <a:off x="0" y="0"/>
+          <a:ext cx="0" cy="0"/>
+          <a:chOff x="0" y="0"/>
+          <a:chExt cx="0" cy="0"/>
+        </a:xfrm>
+      </p:grpSpPr>
+      <p:sp>
+        <p:nvSpPr>
+          <p:cNvPr id="2" name="Oval 1">
+            <a:extLst>
+              <a:ext uri="{FF2B5EF4-FFF2-40B4-BE49-F238E27FC236}">
+                <a16:creationId xmlns:a16="http://schemas.microsoft.com/office/drawing/2014/main" id="{9063619A-160E-8817-590B-ED216CF5DA63}"/>
+              </a:ext>
+            </a:extLst>
+          </p:cNvPr>
+          <p:cNvSpPr/>
+          <p:nvPr/>
+        </p:nvSpPr>
+        <p:spPr>
+          <a:xfrm>
+            <a:off x="2868440" y="1692876"/>
+            <a:ext cx="211288" cy="211288"/>
+          </a:xfrm>
+          <a:prstGeom prst="ellipse">
+            <a:avLst/>
+          </a:prstGeom>
+          <a:gradFill flip="none" rotWithShape="1">
+            <a:gsLst>
+              <a:gs pos="0">
+                <a:schemeClr val="accent1">
+                  <a:lumMod val="20000"/>
+                  <a:lumOff val="80000"/>
+                </a:schemeClr>
+              </a:gs>
+              <a:gs pos="39000">
+                <a:srgbClr val="638ACF"/>
+              </a:gs>
+              <a:gs pos="100000">
+                <a:schemeClr val="accent1">
+                  <a:lumMod val="50000"/>
+                </a:schemeClr>
+              </a:gs>
+            </a:gsLst>
+            <a:path path="circle">
+              <a:fillToRect l="100000" b="100000"/>
+            </a:path>
+            <a:tileRect t="-100000" r="-100000"/>
+          </a:gradFill>
+          <a:ln>
+            <a:noFill/>
+          </a:ln>
+        </p:spPr>
+        <p:style>
+          <a:lnRef idx="2">
+            <a:schemeClr val="accent1">
+              <a:shade val="15000"/>
+            </a:schemeClr>
+          </a:lnRef>
+          <a:fillRef idx="1">
+            <a:schemeClr val="accent1"/>
+          </a:fillRef>
+          <a:effectRef idx="0">
+            <a:schemeClr val="accent1"/>
+          </a:effectRef>
+          <a:fontRef idx="minor">
+            <a:schemeClr val="lt1"/>
+          </a:fontRef>
+        </p:style>
+        <p:txBody>
+          <a:bodyPr rtlCol="0" anchor="ctr"/>
+          <a:lstStyle/>
+          <a:p>
+            <a:pPr algn="ctr"/>
+            <a:endParaRPr lang="en-IN"/>
+          </a:p>
+        </p:txBody>
+      </p:sp>
+      <p:sp>
+        <p:nvSpPr>
+          <p:cNvPr id="3" name="Oval 2">
+            <a:extLst>
+              <a:ext uri="{FF2B5EF4-FFF2-40B4-BE49-F238E27FC236}">
+                <a16:creationId xmlns:a16="http://schemas.microsoft.com/office/drawing/2014/main" id="{C1FBAF93-F701-8FE2-2CED-5EE1462FB2A5}"/>
+              </a:ext>
+            </a:extLst>
+          </p:cNvPr>
+          <p:cNvSpPr/>
+          <p:nvPr/>
+        </p:nvSpPr>
+        <p:spPr>
+          <a:xfrm>
+            <a:off x="4495482" y="1378776"/>
+            <a:ext cx="211288" cy="211288"/>
+          </a:xfrm>
+          <a:prstGeom prst="ellipse">
+            <a:avLst/>
+          </a:prstGeom>
+          <a:gradFill flip="none" rotWithShape="1">
+            <a:gsLst>
+              <a:gs pos="0">
+                <a:schemeClr val="accent1">
+                  <a:lumMod val="20000"/>
+                  <a:lumOff val="80000"/>
+                </a:schemeClr>
+              </a:gs>
+              <a:gs pos="39000">
+                <a:srgbClr val="638ACF"/>
+              </a:gs>
+              <a:gs pos="100000">
+                <a:schemeClr val="accent1">
+                  <a:lumMod val="50000"/>
+                </a:schemeClr>
+              </a:gs>
+            </a:gsLst>
+            <a:path path="circle">
+              <a:fillToRect l="100000" b="100000"/>
+            </a:path>
+            <a:tileRect t="-100000" r="-100000"/>
+          </a:gradFill>
+          <a:ln>
+            <a:noFill/>
+          </a:ln>
+        </p:spPr>
+        <p:style>
+          <a:lnRef idx="2">
+            <a:schemeClr val="accent1">
+              <a:shade val="15000"/>
+            </a:schemeClr>
+          </a:lnRef>
+          <a:fillRef idx="1">
+            <a:schemeClr val="accent1"/>
+          </a:fillRef>
+          <a:effectRef idx="0">
+            <a:schemeClr val="accent1"/>
+          </a:effectRef>
+          <a:fontRef idx="minor">
+            <a:schemeClr val="lt1"/>
+          </a:fontRef>
+        </p:style>
+        <p:txBody>
+          <a:bodyPr rtlCol="0" anchor="ctr"/>
+          <a:lstStyle/>
+          <a:p>
+            <a:pPr algn="ctr"/>
+            <a:endParaRPr lang="en-IN"/>
+          </a:p>
+        </p:txBody>
+      </p:sp>
+      <p:sp>
+        <p:nvSpPr>
+          <p:cNvPr id="4" name="Oval 3">
+            <a:extLst>
+              <a:ext uri="{FF2B5EF4-FFF2-40B4-BE49-F238E27FC236}">
+                <a16:creationId xmlns:a16="http://schemas.microsoft.com/office/drawing/2014/main" id="{0AF67D03-E084-5733-9950-7B183F19A6BD}"/>
+              </a:ext>
+            </a:extLst>
+          </p:cNvPr>
+          <p:cNvSpPr/>
+          <p:nvPr/>
+        </p:nvSpPr>
+        <p:spPr>
+          <a:xfrm>
+            <a:off x="3497112" y="2427026"/>
+            <a:ext cx="211288" cy="211288"/>
+          </a:xfrm>
+          <a:prstGeom prst="ellipse">
+            <a:avLst/>
+          </a:prstGeom>
+          <a:gradFill flip="none" rotWithShape="1">
+            <a:gsLst>
+              <a:gs pos="0">
+                <a:schemeClr val="accent1">
+                  <a:lumMod val="20000"/>
+                  <a:lumOff val="80000"/>
+                </a:schemeClr>
+              </a:gs>
+              <a:gs pos="39000">
+                <a:srgbClr val="638ACF"/>
+              </a:gs>
+              <a:gs pos="100000">
+                <a:schemeClr val="accent1">
+                  <a:lumMod val="50000"/>
+                </a:schemeClr>
+              </a:gs>
+            </a:gsLst>
+            <a:path path="circle">
+              <a:fillToRect l="100000" b="100000"/>
+            </a:path>
+            <a:tileRect t="-100000" r="-100000"/>
+          </a:gradFill>
+          <a:ln>
+            <a:noFill/>
+          </a:ln>
+        </p:spPr>
+        <p:style>
+          <a:lnRef idx="2">
+            <a:schemeClr val="accent1">
+              <a:shade val="15000"/>
+            </a:schemeClr>
+          </a:lnRef>
+          <a:fillRef idx="1">
+            <a:schemeClr val="accent1"/>
+          </a:fillRef>
+          <a:effectRef idx="0">
+            <a:schemeClr val="accent1"/>
+          </a:effectRef>
+          <a:fontRef idx="minor">
+            <a:schemeClr val="lt1"/>
+          </a:fontRef>
+        </p:style>
+        <p:txBody>
+          <a:bodyPr rtlCol="0" anchor="ctr"/>
+          <a:lstStyle/>
+          <a:p>
+            <a:pPr algn="ctr"/>
+            <a:endParaRPr lang="en-IN"/>
+          </a:p>
+        </p:txBody>
+      </p:sp>
+      <p:sp>
+        <p:nvSpPr>
+          <p:cNvPr id="5" name="Oval 4">
+            <a:extLst>
+              <a:ext uri="{FF2B5EF4-FFF2-40B4-BE49-F238E27FC236}">
+                <a16:creationId xmlns:a16="http://schemas.microsoft.com/office/drawing/2014/main" id="{40AFAFD1-32E6-E777-2AAF-510CF2BED646}"/>
+              </a:ext>
+            </a:extLst>
+          </p:cNvPr>
+          <p:cNvSpPr/>
+          <p:nvPr/>
+        </p:nvSpPr>
+        <p:spPr>
+          <a:xfrm>
+            <a:off x="4252331" y="1990193"/>
+            <a:ext cx="211288" cy="211288"/>
+          </a:xfrm>
+          <a:prstGeom prst="ellipse">
+            <a:avLst/>
+          </a:prstGeom>
+          <a:gradFill flip="none" rotWithShape="1">
+            <a:gsLst>
+              <a:gs pos="0">
+                <a:schemeClr val="accent1">
+                  <a:lumMod val="20000"/>
+                  <a:lumOff val="80000"/>
+                </a:schemeClr>
+              </a:gs>
+              <a:gs pos="39000">
+                <a:srgbClr val="638ACF"/>
+              </a:gs>
+              <a:gs pos="100000">
+                <a:schemeClr val="accent1">
+                  <a:lumMod val="50000"/>
+                </a:schemeClr>
+              </a:gs>
+            </a:gsLst>
+            <a:path path="circle">
+              <a:fillToRect l="100000" b="100000"/>
+            </a:path>
+            <a:tileRect t="-100000" r="-100000"/>
+          </a:gradFill>
+          <a:ln>
+            <a:noFill/>
+          </a:ln>
+        </p:spPr>
+        <p:style>
+          <a:lnRef idx="2">
+            <a:schemeClr val="accent1">
+              <a:shade val="15000"/>
+            </a:schemeClr>
+          </a:lnRef>
+          <a:fillRef idx="1">
+            <a:schemeClr val="accent1"/>
+          </a:fillRef>
+          <a:effectRef idx="0">
+            <a:schemeClr val="accent1"/>
+          </a:effectRef>
+          <a:fontRef idx="minor">
+            <a:schemeClr val="lt1"/>
+          </a:fontRef>
+        </p:style>
+        <p:txBody>
+          <a:bodyPr rtlCol="0" anchor="ctr"/>
+          <a:lstStyle/>
+          <a:p>
+            <a:pPr algn="ctr"/>
+            <a:endParaRPr lang="en-IN"/>
+          </a:p>
+        </p:txBody>
+      </p:sp>
+      <p:sp>
+        <p:nvSpPr>
+          <p:cNvPr id="6" name="Oval 5">
+            <a:extLst>
+              <a:ext uri="{FF2B5EF4-FFF2-40B4-BE49-F238E27FC236}">
+                <a16:creationId xmlns:a16="http://schemas.microsoft.com/office/drawing/2014/main" id="{C46D434B-5108-683D-959F-43397F1E4AB1}"/>
+              </a:ext>
+            </a:extLst>
+          </p:cNvPr>
+          <p:cNvSpPr/>
+          <p:nvPr/>
+        </p:nvSpPr>
+        <p:spPr>
+          <a:xfrm>
+            <a:off x="2986881" y="3154320"/>
+            <a:ext cx="211288" cy="211288"/>
+          </a:xfrm>
+          <a:prstGeom prst="ellipse">
+            <a:avLst/>
+          </a:prstGeom>
+          <a:gradFill flip="none" rotWithShape="1">
+            <a:gsLst>
+              <a:gs pos="0">
+                <a:schemeClr val="accent1">
+                  <a:lumMod val="20000"/>
+                  <a:lumOff val="80000"/>
+                </a:schemeClr>
+              </a:gs>
+              <a:gs pos="39000">
+                <a:srgbClr val="638ACF"/>
+              </a:gs>
+              <a:gs pos="100000">
+                <a:schemeClr val="accent1">
+                  <a:lumMod val="50000"/>
+                </a:schemeClr>
+              </a:gs>
+            </a:gsLst>
+            <a:path path="circle">
+              <a:fillToRect l="100000" b="100000"/>
+            </a:path>
+            <a:tileRect t="-100000" r="-100000"/>
+          </a:gradFill>
+          <a:ln>
+            <a:noFill/>
+          </a:ln>
+        </p:spPr>
+        <p:style>
+          <a:lnRef idx="2">
+            <a:schemeClr val="accent1">
+              <a:shade val="15000"/>
+            </a:schemeClr>
+          </a:lnRef>
+          <a:fillRef idx="1">
+            <a:schemeClr val="accent1"/>
+          </a:fillRef>
+          <a:effectRef idx="0">
+            <a:schemeClr val="accent1"/>
+          </a:effectRef>
+          <a:fontRef idx="minor">
+            <a:schemeClr val="lt1"/>
+          </a:fontRef>
+        </p:style>
+        <p:txBody>
+          <a:bodyPr rtlCol="0" anchor="ctr"/>
+          <a:lstStyle/>
+          <a:p>
+            <a:pPr algn="ctr"/>
+            <a:endParaRPr lang="en-IN"/>
+          </a:p>
+        </p:txBody>
+      </p:sp>
+      <p:sp>
+        <p:nvSpPr>
+          <p:cNvPr id="7" name="Oval 6">
+            <a:extLst>
+              <a:ext uri="{FF2B5EF4-FFF2-40B4-BE49-F238E27FC236}">
+                <a16:creationId xmlns:a16="http://schemas.microsoft.com/office/drawing/2014/main" id="{11472EB5-B86C-D428-A7CA-467F0CC7D5CD}"/>
+              </a:ext>
+            </a:extLst>
+          </p:cNvPr>
+          <p:cNvSpPr/>
+          <p:nvPr/>
+        </p:nvSpPr>
+        <p:spPr>
+          <a:xfrm>
+            <a:off x="3973758" y="3503141"/>
+            <a:ext cx="211288" cy="211288"/>
+          </a:xfrm>
+          <a:prstGeom prst="ellipse">
+            <a:avLst/>
+          </a:prstGeom>
+          <a:gradFill flip="none" rotWithShape="1">
+            <a:gsLst>
+              <a:gs pos="0">
+                <a:schemeClr val="accent1">
+                  <a:lumMod val="20000"/>
+                  <a:lumOff val="80000"/>
+                </a:schemeClr>
+              </a:gs>
+              <a:gs pos="39000">
+                <a:srgbClr val="638ACF"/>
+              </a:gs>
+              <a:gs pos="100000">
+                <a:schemeClr val="accent1">
+                  <a:lumMod val="50000"/>
+                </a:schemeClr>
+              </a:gs>
+            </a:gsLst>
+            <a:path path="circle">
+              <a:fillToRect l="100000" b="100000"/>
+            </a:path>
+            <a:tileRect t="-100000" r="-100000"/>
+          </a:gradFill>
+          <a:ln>
+            <a:noFill/>
+          </a:ln>
+        </p:spPr>
+        <p:style>
+          <a:lnRef idx="2">
+            <a:schemeClr val="accent1">
+              <a:shade val="15000"/>
+            </a:schemeClr>
+          </a:lnRef>
+          <a:fillRef idx="1">
+            <a:schemeClr val="accent1"/>
+          </a:fillRef>
+          <a:effectRef idx="0">
+            <a:schemeClr val="accent1"/>
+          </a:effectRef>
+          <a:fontRef idx="minor">
+            <a:schemeClr val="lt1"/>
+          </a:fontRef>
+        </p:style>
+        <p:txBody>
+          <a:bodyPr rtlCol="0" anchor="ctr"/>
+          <a:lstStyle/>
+          <a:p>
+            <a:pPr algn="ctr"/>
+            <a:endParaRPr lang="en-IN"/>
+          </a:p>
+        </p:txBody>
+      </p:sp>
+      <p:sp>
+        <p:nvSpPr>
+          <p:cNvPr id="8" name="Oval 7">
+            <a:extLst>
+              <a:ext uri="{FF2B5EF4-FFF2-40B4-BE49-F238E27FC236}">
+                <a16:creationId xmlns:a16="http://schemas.microsoft.com/office/drawing/2014/main" id="{8674934C-1C2D-70EF-2C5F-A1059CB56D2A}"/>
+              </a:ext>
+            </a:extLst>
+          </p:cNvPr>
+          <p:cNvSpPr/>
+          <p:nvPr/>
+        </p:nvSpPr>
+        <p:spPr>
+          <a:xfrm>
+            <a:off x="3204519" y="4071552"/>
+            <a:ext cx="211288" cy="211288"/>
+          </a:xfrm>
+          <a:prstGeom prst="ellipse">
+            <a:avLst/>
+          </a:prstGeom>
+          <a:gradFill flip="none" rotWithShape="1">
+            <a:gsLst>
+              <a:gs pos="0">
+                <a:schemeClr val="accent1">
+                  <a:lumMod val="20000"/>
+                  <a:lumOff val="80000"/>
+                </a:schemeClr>
+              </a:gs>
+              <a:gs pos="39000">
+                <a:srgbClr val="638ACF"/>
+              </a:gs>
+              <a:gs pos="100000">
+                <a:schemeClr val="accent1">
+                  <a:lumMod val="50000"/>
+                </a:schemeClr>
+              </a:gs>
+            </a:gsLst>
+            <a:path path="circle">
+              <a:fillToRect l="100000" b="100000"/>
+            </a:path>
+            <a:tileRect t="-100000" r="-100000"/>
+          </a:gradFill>
+          <a:ln>
+            <a:noFill/>
+          </a:ln>
+        </p:spPr>
+        <p:style>
+          <a:lnRef idx="2">
+            <a:schemeClr val="accent1">
+              <a:shade val="15000"/>
+            </a:schemeClr>
+          </a:lnRef>
+          <a:fillRef idx="1">
+            <a:schemeClr val="accent1"/>
+          </a:fillRef>
+          <a:effectRef idx="0">
+            <a:schemeClr val="accent1"/>
+          </a:effectRef>
+          <a:fontRef idx="minor">
+            <a:schemeClr val="lt1"/>
+          </a:fontRef>
+        </p:style>
+        <p:txBody>
+          <a:bodyPr rtlCol="0" anchor="ctr"/>
+          <a:lstStyle/>
+          <a:p>
+            <a:pPr algn="ctr"/>
+            <a:endParaRPr lang="en-IN"/>
+          </a:p>
+        </p:txBody>
+      </p:sp>
+      <p:sp>
+        <p:nvSpPr>
+          <p:cNvPr id="11" name="Oval 10">
+            <a:extLst>
+              <a:ext uri="{FF2B5EF4-FFF2-40B4-BE49-F238E27FC236}">
+                <a16:creationId xmlns:a16="http://schemas.microsoft.com/office/drawing/2014/main" id="{1372E0C0-5AEE-E8C9-B343-DD9E123C27BE}"/>
+              </a:ext>
+            </a:extLst>
+          </p:cNvPr>
+          <p:cNvSpPr/>
+          <p:nvPr/>
+        </p:nvSpPr>
+        <p:spPr>
+          <a:xfrm>
+            <a:off x="4338894" y="4652319"/>
+            <a:ext cx="211288" cy="211288"/>
+          </a:xfrm>
+          <a:prstGeom prst="ellipse">
+            <a:avLst/>
+          </a:prstGeom>
+          <a:gradFill flip="none" rotWithShape="1">
+            <a:gsLst>
+              <a:gs pos="0">
+                <a:schemeClr val="accent1">
+                  <a:lumMod val="20000"/>
+                  <a:lumOff val="80000"/>
+                </a:schemeClr>
+              </a:gs>
+              <a:gs pos="39000">
+                <a:srgbClr val="638ACF"/>
+              </a:gs>
+              <a:gs pos="100000">
+                <a:schemeClr val="accent1">
+                  <a:lumMod val="50000"/>
+                </a:schemeClr>
+              </a:gs>
+            </a:gsLst>
+            <a:path path="circle">
+              <a:fillToRect l="100000" b="100000"/>
+            </a:path>
+            <a:tileRect t="-100000" r="-100000"/>
+          </a:gradFill>
+          <a:ln>
+            <a:noFill/>
+          </a:ln>
+        </p:spPr>
+        <p:style>
+          <a:lnRef idx="2">
+            <a:schemeClr val="accent1">
+              <a:shade val="15000"/>
+            </a:schemeClr>
+          </a:lnRef>
+          <a:fillRef idx="1">
+            <a:schemeClr val="accent1"/>
+          </a:fillRef>
+          <a:effectRef idx="0">
+            <a:schemeClr val="accent1"/>
+          </a:effectRef>
+          <a:fontRef idx="minor">
+            <a:schemeClr val="lt1"/>
+          </a:fontRef>
+        </p:style>
+        <p:txBody>
+          <a:bodyPr rtlCol="0" anchor="ctr"/>
+          <a:lstStyle/>
+          <a:p>
+            <a:pPr algn="ctr"/>
+            <a:endParaRPr lang="en-IN"/>
+          </a:p>
+        </p:txBody>
+      </p:sp>
+      <p:sp>
+        <p:nvSpPr>
+          <p:cNvPr id="12" name="Oval 11">
+            <a:extLst>
+              <a:ext uri="{FF2B5EF4-FFF2-40B4-BE49-F238E27FC236}">
+                <a16:creationId xmlns:a16="http://schemas.microsoft.com/office/drawing/2014/main" id="{7DDFB920-EB58-B2F5-CA28-53268EFD7DF1}"/>
+              </a:ext>
+            </a:extLst>
+          </p:cNvPr>
+          <p:cNvSpPr/>
+          <p:nvPr/>
+        </p:nvSpPr>
+        <p:spPr>
+          <a:xfrm>
+            <a:off x="4742066" y="3857883"/>
+            <a:ext cx="211288" cy="211288"/>
+          </a:xfrm>
+          <a:prstGeom prst="ellipse">
+            <a:avLst/>
+          </a:prstGeom>
+          <a:gradFill flip="none" rotWithShape="1">
+            <a:gsLst>
+              <a:gs pos="0">
+                <a:schemeClr val="accent1">
+                  <a:lumMod val="20000"/>
+                  <a:lumOff val="80000"/>
+                </a:schemeClr>
+              </a:gs>
+              <a:gs pos="39000">
+                <a:srgbClr val="638ACF"/>
+              </a:gs>
+              <a:gs pos="100000">
+                <a:schemeClr val="accent1">
+                  <a:lumMod val="50000"/>
+                </a:schemeClr>
+              </a:gs>
+            </a:gsLst>
+            <a:path path="circle">
+              <a:fillToRect l="100000" b="100000"/>
+            </a:path>
+            <a:tileRect t="-100000" r="-100000"/>
+          </a:gradFill>
+          <a:ln>
+            <a:noFill/>
+          </a:ln>
+        </p:spPr>
+        <p:style>
+          <a:lnRef idx="2">
+            <a:schemeClr val="accent1">
+              <a:shade val="15000"/>
+            </a:schemeClr>
+          </a:lnRef>
+          <a:fillRef idx="1">
+            <a:schemeClr val="accent1"/>
+          </a:fillRef>
+          <a:effectRef idx="0">
+            <a:schemeClr val="accent1"/>
+          </a:effectRef>
+          <a:fontRef idx="minor">
+            <a:schemeClr val="lt1"/>
+          </a:fontRef>
+        </p:style>
+        <p:txBody>
+          <a:bodyPr rtlCol="0" anchor="ctr"/>
+          <a:lstStyle/>
+          <a:p>
+            <a:pPr algn="ctr"/>
+            <a:endParaRPr lang="en-IN"/>
+          </a:p>
+        </p:txBody>
+      </p:sp>
+      <p:sp>
+        <p:nvSpPr>
+          <p:cNvPr id="13" name="Oval 12">
+            <a:extLst>
+              <a:ext uri="{FF2B5EF4-FFF2-40B4-BE49-F238E27FC236}">
+                <a16:creationId xmlns:a16="http://schemas.microsoft.com/office/drawing/2014/main" id="{43D56427-BE32-05AC-28F5-6EFDD2D951A5}"/>
+              </a:ext>
+            </a:extLst>
+          </p:cNvPr>
+          <p:cNvSpPr/>
+          <p:nvPr/>
+        </p:nvSpPr>
+        <p:spPr>
+          <a:xfrm>
+            <a:off x="6121538" y="4716540"/>
+            <a:ext cx="211288" cy="211288"/>
+          </a:xfrm>
+          <a:prstGeom prst="ellipse">
+            <a:avLst/>
+          </a:prstGeom>
+          <a:gradFill flip="none" rotWithShape="1">
+            <a:gsLst>
+              <a:gs pos="0">
+                <a:schemeClr val="accent1">
+                  <a:lumMod val="20000"/>
+                  <a:lumOff val="80000"/>
+                </a:schemeClr>
+              </a:gs>
+              <a:gs pos="39000">
+                <a:srgbClr val="638ACF"/>
+              </a:gs>
+              <a:gs pos="100000">
+                <a:schemeClr val="accent1">
+                  <a:lumMod val="50000"/>
+                </a:schemeClr>
+              </a:gs>
+            </a:gsLst>
+            <a:path path="circle">
+              <a:fillToRect l="100000" b="100000"/>
+            </a:path>
+            <a:tileRect t="-100000" r="-100000"/>
+          </a:gradFill>
+          <a:ln>
+            <a:noFill/>
+          </a:ln>
+        </p:spPr>
+        <p:style>
+          <a:lnRef idx="2">
+            <a:schemeClr val="accent1">
+              <a:shade val="15000"/>
+            </a:schemeClr>
+          </a:lnRef>
+          <a:fillRef idx="1">
+            <a:schemeClr val="accent1"/>
+          </a:fillRef>
+          <a:effectRef idx="0">
+            <a:schemeClr val="accent1"/>
+          </a:effectRef>
+          <a:fontRef idx="minor">
+            <a:schemeClr val="lt1"/>
+          </a:fontRef>
+        </p:style>
+        <p:txBody>
+          <a:bodyPr rtlCol="0" anchor="ctr"/>
+          <a:lstStyle/>
+          <a:p>
+            <a:pPr algn="ctr"/>
+            <a:endParaRPr lang="en-IN"/>
+          </a:p>
+        </p:txBody>
+      </p:sp>
+      <p:sp>
+        <p:nvSpPr>
+          <p:cNvPr id="14" name="Oval 13">
+            <a:extLst>
+              <a:ext uri="{FF2B5EF4-FFF2-40B4-BE49-F238E27FC236}">
+                <a16:creationId xmlns:a16="http://schemas.microsoft.com/office/drawing/2014/main" id="{540BD889-08F3-6245-D33A-DD83465383BF}"/>
+              </a:ext>
+            </a:extLst>
+          </p:cNvPr>
+          <p:cNvSpPr/>
+          <p:nvPr/>
+        </p:nvSpPr>
+        <p:spPr>
+          <a:xfrm>
+            <a:off x="4696050" y="2423929"/>
+            <a:ext cx="211288" cy="211288"/>
+          </a:xfrm>
+          <a:prstGeom prst="ellipse">
+            <a:avLst/>
+          </a:prstGeom>
+          <a:gradFill flip="none" rotWithShape="1">
+            <a:gsLst>
+              <a:gs pos="0">
+                <a:schemeClr val="accent1">
+                  <a:lumMod val="20000"/>
+                  <a:lumOff val="80000"/>
+                </a:schemeClr>
+              </a:gs>
+              <a:gs pos="39000">
+                <a:srgbClr val="638ACF"/>
+              </a:gs>
+              <a:gs pos="100000">
+                <a:schemeClr val="accent1">
+                  <a:lumMod val="50000"/>
+                </a:schemeClr>
+              </a:gs>
+            </a:gsLst>
+            <a:path path="circle">
+              <a:fillToRect l="100000" b="100000"/>
+            </a:path>
+            <a:tileRect t="-100000" r="-100000"/>
+          </a:gradFill>
+          <a:ln>
+            <a:noFill/>
+          </a:ln>
+        </p:spPr>
+        <p:style>
+          <a:lnRef idx="2">
+            <a:schemeClr val="accent1">
+              <a:shade val="15000"/>
+            </a:schemeClr>
+          </a:lnRef>
+          <a:fillRef idx="1">
+            <a:schemeClr val="accent1"/>
+          </a:fillRef>
+          <a:effectRef idx="0">
+            <a:schemeClr val="accent1"/>
+          </a:effectRef>
+          <a:fontRef idx="minor">
+            <a:schemeClr val="lt1"/>
+          </a:fontRef>
+        </p:style>
+        <p:txBody>
+          <a:bodyPr rtlCol="0" anchor="ctr"/>
+          <a:lstStyle/>
+          <a:p>
+            <a:pPr algn="ctr"/>
+            <a:endParaRPr lang="en-IN"/>
+          </a:p>
+        </p:txBody>
+      </p:sp>
+      <p:sp>
+        <p:nvSpPr>
+          <p:cNvPr id="15" name="Oval 14">
+            <a:extLst>
+              <a:ext uri="{FF2B5EF4-FFF2-40B4-BE49-F238E27FC236}">
+                <a16:creationId xmlns:a16="http://schemas.microsoft.com/office/drawing/2014/main" id="{95333B16-41DA-9C3F-664C-BB71EE8C1475}"/>
+              </a:ext>
+            </a:extLst>
+          </p:cNvPr>
+          <p:cNvSpPr/>
+          <p:nvPr/>
+        </p:nvSpPr>
+        <p:spPr>
+          <a:xfrm>
+            <a:off x="5120574" y="1731766"/>
+            <a:ext cx="211288" cy="211288"/>
+          </a:xfrm>
+          <a:prstGeom prst="ellipse">
+            <a:avLst/>
+          </a:prstGeom>
+          <a:gradFill flip="none" rotWithShape="1">
+            <a:gsLst>
+              <a:gs pos="0">
+                <a:schemeClr val="accent1">
+                  <a:lumMod val="20000"/>
+                  <a:lumOff val="80000"/>
+                </a:schemeClr>
+              </a:gs>
+              <a:gs pos="39000">
+                <a:srgbClr val="638ACF"/>
+              </a:gs>
+              <a:gs pos="100000">
+                <a:schemeClr val="accent1">
+                  <a:lumMod val="50000"/>
+                </a:schemeClr>
+              </a:gs>
+            </a:gsLst>
+            <a:path path="circle">
+              <a:fillToRect l="100000" b="100000"/>
+            </a:path>
+            <a:tileRect t="-100000" r="-100000"/>
+          </a:gradFill>
+          <a:ln>
+            <a:noFill/>
+          </a:ln>
+        </p:spPr>
+        <p:style>
+          <a:lnRef idx="2">
+            <a:schemeClr val="accent1">
+              <a:shade val="15000"/>
+            </a:schemeClr>
+          </a:lnRef>
+          <a:fillRef idx="1">
+            <a:schemeClr val="accent1"/>
+          </a:fillRef>
+          <a:effectRef idx="0">
+            <a:schemeClr val="accent1"/>
+          </a:effectRef>
+          <a:fontRef idx="minor">
+            <a:schemeClr val="lt1"/>
+          </a:fontRef>
+        </p:style>
+        <p:txBody>
+          <a:bodyPr rtlCol="0" anchor="ctr"/>
+          <a:lstStyle/>
+          <a:p>
+            <a:pPr algn="ctr"/>
+            <a:endParaRPr lang="en-IN"/>
+          </a:p>
+        </p:txBody>
+      </p:sp>
+      <p:sp>
+        <p:nvSpPr>
+          <p:cNvPr id="16" name="Oval 15">
+            <a:extLst>
+              <a:ext uri="{FF2B5EF4-FFF2-40B4-BE49-F238E27FC236}">
+                <a16:creationId xmlns:a16="http://schemas.microsoft.com/office/drawing/2014/main" id="{265836BF-DDD7-13D0-5F31-831C40A2EB27}"/>
+              </a:ext>
+            </a:extLst>
+          </p:cNvPr>
+          <p:cNvSpPr/>
+          <p:nvPr/>
+        </p:nvSpPr>
+        <p:spPr>
+          <a:xfrm>
+            <a:off x="5947493" y="1424565"/>
+            <a:ext cx="211288" cy="211288"/>
+          </a:xfrm>
+          <a:prstGeom prst="ellipse">
+            <a:avLst/>
+          </a:prstGeom>
+          <a:gradFill flip="none" rotWithShape="1">
+            <a:gsLst>
+              <a:gs pos="0">
+                <a:schemeClr val="accent1">
+                  <a:lumMod val="20000"/>
+                  <a:lumOff val="80000"/>
+                </a:schemeClr>
+              </a:gs>
+              <a:gs pos="39000">
+                <a:srgbClr val="638ACF"/>
+              </a:gs>
+              <a:gs pos="100000">
+                <a:schemeClr val="accent1">
+                  <a:lumMod val="50000"/>
+                </a:schemeClr>
+              </a:gs>
+            </a:gsLst>
+            <a:path path="circle">
+              <a:fillToRect l="100000" b="100000"/>
+            </a:path>
+            <a:tileRect t="-100000" r="-100000"/>
+          </a:gradFill>
+          <a:ln>
+            <a:noFill/>
+          </a:ln>
+        </p:spPr>
+        <p:style>
+          <a:lnRef idx="2">
+            <a:schemeClr val="accent1">
+              <a:shade val="15000"/>
+            </a:schemeClr>
+          </a:lnRef>
+          <a:fillRef idx="1">
+            <a:schemeClr val="accent1"/>
+          </a:fillRef>
+          <a:effectRef idx="0">
+            <a:schemeClr val="accent1"/>
+          </a:effectRef>
+          <a:fontRef idx="minor">
+            <a:schemeClr val="lt1"/>
+          </a:fontRef>
+        </p:style>
+        <p:txBody>
+          <a:bodyPr rtlCol="0" anchor="ctr"/>
+          <a:lstStyle/>
+          <a:p>
+            <a:pPr algn="ctr"/>
+            <a:endParaRPr lang="en-IN"/>
+          </a:p>
+        </p:txBody>
+      </p:sp>
+      <p:sp>
+        <p:nvSpPr>
+          <p:cNvPr id="17" name="Oval 16">
+            <a:extLst>
+              <a:ext uri="{FF2B5EF4-FFF2-40B4-BE49-F238E27FC236}">
+                <a16:creationId xmlns:a16="http://schemas.microsoft.com/office/drawing/2014/main" id="{998B3FB6-2BAA-9531-28ED-6704E44AA291}"/>
+              </a:ext>
+            </a:extLst>
+          </p:cNvPr>
+          <p:cNvSpPr/>
+          <p:nvPr/>
+        </p:nvSpPr>
+        <p:spPr>
+          <a:xfrm>
+            <a:off x="5691283" y="2631937"/>
+            <a:ext cx="211288" cy="211288"/>
+          </a:xfrm>
+          <a:prstGeom prst="ellipse">
+            <a:avLst/>
+          </a:prstGeom>
+          <a:gradFill flip="none" rotWithShape="1">
+            <a:gsLst>
+              <a:gs pos="0">
+                <a:schemeClr val="accent1">
+                  <a:lumMod val="20000"/>
+                  <a:lumOff val="80000"/>
+                </a:schemeClr>
+              </a:gs>
+              <a:gs pos="39000">
+                <a:srgbClr val="638ACF"/>
+              </a:gs>
+              <a:gs pos="100000">
+                <a:schemeClr val="accent1">
+                  <a:lumMod val="50000"/>
+                </a:schemeClr>
+              </a:gs>
+            </a:gsLst>
+            <a:path path="circle">
+              <a:fillToRect l="100000" b="100000"/>
+            </a:path>
+            <a:tileRect t="-100000" r="-100000"/>
+          </a:gradFill>
+          <a:ln>
+            <a:noFill/>
+          </a:ln>
+        </p:spPr>
+        <p:style>
+          <a:lnRef idx="2">
+            <a:schemeClr val="accent1">
+              <a:shade val="15000"/>
+            </a:schemeClr>
+          </a:lnRef>
+          <a:fillRef idx="1">
+            <a:schemeClr val="accent1"/>
+          </a:fillRef>
+          <a:effectRef idx="0">
+            <a:schemeClr val="accent1"/>
+          </a:effectRef>
+          <a:fontRef idx="minor">
+            <a:schemeClr val="lt1"/>
+          </a:fontRef>
+        </p:style>
+        <p:txBody>
+          <a:bodyPr rtlCol="0" anchor="ctr"/>
+          <a:lstStyle/>
+          <a:p>
+            <a:pPr algn="ctr"/>
+            <a:endParaRPr lang="en-IN"/>
+          </a:p>
+        </p:txBody>
+      </p:sp>
+      <p:sp>
+        <p:nvSpPr>
+          <p:cNvPr id="18" name="Oval 17">
+            <a:extLst>
+              <a:ext uri="{FF2B5EF4-FFF2-40B4-BE49-F238E27FC236}">
+                <a16:creationId xmlns:a16="http://schemas.microsoft.com/office/drawing/2014/main" id="{8CF3913D-B18A-D399-B3E3-CBD2217CEB78}"/>
+              </a:ext>
+            </a:extLst>
+          </p:cNvPr>
+          <p:cNvSpPr/>
+          <p:nvPr/>
+        </p:nvSpPr>
+        <p:spPr>
+          <a:xfrm>
+            <a:off x="5891502" y="3397497"/>
+            <a:ext cx="211288" cy="211288"/>
+          </a:xfrm>
+          <a:prstGeom prst="ellipse">
+            <a:avLst/>
+          </a:prstGeom>
+          <a:gradFill flip="none" rotWithShape="1">
+            <a:gsLst>
+              <a:gs pos="0">
+                <a:schemeClr val="accent1">
+                  <a:lumMod val="20000"/>
+                  <a:lumOff val="80000"/>
+                </a:schemeClr>
+              </a:gs>
+              <a:gs pos="39000">
+                <a:srgbClr val="638ACF"/>
+              </a:gs>
+              <a:gs pos="100000">
+                <a:schemeClr val="accent1">
+                  <a:lumMod val="50000"/>
+                </a:schemeClr>
+              </a:gs>
+            </a:gsLst>
+            <a:path path="circle">
+              <a:fillToRect l="100000" b="100000"/>
+            </a:path>
+            <a:tileRect t="-100000" r="-100000"/>
+          </a:gradFill>
+          <a:ln>
+            <a:noFill/>
+          </a:ln>
+        </p:spPr>
+        <p:style>
+          <a:lnRef idx="2">
+            <a:schemeClr val="accent1">
+              <a:shade val="15000"/>
+            </a:schemeClr>
+          </a:lnRef>
+          <a:fillRef idx="1">
+            <a:schemeClr val="accent1"/>
+          </a:fillRef>
+          <a:effectRef idx="0">
+            <a:schemeClr val="accent1"/>
+          </a:effectRef>
+          <a:fontRef idx="minor">
+            <a:schemeClr val="lt1"/>
+          </a:fontRef>
+        </p:style>
+        <p:txBody>
+          <a:bodyPr rtlCol="0" anchor="ctr"/>
+          <a:lstStyle/>
+          <a:p>
+            <a:pPr algn="ctr"/>
+            <a:endParaRPr lang="en-IN"/>
+          </a:p>
+        </p:txBody>
+      </p:sp>
+      <p:sp>
+        <p:nvSpPr>
+          <p:cNvPr id="19" name="Oval 18">
+            <a:extLst>
+              <a:ext uri="{FF2B5EF4-FFF2-40B4-BE49-F238E27FC236}">
+                <a16:creationId xmlns:a16="http://schemas.microsoft.com/office/drawing/2014/main" id="{DFF6C563-EAA2-5910-1FE2-885D36E3E4F1}"/>
+              </a:ext>
+            </a:extLst>
+          </p:cNvPr>
+          <p:cNvSpPr/>
+          <p:nvPr/>
+        </p:nvSpPr>
+        <p:spPr>
+          <a:xfrm>
+            <a:off x="6785663" y="1778373"/>
+            <a:ext cx="211288" cy="211288"/>
+          </a:xfrm>
+          <a:prstGeom prst="ellipse">
+            <a:avLst/>
+          </a:prstGeom>
+          <a:gradFill flip="none" rotWithShape="1">
+            <a:gsLst>
+              <a:gs pos="0">
+                <a:schemeClr val="accent1">
+                  <a:lumMod val="20000"/>
+                  <a:lumOff val="80000"/>
+                </a:schemeClr>
+              </a:gs>
+              <a:gs pos="39000">
+                <a:srgbClr val="638ACF"/>
+              </a:gs>
+              <a:gs pos="100000">
+                <a:schemeClr val="accent1">
+                  <a:lumMod val="50000"/>
+                </a:schemeClr>
+              </a:gs>
+            </a:gsLst>
+            <a:path path="circle">
+              <a:fillToRect l="100000" b="100000"/>
+            </a:path>
+            <a:tileRect t="-100000" r="-100000"/>
+          </a:gradFill>
+          <a:ln>
+            <a:noFill/>
+          </a:ln>
+        </p:spPr>
+        <p:style>
+          <a:lnRef idx="2">
+            <a:schemeClr val="accent1">
+              <a:shade val="15000"/>
+            </a:schemeClr>
+          </a:lnRef>
+          <a:fillRef idx="1">
+            <a:schemeClr val="accent1"/>
+          </a:fillRef>
+          <a:effectRef idx="0">
+            <a:schemeClr val="accent1"/>
+          </a:effectRef>
+          <a:fontRef idx="minor">
+            <a:schemeClr val="lt1"/>
+          </a:fontRef>
+        </p:style>
+        <p:txBody>
+          <a:bodyPr rtlCol="0" anchor="ctr"/>
+          <a:lstStyle/>
+          <a:p>
+            <a:pPr algn="ctr"/>
+            <a:endParaRPr lang="en-IN"/>
+          </a:p>
+        </p:txBody>
+      </p:sp>
+      <p:sp>
+        <p:nvSpPr>
+          <p:cNvPr id="20" name="Oval 19">
+            <a:extLst>
+              <a:ext uri="{FF2B5EF4-FFF2-40B4-BE49-F238E27FC236}">
+                <a16:creationId xmlns:a16="http://schemas.microsoft.com/office/drawing/2014/main" id="{B03A453C-C39A-5260-A541-3ADD67DC02EF}"/>
+              </a:ext>
+            </a:extLst>
+          </p:cNvPr>
+          <p:cNvSpPr/>
+          <p:nvPr/>
+        </p:nvSpPr>
+        <p:spPr>
+          <a:xfrm>
+            <a:off x="7208108" y="3039151"/>
+            <a:ext cx="211288" cy="211288"/>
+          </a:xfrm>
+          <a:prstGeom prst="ellipse">
+            <a:avLst/>
+          </a:prstGeom>
+          <a:gradFill flip="none" rotWithShape="1">
+            <a:gsLst>
+              <a:gs pos="0">
+                <a:schemeClr val="accent1">
+                  <a:lumMod val="20000"/>
+                  <a:lumOff val="80000"/>
+                </a:schemeClr>
+              </a:gs>
+              <a:gs pos="39000">
+                <a:srgbClr val="638ACF"/>
+              </a:gs>
+              <a:gs pos="100000">
+                <a:schemeClr val="accent1">
+                  <a:lumMod val="50000"/>
+                </a:schemeClr>
+              </a:gs>
+            </a:gsLst>
+            <a:path path="circle">
+              <a:fillToRect l="100000" b="100000"/>
+            </a:path>
+            <a:tileRect t="-100000" r="-100000"/>
+          </a:gradFill>
+          <a:ln>
+            <a:noFill/>
+          </a:ln>
+        </p:spPr>
+        <p:style>
+          <a:lnRef idx="2">
+            <a:schemeClr val="accent1">
+              <a:shade val="15000"/>
+            </a:schemeClr>
+          </a:lnRef>
+          <a:fillRef idx="1">
+            <a:schemeClr val="accent1"/>
+          </a:fillRef>
+          <a:effectRef idx="0">
+            <a:schemeClr val="accent1"/>
+          </a:effectRef>
+          <a:fontRef idx="minor">
+            <a:schemeClr val="lt1"/>
+          </a:fontRef>
+        </p:style>
+        <p:txBody>
+          <a:bodyPr rtlCol="0" anchor="ctr"/>
+          <a:lstStyle/>
+          <a:p>
+            <a:pPr algn="ctr"/>
+            <a:endParaRPr lang="en-IN"/>
+          </a:p>
+        </p:txBody>
+      </p:sp>
+      <p:sp>
+        <p:nvSpPr>
+          <p:cNvPr id="21" name="Oval 20">
+            <a:extLst>
+              <a:ext uri="{FF2B5EF4-FFF2-40B4-BE49-F238E27FC236}">
+                <a16:creationId xmlns:a16="http://schemas.microsoft.com/office/drawing/2014/main" id="{6BEA62BA-B8BD-1082-C759-86EDD62BD144}"/>
+              </a:ext>
+            </a:extLst>
+          </p:cNvPr>
+          <p:cNvSpPr/>
+          <p:nvPr/>
+        </p:nvSpPr>
+        <p:spPr>
+          <a:xfrm>
+            <a:off x="5659170" y="4177196"/>
+            <a:ext cx="211288" cy="211288"/>
+          </a:xfrm>
+          <a:prstGeom prst="ellipse">
+            <a:avLst/>
+          </a:prstGeom>
+          <a:gradFill flip="none" rotWithShape="1">
+            <a:gsLst>
+              <a:gs pos="0">
+                <a:schemeClr val="accent1">
+                  <a:lumMod val="20000"/>
+                  <a:lumOff val="80000"/>
+                </a:schemeClr>
+              </a:gs>
+              <a:gs pos="39000">
+                <a:srgbClr val="638ACF"/>
+              </a:gs>
+              <a:gs pos="100000">
+                <a:schemeClr val="accent1">
+                  <a:lumMod val="50000"/>
+                </a:schemeClr>
+              </a:gs>
+            </a:gsLst>
+            <a:path path="circle">
+              <a:fillToRect l="100000" b="100000"/>
+            </a:path>
+            <a:tileRect t="-100000" r="-100000"/>
+          </a:gradFill>
+          <a:ln>
+            <a:noFill/>
+          </a:ln>
+        </p:spPr>
+        <p:style>
+          <a:lnRef idx="2">
+            <a:schemeClr val="accent1">
+              <a:shade val="15000"/>
+            </a:schemeClr>
+          </a:lnRef>
+          <a:fillRef idx="1">
+            <a:schemeClr val="accent1"/>
+          </a:fillRef>
+          <a:effectRef idx="0">
+            <a:schemeClr val="accent1"/>
+          </a:effectRef>
+          <a:fontRef idx="minor">
+            <a:schemeClr val="lt1"/>
+          </a:fontRef>
+        </p:style>
+        <p:txBody>
+          <a:bodyPr rtlCol="0" anchor="ctr"/>
+          <a:lstStyle/>
+          <a:p>
+            <a:pPr algn="ctr"/>
+            <a:endParaRPr lang="en-IN"/>
+          </a:p>
+        </p:txBody>
+      </p:sp>
+      <p:sp>
+        <p:nvSpPr>
+          <p:cNvPr id="22" name="Oval 21">
+            <a:extLst>
+              <a:ext uri="{FF2B5EF4-FFF2-40B4-BE49-F238E27FC236}">
+                <a16:creationId xmlns:a16="http://schemas.microsoft.com/office/drawing/2014/main" id="{D26AF821-92DB-4F09-2C21-46C4E1304672}"/>
+              </a:ext>
+            </a:extLst>
+          </p:cNvPr>
+          <p:cNvSpPr/>
+          <p:nvPr/>
+        </p:nvSpPr>
+        <p:spPr>
+          <a:xfrm>
+            <a:off x="6748404" y="3886962"/>
+            <a:ext cx="211288" cy="211288"/>
+          </a:xfrm>
+          <a:prstGeom prst="ellipse">
+            <a:avLst/>
+          </a:prstGeom>
+          <a:gradFill flip="none" rotWithShape="1">
+            <a:gsLst>
+              <a:gs pos="0">
+                <a:schemeClr val="accent1">
+                  <a:lumMod val="20000"/>
+                  <a:lumOff val="80000"/>
+                </a:schemeClr>
+              </a:gs>
+              <a:gs pos="39000">
+                <a:srgbClr val="638ACF"/>
+              </a:gs>
+              <a:gs pos="100000">
+                <a:schemeClr val="accent1">
+                  <a:lumMod val="50000"/>
+                </a:schemeClr>
+              </a:gs>
+            </a:gsLst>
+            <a:path path="circle">
+              <a:fillToRect l="100000" b="100000"/>
+            </a:path>
+            <a:tileRect t="-100000" r="-100000"/>
+          </a:gradFill>
+          <a:ln>
+            <a:noFill/>
+          </a:ln>
+        </p:spPr>
+        <p:style>
+          <a:lnRef idx="2">
+            <a:schemeClr val="accent1">
+              <a:shade val="15000"/>
+            </a:schemeClr>
+          </a:lnRef>
+          <a:fillRef idx="1">
+            <a:schemeClr val="accent1"/>
+          </a:fillRef>
+          <a:effectRef idx="0">
+            <a:schemeClr val="accent1"/>
+          </a:effectRef>
+          <a:fontRef idx="minor">
+            <a:schemeClr val="lt1"/>
+          </a:fontRef>
+        </p:style>
+        <p:txBody>
+          <a:bodyPr rtlCol="0" anchor="ctr"/>
+          <a:lstStyle/>
+          <a:p>
+            <a:pPr algn="ctr"/>
+            <a:endParaRPr lang="en-IN"/>
+          </a:p>
+        </p:txBody>
+      </p:sp>
+      <p:sp>
+        <p:nvSpPr>
+          <p:cNvPr id="23" name="Oval 22">
+            <a:extLst>
+              <a:ext uri="{FF2B5EF4-FFF2-40B4-BE49-F238E27FC236}">
+                <a16:creationId xmlns:a16="http://schemas.microsoft.com/office/drawing/2014/main" id="{69E6C731-E624-A143-D8EA-46B6C400DB98}"/>
+              </a:ext>
+            </a:extLst>
+          </p:cNvPr>
+          <p:cNvSpPr/>
+          <p:nvPr/>
+        </p:nvSpPr>
+        <p:spPr>
+          <a:xfrm>
+            <a:off x="6847698" y="2774423"/>
+            <a:ext cx="211288" cy="211288"/>
+          </a:xfrm>
+          <a:prstGeom prst="ellipse">
+            <a:avLst/>
+          </a:prstGeom>
+          <a:gradFill flip="none" rotWithShape="1">
+            <a:gsLst>
+              <a:gs pos="0">
+                <a:schemeClr val="accent1">
+                  <a:lumMod val="20000"/>
+                  <a:lumOff val="80000"/>
+                </a:schemeClr>
+              </a:gs>
+              <a:gs pos="39000">
+                <a:srgbClr val="638ACF"/>
+              </a:gs>
+              <a:gs pos="100000">
+                <a:schemeClr val="accent1">
+                  <a:lumMod val="50000"/>
+                </a:schemeClr>
+              </a:gs>
+            </a:gsLst>
+            <a:path path="circle">
+              <a:fillToRect l="100000" b="100000"/>
+            </a:path>
+            <a:tileRect t="-100000" r="-100000"/>
+          </a:gradFill>
+          <a:ln>
+            <a:noFill/>
+          </a:ln>
+        </p:spPr>
+        <p:style>
+          <a:lnRef idx="2">
+            <a:schemeClr val="accent1">
+              <a:shade val="15000"/>
+            </a:schemeClr>
+          </a:lnRef>
+          <a:fillRef idx="1">
+            <a:schemeClr val="accent1"/>
+          </a:fillRef>
+          <a:effectRef idx="0">
+            <a:schemeClr val="accent1"/>
+          </a:effectRef>
+          <a:fontRef idx="minor">
+            <a:schemeClr val="lt1"/>
+          </a:fontRef>
+        </p:style>
+        <p:txBody>
+          <a:bodyPr rtlCol="0" anchor="ctr"/>
+          <a:lstStyle/>
+          <a:p>
+            <a:pPr algn="ctr"/>
+            <a:endParaRPr lang="en-IN"/>
+          </a:p>
+        </p:txBody>
+      </p:sp>
+      <p:sp>
+        <p:nvSpPr>
+          <p:cNvPr id="24" name="Oval 23">
+            <a:extLst>
+              <a:ext uri="{FF2B5EF4-FFF2-40B4-BE49-F238E27FC236}">
+                <a16:creationId xmlns:a16="http://schemas.microsoft.com/office/drawing/2014/main" id="{24A8FE8F-80E4-9304-9260-90889AE23D25}"/>
+              </a:ext>
+            </a:extLst>
+          </p:cNvPr>
+          <p:cNvSpPr/>
+          <p:nvPr/>
+        </p:nvSpPr>
+        <p:spPr>
+          <a:xfrm>
+            <a:off x="7613372" y="1533623"/>
+            <a:ext cx="211288" cy="211288"/>
+          </a:xfrm>
+          <a:prstGeom prst="ellipse">
+            <a:avLst/>
+          </a:prstGeom>
+          <a:gradFill flip="none" rotWithShape="1">
+            <a:gsLst>
+              <a:gs pos="0">
+                <a:schemeClr val="accent1">
+                  <a:lumMod val="20000"/>
+                  <a:lumOff val="80000"/>
+                </a:schemeClr>
+              </a:gs>
+              <a:gs pos="39000">
+                <a:srgbClr val="638ACF"/>
+              </a:gs>
+              <a:gs pos="100000">
+                <a:schemeClr val="accent1">
+                  <a:lumMod val="50000"/>
+                </a:schemeClr>
+              </a:gs>
+            </a:gsLst>
+            <a:path path="circle">
+              <a:fillToRect l="100000" b="100000"/>
+            </a:path>
+            <a:tileRect t="-100000" r="-100000"/>
+          </a:gradFill>
+          <a:ln>
+            <a:noFill/>
+          </a:ln>
+        </p:spPr>
+        <p:style>
+          <a:lnRef idx="2">
+            <a:schemeClr val="accent1">
+              <a:shade val="15000"/>
+            </a:schemeClr>
+          </a:lnRef>
+          <a:fillRef idx="1">
+            <a:schemeClr val="accent1"/>
+          </a:fillRef>
+          <a:effectRef idx="0">
+            <a:schemeClr val="accent1"/>
+          </a:effectRef>
+          <a:fontRef idx="minor">
+            <a:schemeClr val="lt1"/>
+          </a:fontRef>
+        </p:style>
+        <p:txBody>
+          <a:bodyPr rtlCol="0" anchor="ctr"/>
+          <a:lstStyle/>
+          <a:p>
+            <a:pPr algn="ctr"/>
+            <a:endParaRPr lang="en-IN"/>
+          </a:p>
+        </p:txBody>
+      </p:sp>
+      <p:sp>
+        <p:nvSpPr>
+          <p:cNvPr id="25" name="Oval 24">
+            <a:extLst>
+              <a:ext uri="{FF2B5EF4-FFF2-40B4-BE49-F238E27FC236}">
+                <a16:creationId xmlns:a16="http://schemas.microsoft.com/office/drawing/2014/main" id="{C0443CD1-6497-E5B7-AF99-66FF600D63B2}"/>
+              </a:ext>
+            </a:extLst>
+          </p:cNvPr>
+          <p:cNvSpPr/>
+          <p:nvPr/>
+        </p:nvSpPr>
+        <p:spPr>
+          <a:xfrm>
+            <a:off x="7923339" y="2356717"/>
+            <a:ext cx="211288" cy="211288"/>
+          </a:xfrm>
+          <a:prstGeom prst="ellipse">
+            <a:avLst/>
+          </a:prstGeom>
+          <a:gradFill flip="none" rotWithShape="1">
+            <a:gsLst>
+              <a:gs pos="0">
+                <a:schemeClr val="accent1">
+                  <a:lumMod val="20000"/>
+                  <a:lumOff val="80000"/>
+                </a:schemeClr>
+              </a:gs>
+              <a:gs pos="39000">
+                <a:srgbClr val="638ACF"/>
+              </a:gs>
+              <a:gs pos="100000">
+                <a:schemeClr val="accent1">
+                  <a:lumMod val="50000"/>
+                </a:schemeClr>
+              </a:gs>
+            </a:gsLst>
+            <a:path path="circle">
+              <a:fillToRect l="100000" b="100000"/>
+            </a:path>
+            <a:tileRect t="-100000" r="-100000"/>
+          </a:gradFill>
+          <a:ln>
+            <a:noFill/>
+          </a:ln>
+        </p:spPr>
+        <p:style>
+          <a:lnRef idx="2">
+            <a:schemeClr val="accent1">
+              <a:shade val="15000"/>
+            </a:schemeClr>
+          </a:lnRef>
+          <a:fillRef idx="1">
+            <a:schemeClr val="accent1"/>
+          </a:fillRef>
+          <a:effectRef idx="0">
+            <a:schemeClr val="accent1"/>
+          </a:effectRef>
+          <a:fontRef idx="minor">
+            <a:schemeClr val="lt1"/>
+          </a:fontRef>
+        </p:style>
+        <p:txBody>
+          <a:bodyPr rtlCol="0" anchor="ctr"/>
+          <a:lstStyle/>
+          <a:p>
+            <a:pPr algn="ctr"/>
+            <a:endParaRPr lang="en-IN"/>
+          </a:p>
+        </p:txBody>
+      </p:sp>
+      <p:sp>
+        <p:nvSpPr>
+          <p:cNvPr id="26" name="Oval 25">
+            <a:extLst>
+              <a:ext uri="{FF2B5EF4-FFF2-40B4-BE49-F238E27FC236}">
+                <a16:creationId xmlns:a16="http://schemas.microsoft.com/office/drawing/2014/main" id="{40CDC632-7A0D-64C6-3320-57D5BBC61178}"/>
+              </a:ext>
+            </a:extLst>
+          </p:cNvPr>
+          <p:cNvSpPr/>
+          <p:nvPr/>
+        </p:nvSpPr>
+        <p:spPr>
+          <a:xfrm>
+            <a:off x="8028983" y="3502761"/>
+            <a:ext cx="211288" cy="211288"/>
+          </a:xfrm>
+          <a:prstGeom prst="ellipse">
+            <a:avLst/>
+          </a:prstGeom>
+          <a:gradFill flip="none" rotWithShape="1">
+            <a:gsLst>
+              <a:gs pos="0">
+                <a:schemeClr val="accent1">
+                  <a:lumMod val="20000"/>
+                  <a:lumOff val="80000"/>
+                </a:schemeClr>
+              </a:gs>
+              <a:gs pos="39000">
+                <a:srgbClr val="638ACF"/>
+              </a:gs>
+              <a:gs pos="100000">
+                <a:schemeClr val="accent1">
+                  <a:lumMod val="50000"/>
+                </a:schemeClr>
+              </a:gs>
+            </a:gsLst>
+            <a:path path="circle">
+              <a:fillToRect l="100000" b="100000"/>
+            </a:path>
+            <a:tileRect t="-100000" r="-100000"/>
+          </a:gradFill>
+          <a:ln>
+            <a:noFill/>
+          </a:ln>
+        </p:spPr>
+        <p:style>
+          <a:lnRef idx="2">
+            <a:schemeClr val="accent1">
+              <a:shade val="15000"/>
+            </a:schemeClr>
+          </a:lnRef>
+          <a:fillRef idx="1">
+            <a:schemeClr val="accent1"/>
+          </a:fillRef>
+          <a:effectRef idx="0">
+            <a:schemeClr val="accent1"/>
+          </a:effectRef>
+          <a:fontRef idx="minor">
+            <a:schemeClr val="lt1"/>
+          </a:fontRef>
+        </p:style>
+        <p:txBody>
+          <a:bodyPr rtlCol="0" anchor="ctr"/>
+          <a:lstStyle/>
+          <a:p>
+            <a:pPr algn="ctr"/>
+            <a:endParaRPr lang="en-IN"/>
+          </a:p>
+        </p:txBody>
+      </p:sp>
+      <p:sp>
+        <p:nvSpPr>
+          <p:cNvPr id="27" name="Oval 26">
+            <a:extLst>
+              <a:ext uri="{FF2B5EF4-FFF2-40B4-BE49-F238E27FC236}">
+                <a16:creationId xmlns:a16="http://schemas.microsoft.com/office/drawing/2014/main" id="{603CA952-97C6-7C6A-7834-1FCA2DC6C16A}"/>
+              </a:ext>
+            </a:extLst>
+          </p:cNvPr>
+          <p:cNvSpPr/>
+          <p:nvPr/>
+        </p:nvSpPr>
+        <p:spPr>
+          <a:xfrm>
+            <a:off x="7548282" y="4357156"/>
+            <a:ext cx="211288" cy="211288"/>
+          </a:xfrm>
+          <a:prstGeom prst="ellipse">
+            <a:avLst/>
+          </a:prstGeom>
+          <a:gradFill flip="none" rotWithShape="1">
+            <a:gsLst>
+              <a:gs pos="0">
+                <a:schemeClr val="accent1">
+                  <a:lumMod val="20000"/>
+                  <a:lumOff val="80000"/>
+                </a:schemeClr>
+              </a:gs>
+              <a:gs pos="39000">
+                <a:srgbClr val="638ACF"/>
+              </a:gs>
+              <a:gs pos="100000">
+                <a:schemeClr val="accent1">
+                  <a:lumMod val="50000"/>
+                </a:schemeClr>
+              </a:gs>
+            </a:gsLst>
+            <a:path path="circle">
+              <a:fillToRect l="100000" b="100000"/>
+            </a:path>
+            <a:tileRect t="-100000" r="-100000"/>
+          </a:gradFill>
+          <a:ln>
+            <a:noFill/>
+          </a:ln>
+        </p:spPr>
+        <p:style>
+          <a:lnRef idx="2">
+            <a:schemeClr val="accent1">
+              <a:shade val="15000"/>
+            </a:schemeClr>
+          </a:lnRef>
+          <a:fillRef idx="1">
+            <a:schemeClr val="accent1"/>
+          </a:fillRef>
+          <a:effectRef idx="0">
+            <a:schemeClr val="accent1"/>
+          </a:effectRef>
+          <a:fontRef idx="minor">
+            <a:schemeClr val="lt1"/>
+          </a:fontRef>
+        </p:style>
+        <p:txBody>
+          <a:bodyPr rtlCol="0" anchor="ctr"/>
+          <a:lstStyle/>
+          <a:p>
+            <a:pPr algn="ctr"/>
+            <a:endParaRPr lang="en-IN"/>
+          </a:p>
+        </p:txBody>
+      </p:sp>
+      <p:sp>
+        <p:nvSpPr>
+          <p:cNvPr id="30" name="Oval 29">
+            <a:extLst>
+              <a:ext uri="{FF2B5EF4-FFF2-40B4-BE49-F238E27FC236}">
+                <a16:creationId xmlns:a16="http://schemas.microsoft.com/office/drawing/2014/main" id="{4EF665F2-758F-F7C6-4ED7-F71310187D3C}"/>
+              </a:ext>
+            </a:extLst>
+          </p:cNvPr>
+          <p:cNvSpPr/>
+          <p:nvPr/>
+        </p:nvSpPr>
+        <p:spPr>
+          <a:xfrm>
+            <a:off x="8991332" y="3152080"/>
+            <a:ext cx="211288" cy="211288"/>
+          </a:xfrm>
+          <a:prstGeom prst="ellipse">
+            <a:avLst/>
+          </a:prstGeom>
+          <a:gradFill flip="none" rotWithShape="1">
+            <a:gsLst>
+              <a:gs pos="0">
+                <a:schemeClr val="accent1">
+                  <a:lumMod val="20000"/>
+                  <a:lumOff val="80000"/>
+                </a:schemeClr>
+              </a:gs>
+              <a:gs pos="39000">
+                <a:srgbClr val="638ACF"/>
+              </a:gs>
+              <a:gs pos="100000">
+                <a:schemeClr val="accent1">
+                  <a:lumMod val="50000"/>
+                </a:schemeClr>
+              </a:gs>
+            </a:gsLst>
+            <a:path path="circle">
+              <a:fillToRect l="100000" b="100000"/>
+            </a:path>
+            <a:tileRect t="-100000" r="-100000"/>
+          </a:gradFill>
+          <a:ln>
+            <a:noFill/>
+          </a:ln>
+        </p:spPr>
+        <p:style>
+          <a:lnRef idx="2">
+            <a:schemeClr val="accent1">
+              <a:shade val="15000"/>
+            </a:schemeClr>
+          </a:lnRef>
+          <a:fillRef idx="1">
+            <a:schemeClr val="accent1"/>
+          </a:fillRef>
+          <a:effectRef idx="0">
+            <a:schemeClr val="accent1"/>
+          </a:effectRef>
+          <a:fontRef idx="minor">
+            <a:schemeClr val="lt1"/>
+          </a:fontRef>
+        </p:style>
+        <p:txBody>
+          <a:bodyPr rtlCol="0" anchor="ctr"/>
+          <a:lstStyle/>
+          <a:p>
+            <a:pPr algn="ctr"/>
+            <a:endParaRPr lang="en-IN"/>
+          </a:p>
+        </p:txBody>
+      </p:sp>
+      <p:sp>
+        <p:nvSpPr>
+          <p:cNvPr id="31" name="Oval 30">
+            <a:extLst>
+              <a:ext uri="{FF2B5EF4-FFF2-40B4-BE49-F238E27FC236}">
+                <a16:creationId xmlns:a16="http://schemas.microsoft.com/office/drawing/2014/main" id="{172AB187-A57E-CF10-56FD-025001273BF8}"/>
+              </a:ext>
+            </a:extLst>
+          </p:cNvPr>
+          <p:cNvSpPr/>
+          <p:nvPr/>
+        </p:nvSpPr>
+        <p:spPr>
+          <a:xfrm>
+            <a:off x="8784207" y="1904164"/>
+            <a:ext cx="211288" cy="211288"/>
+          </a:xfrm>
+          <a:prstGeom prst="ellipse">
+            <a:avLst/>
+          </a:prstGeom>
+          <a:gradFill flip="none" rotWithShape="1">
+            <a:gsLst>
+              <a:gs pos="0">
+                <a:schemeClr val="accent1">
+                  <a:lumMod val="20000"/>
+                  <a:lumOff val="80000"/>
+                </a:schemeClr>
+              </a:gs>
+              <a:gs pos="39000">
+                <a:srgbClr val="638ACF"/>
+              </a:gs>
+              <a:gs pos="100000">
+                <a:schemeClr val="accent1">
+                  <a:lumMod val="50000"/>
+                </a:schemeClr>
+              </a:gs>
+            </a:gsLst>
+            <a:path path="circle">
+              <a:fillToRect l="100000" b="100000"/>
+            </a:path>
+            <a:tileRect t="-100000" r="-100000"/>
+          </a:gradFill>
+          <a:ln>
+            <a:noFill/>
+          </a:ln>
+        </p:spPr>
+        <p:style>
+          <a:lnRef idx="2">
+            <a:schemeClr val="accent1">
+              <a:shade val="15000"/>
+            </a:schemeClr>
+          </a:lnRef>
+          <a:fillRef idx="1">
+            <a:schemeClr val="accent1"/>
+          </a:fillRef>
+          <a:effectRef idx="0">
+            <a:schemeClr val="accent1"/>
+          </a:effectRef>
+          <a:fontRef idx="minor">
+            <a:schemeClr val="lt1"/>
+          </a:fontRef>
+        </p:style>
+        <p:txBody>
+          <a:bodyPr rtlCol="0" anchor="ctr"/>
+          <a:lstStyle/>
+          <a:p>
+            <a:pPr algn="ctr"/>
+            <a:endParaRPr lang="en-IN"/>
+          </a:p>
+        </p:txBody>
+      </p:sp>
+      <p:cxnSp>
+        <p:nvCxnSpPr>
+          <p:cNvPr id="33" name="Straight Arrow Connector 32">
+            <a:extLst>
+              <a:ext uri="{FF2B5EF4-FFF2-40B4-BE49-F238E27FC236}">
+                <a16:creationId xmlns:a16="http://schemas.microsoft.com/office/drawing/2014/main" id="{0AAECE0D-5899-077A-8A95-B30581DC3E48}"/>
+              </a:ext>
+            </a:extLst>
+          </p:cNvPr>
+          <p:cNvCxnSpPr>
+            <a:cxnSpLocks/>
+          </p:cNvCxnSpPr>
+          <p:nvPr/>
+        </p:nvCxnSpPr>
+        <p:spPr>
+          <a:xfrm flipH="1" flipV="1">
+            <a:off x="3183102" y="3302916"/>
+            <a:ext cx="534394" cy="1413624"/>
+          </a:xfrm>
+          <a:prstGeom prst="straightConnector1">
+            <a:avLst/>
+          </a:prstGeom>
+          <a:ln w="12700">
+            <a:solidFill>
+              <a:srgbClr val="C00000"/>
+            </a:solidFill>
+            <a:tailEnd type="triangle"/>
+          </a:ln>
+        </p:spPr>
+        <p:style>
+          <a:lnRef idx="1">
+            <a:schemeClr val="accent1"/>
+          </a:lnRef>
+          <a:fillRef idx="0">
+            <a:schemeClr val="accent1"/>
+          </a:fillRef>
+          <a:effectRef idx="0">
+            <a:schemeClr val="accent1"/>
+          </a:effectRef>
+          <a:fontRef idx="minor">
+            <a:schemeClr val="tx1"/>
+          </a:fontRef>
+        </p:style>
+      </p:cxnSp>
+      <p:cxnSp>
+        <p:nvCxnSpPr>
+          <p:cNvPr id="34" name="Straight Arrow Connector 33">
+            <a:extLst>
+              <a:ext uri="{FF2B5EF4-FFF2-40B4-BE49-F238E27FC236}">
+                <a16:creationId xmlns:a16="http://schemas.microsoft.com/office/drawing/2014/main" id="{B88C4661-161E-5478-7F31-79995B0E2E3E}"/>
+              </a:ext>
+            </a:extLst>
+          </p:cNvPr>
+          <p:cNvCxnSpPr>
+            <a:cxnSpLocks/>
+          </p:cNvCxnSpPr>
+          <p:nvPr/>
+        </p:nvCxnSpPr>
+        <p:spPr>
+          <a:xfrm flipV="1">
+            <a:off x="3187700" y="2198829"/>
+            <a:ext cx="1165513" cy="1112696"/>
+          </a:xfrm>
+          <a:prstGeom prst="straightConnector1">
+            <a:avLst/>
+          </a:prstGeom>
+          <a:ln w="12700">
+            <a:solidFill>
+              <a:srgbClr val="C00000"/>
+            </a:solidFill>
+            <a:tailEnd type="triangle"/>
+          </a:ln>
+        </p:spPr>
+        <p:style>
+          <a:lnRef idx="1">
+            <a:schemeClr val="accent1"/>
+          </a:lnRef>
+          <a:fillRef idx="0">
+            <a:schemeClr val="accent1"/>
+          </a:fillRef>
+          <a:effectRef idx="0">
+            <a:schemeClr val="accent1"/>
+          </a:effectRef>
+          <a:fontRef idx="minor">
+            <a:schemeClr val="tx1"/>
+          </a:fontRef>
+        </p:style>
+      </p:cxnSp>
+      <p:cxnSp>
+        <p:nvCxnSpPr>
+          <p:cNvPr id="39" name="Straight Arrow Connector 38">
+            <a:extLst>
+              <a:ext uri="{FF2B5EF4-FFF2-40B4-BE49-F238E27FC236}">
+                <a16:creationId xmlns:a16="http://schemas.microsoft.com/office/drawing/2014/main" id="{487F2B95-81B2-3B0C-D14B-1D74338C1E1E}"/>
+              </a:ext>
+            </a:extLst>
+          </p:cNvPr>
+          <p:cNvCxnSpPr>
+            <a:cxnSpLocks/>
+          </p:cNvCxnSpPr>
+          <p:nvPr/>
+        </p:nvCxnSpPr>
+        <p:spPr>
+          <a:xfrm>
+            <a:off x="4348451" y="2201210"/>
+            <a:ext cx="353262" cy="368159"/>
+          </a:xfrm>
+          <a:prstGeom prst="straightConnector1">
+            <a:avLst/>
+          </a:prstGeom>
+          <a:ln w="12700">
+            <a:solidFill>
+              <a:srgbClr val="C00000"/>
+            </a:solidFill>
+            <a:tailEnd type="triangle"/>
+          </a:ln>
+        </p:spPr>
+        <p:style>
+          <a:lnRef idx="1">
+            <a:schemeClr val="accent1"/>
+          </a:lnRef>
+          <a:fillRef idx="0">
+            <a:schemeClr val="accent1"/>
+          </a:fillRef>
+          <a:effectRef idx="0">
+            <a:schemeClr val="accent1"/>
+          </a:effectRef>
+          <a:fontRef idx="minor">
+            <a:schemeClr val="tx1"/>
+          </a:fontRef>
+        </p:style>
+      </p:cxnSp>
+      <p:cxnSp>
+        <p:nvCxnSpPr>
+          <p:cNvPr id="44" name="Straight Arrow Connector 43">
+            <a:extLst>
+              <a:ext uri="{FF2B5EF4-FFF2-40B4-BE49-F238E27FC236}">
+                <a16:creationId xmlns:a16="http://schemas.microsoft.com/office/drawing/2014/main" id="{3727D8A2-A119-008A-280A-8BE75CBCC53B}"/>
+              </a:ext>
+            </a:extLst>
+          </p:cNvPr>
+          <p:cNvCxnSpPr>
+            <a:cxnSpLocks/>
+          </p:cNvCxnSpPr>
+          <p:nvPr/>
+        </p:nvCxnSpPr>
+        <p:spPr>
+          <a:xfrm>
+            <a:off x="4696500" y="2564607"/>
+            <a:ext cx="149021" cy="1293276"/>
+          </a:xfrm>
+          <a:prstGeom prst="straightConnector1">
+            <a:avLst/>
+          </a:prstGeom>
+          <a:ln w="12700">
+            <a:solidFill>
+              <a:srgbClr val="C00000"/>
+            </a:solidFill>
+            <a:tailEnd type="triangle"/>
+          </a:ln>
+        </p:spPr>
+        <p:style>
+          <a:lnRef idx="1">
+            <a:schemeClr val="accent1"/>
+          </a:lnRef>
+          <a:fillRef idx="0">
+            <a:schemeClr val="accent1"/>
+          </a:fillRef>
+          <a:effectRef idx="0">
+            <a:schemeClr val="accent1"/>
+          </a:effectRef>
+          <a:fontRef idx="minor">
+            <a:schemeClr val="tx1"/>
+          </a:fontRef>
+        </p:style>
+      </p:cxnSp>
+      <p:cxnSp>
+        <p:nvCxnSpPr>
+          <p:cNvPr id="47" name="Straight Arrow Connector 46">
+            <a:extLst>
+              <a:ext uri="{FF2B5EF4-FFF2-40B4-BE49-F238E27FC236}">
+                <a16:creationId xmlns:a16="http://schemas.microsoft.com/office/drawing/2014/main" id="{594487A1-724C-DE4B-E34C-98670ABF4D10}"/>
+              </a:ext>
+            </a:extLst>
+          </p:cNvPr>
+          <p:cNvCxnSpPr>
+            <a:cxnSpLocks/>
+          </p:cNvCxnSpPr>
+          <p:nvPr/>
+        </p:nvCxnSpPr>
+        <p:spPr>
+          <a:xfrm flipV="1">
+            <a:off x="4845521" y="1933575"/>
+            <a:ext cx="413469" cy="1924308"/>
+          </a:xfrm>
+          <a:prstGeom prst="straightConnector1">
+            <a:avLst/>
+          </a:prstGeom>
+          <a:ln w="12700">
+            <a:solidFill>
+              <a:srgbClr val="C00000"/>
+            </a:solidFill>
+            <a:tailEnd type="triangle"/>
+          </a:ln>
+        </p:spPr>
+        <p:style>
+          <a:lnRef idx="1">
+            <a:schemeClr val="accent1"/>
+          </a:lnRef>
+          <a:fillRef idx="0">
+            <a:schemeClr val="accent1"/>
+          </a:fillRef>
+          <a:effectRef idx="0">
+            <a:schemeClr val="accent1"/>
+          </a:effectRef>
+          <a:fontRef idx="minor">
+            <a:schemeClr val="tx1"/>
+          </a:fontRef>
+        </p:style>
+      </p:cxnSp>
+      <p:cxnSp>
+        <p:nvCxnSpPr>
+          <p:cNvPr id="54" name="Straight Arrow Connector 53">
+            <a:extLst>
+              <a:ext uri="{FF2B5EF4-FFF2-40B4-BE49-F238E27FC236}">
+                <a16:creationId xmlns:a16="http://schemas.microsoft.com/office/drawing/2014/main" id="{EAF1C399-7B1B-E669-E219-D19D64ADD8B4}"/>
+              </a:ext>
+            </a:extLst>
+          </p:cNvPr>
+          <p:cNvCxnSpPr>
+            <a:cxnSpLocks/>
+          </p:cNvCxnSpPr>
+          <p:nvPr/>
+        </p:nvCxnSpPr>
+        <p:spPr>
+          <a:xfrm>
+            <a:off x="5256609" y="1938337"/>
+            <a:ext cx="2672055" cy="509911"/>
+          </a:xfrm>
+          <a:prstGeom prst="straightConnector1">
+            <a:avLst/>
+          </a:prstGeom>
+          <a:ln w="12700">
+            <a:solidFill>
+              <a:srgbClr val="C00000"/>
+            </a:solidFill>
+            <a:tailEnd type="triangle"/>
+          </a:ln>
+        </p:spPr>
+        <p:style>
+          <a:lnRef idx="1">
+            <a:schemeClr val="accent1"/>
+          </a:lnRef>
+          <a:fillRef idx="0">
+            <a:schemeClr val="accent1"/>
+          </a:fillRef>
+          <a:effectRef idx="0">
+            <a:schemeClr val="accent1"/>
+          </a:effectRef>
+          <a:fontRef idx="minor">
+            <a:schemeClr val="tx1"/>
+          </a:fontRef>
+        </p:style>
+      </p:cxnSp>
+      <p:cxnSp>
+        <p:nvCxnSpPr>
+          <p:cNvPr id="61" name="Straight Arrow Connector 60">
+            <a:extLst>
+              <a:ext uri="{FF2B5EF4-FFF2-40B4-BE49-F238E27FC236}">
+                <a16:creationId xmlns:a16="http://schemas.microsoft.com/office/drawing/2014/main" id="{C260C5BE-376F-D58A-72A3-FAFABAD5584D}"/>
+              </a:ext>
+            </a:extLst>
+          </p:cNvPr>
+          <p:cNvCxnSpPr>
+            <a:cxnSpLocks/>
+          </p:cNvCxnSpPr>
+          <p:nvPr/>
+        </p:nvCxnSpPr>
+        <p:spPr>
+          <a:xfrm flipH="1">
+            <a:off x="5896264" y="2445316"/>
+            <a:ext cx="2026400" cy="306929"/>
+          </a:xfrm>
+          <a:prstGeom prst="straightConnector1">
+            <a:avLst/>
+          </a:prstGeom>
+          <a:ln w="12700">
+            <a:solidFill>
+              <a:srgbClr val="C00000"/>
+            </a:solidFill>
+            <a:tailEnd type="triangle"/>
+          </a:ln>
+        </p:spPr>
+        <p:style>
+          <a:lnRef idx="1">
+            <a:schemeClr val="accent1"/>
+          </a:lnRef>
+          <a:fillRef idx="0">
+            <a:schemeClr val="accent1"/>
+          </a:fillRef>
+          <a:effectRef idx="0">
+            <a:schemeClr val="accent1"/>
+          </a:effectRef>
+          <a:fontRef idx="minor">
+            <a:schemeClr val="tx1"/>
+          </a:fontRef>
+        </p:style>
+      </p:cxnSp>
+      <p:cxnSp>
+        <p:nvCxnSpPr>
+          <p:cNvPr id="66" name="Straight Arrow Connector 65">
+            <a:extLst>
+              <a:ext uri="{FF2B5EF4-FFF2-40B4-BE49-F238E27FC236}">
+                <a16:creationId xmlns:a16="http://schemas.microsoft.com/office/drawing/2014/main" id="{EC4EBE37-3208-2769-E553-99D751DE3AB3}"/>
+              </a:ext>
+            </a:extLst>
+          </p:cNvPr>
+          <p:cNvCxnSpPr>
+            <a:cxnSpLocks/>
+          </p:cNvCxnSpPr>
+          <p:nvPr/>
+        </p:nvCxnSpPr>
+        <p:spPr>
+          <a:xfrm>
+            <a:off x="5904116" y="2752245"/>
+            <a:ext cx="890523" cy="1154937"/>
+          </a:xfrm>
+          <a:prstGeom prst="straightConnector1">
+            <a:avLst/>
+          </a:prstGeom>
+          <a:ln w="12700">
+            <a:solidFill>
+              <a:srgbClr val="C00000"/>
+            </a:solidFill>
+            <a:tailEnd type="triangle"/>
+          </a:ln>
+        </p:spPr>
+        <p:style>
+          <a:lnRef idx="1">
+            <a:schemeClr val="accent1"/>
+          </a:lnRef>
+          <a:fillRef idx="0">
+            <a:schemeClr val="accent1"/>
+          </a:fillRef>
+          <a:effectRef idx="0">
+            <a:schemeClr val="accent1"/>
+          </a:effectRef>
+          <a:fontRef idx="minor">
+            <a:schemeClr val="tx1"/>
+          </a:fontRef>
+        </p:style>
+      </p:cxnSp>
+      <p:cxnSp>
+        <p:nvCxnSpPr>
+          <p:cNvPr id="72" name="Straight Arrow Connector 71">
+            <a:extLst>
+              <a:ext uri="{FF2B5EF4-FFF2-40B4-BE49-F238E27FC236}">
+                <a16:creationId xmlns:a16="http://schemas.microsoft.com/office/drawing/2014/main" id="{ED81602B-DBC5-87D7-A28D-8DB17C3AB407}"/>
+              </a:ext>
+            </a:extLst>
+          </p:cNvPr>
+          <p:cNvCxnSpPr>
+            <a:cxnSpLocks/>
+          </p:cNvCxnSpPr>
+          <p:nvPr/>
+        </p:nvCxnSpPr>
+        <p:spPr>
+          <a:xfrm flipH="1" flipV="1">
+            <a:off x="6121538" y="1598738"/>
+            <a:ext cx="669840" cy="2305269"/>
+          </a:xfrm>
+          <a:prstGeom prst="straightConnector1">
+            <a:avLst/>
+          </a:prstGeom>
+          <a:ln w="12700">
+            <a:solidFill>
+              <a:srgbClr val="C00000"/>
+            </a:solidFill>
+            <a:tailEnd type="triangle"/>
+          </a:ln>
+        </p:spPr>
+        <p:style>
+          <a:lnRef idx="1">
+            <a:schemeClr val="accent1"/>
+          </a:lnRef>
+          <a:fillRef idx="0">
+            <a:schemeClr val="accent1"/>
+          </a:fillRef>
+          <a:effectRef idx="0">
+            <a:schemeClr val="accent1"/>
+          </a:effectRef>
+          <a:fontRef idx="minor">
+            <a:schemeClr val="tx1"/>
+          </a:fontRef>
+        </p:style>
+      </p:cxnSp>
+      <p:cxnSp>
+        <p:nvCxnSpPr>
+          <p:cNvPr id="77" name="Straight Arrow Connector 76">
+            <a:extLst>
+              <a:ext uri="{FF2B5EF4-FFF2-40B4-BE49-F238E27FC236}">
+                <a16:creationId xmlns:a16="http://schemas.microsoft.com/office/drawing/2014/main" id="{4B3B3AC3-7746-A059-D18F-71E7659A69F2}"/>
+              </a:ext>
+            </a:extLst>
+          </p:cNvPr>
+          <p:cNvCxnSpPr>
+            <a:cxnSpLocks/>
+          </p:cNvCxnSpPr>
+          <p:nvPr/>
+        </p:nvCxnSpPr>
+        <p:spPr>
+          <a:xfrm>
+            <a:off x="6124232" y="1604692"/>
+            <a:ext cx="1529694" cy="106078"/>
+          </a:xfrm>
+          <a:prstGeom prst="straightConnector1">
+            <a:avLst/>
+          </a:prstGeom>
+          <a:ln w="12700">
+            <a:solidFill>
+              <a:srgbClr val="C00000"/>
+            </a:solidFill>
+            <a:tailEnd type="triangle"/>
+          </a:ln>
+        </p:spPr>
+        <p:style>
+          <a:lnRef idx="1">
+            <a:schemeClr val="accent1"/>
+          </a:lnRef>
+          <a:fillRef idx="0">
+            <a:schemeClr val="accent1"/>
+          </a:fillRef>
+          <a:effectRef idx="0">
+            <a:schemeClr val="accent1"/>
+          </a:effectRef>
+          <a:fontRef idx="minor">
+            <a:schemeClr val="tx1"/>
+          </a:fontRef>
+        </p:style>
+      </p:cxnSp>
+      <p:cxnSp>
+        <p:nvCxnSpPr>
+          <p:cNvPr id="82" name="Straight Arrow Connector 81">
+            <a:extLst>
+              <a:ext uri="{FF2B5EF4-FFF2-40B4-BE49-F238E27FC236}">
+                <a16:creationId xmlns:a16="http://schemas.microsoft.com/office/drawing/2014/main" id="{3E1AA45C-FCDD-D2DD-8065-D02573256054}"/>
+              </a:ext>
+            </a:extLst>
+          </p:cNvPr>
+          <p:cNvCxnSpPr>
+            <a:cxnSpLocks/>
+          </p:cNvCxnSpPr>
+          <p:nvPr/>
+        </p:nvCxnSpPr>
+        <p:spPr>
+          <a:xfrm>
+            <a:off x="7644540" y="1713151"/>
+            <a:ext cx="1348574" cy="1548454"/>
+          </a:xfrm>
+          <a:prstGeom prst="straightConnector1">
+            <a:avLst/>
+          </a:prstGeom>
+          <a:ln w="12700">
+            <a:solidFill>
+              <a:srgbClr val="C00000"/>
+            </a:solidFill>
+            <a:tailEnd type="triangle"/>
+          </a:ln>
+        </p:spPr>
+        <p:style>
+          <a:lnRef idx="1">
+            <a:schemeClr val="accent1"/>
+          </a:lnRef>
+          <a:fillRef idx="0">
+            <a:schemeClr val="accent1"/>
+          </a:fillRef>
+          <a:effectRef idx="0">
+            <a:schemeClr val="accent1"/>
+          </a:effectRef>
+          <a:fontRef idx="minor">
+            <a:schemeClr val="tx1"/>
+          </a:fontRef>
+        </p:style>
+      </p:cxnSp>
+      <p:sp>
+        <p:nvSpPr>
+          <p:cNvPr id="86" name="TextBox 85">
+            <a:extLst>
+              <a:ext uri="{FF2B5EF4-FFF2-40B4-BE49-F238E27FC236}">
+                <a16:creationId xmlns:a16="http://schemas.microsoft.com/office/drawing/2014/main" id="{40FEA67F-35FA-0172-8E4E-4DF7ED308865}"/>
+              </a:ext>
+            </a:extLst>
+          </p:cNvPr>
+          <p:cNvSpPr txBox="1"/>
+          <p:nvPr/>
+        </p:nvSpPr>
+        <p:spPr>
+          <a:xfrm>
+            <a:off x="3217564" y="3208843"/>
+            <a:ext cx="206829" cy="276999"/>
+          </a:xfrm>
+          <a:prstGeom prst="rect">
+            <a:avLst/>
+          </a:prstGeom>
+          <a:noFill/>
+        </p:spPr>
+        <p:txBody>
+          <a:bodyPr wrap="square" rtlCol="0">
+            <a:spAutoFit/>
+          </a:bodyPr>
+          <a:lstStyle/>
+          <a:p>
+            <a:pPr algn="ctr"/>
+            <a:r>
+              <a:rPr lang="en-US" sz="1200" b="1" dirty="0"/>
+              <a:t>1</a:t>
+            </a:r>
+            <a:endParaRPr lang="en-IN" sz="1200" b="1" dirty="0"/>
+          </a:p>
+        </p:txBody>
+      </p:sp>
+      <p:sp>
+        <p:nvSpPr>
+          <p:cNvPr id="88" name="TextBox 87">
+            <a:extLst>
+              <a:ext uri="{FF2B5EF4-FFF2-40B4-BE49-F238E27FC236}">
+                <a16:creationId xmlns:a16="http://schemas.microsoft.com/office/drawing/2014/main" id="{CCD1E488-D95A-699B-0618-B2EC195B93FB}"/>
+              </a:ext>
+            </a:extLst>
+          </p:cNvPr>
+          <p:cNvSpPr txBox="1"/>
+          <p:nvPr/>
+        </p:nvSpPr>
+        <p:spPr>
+          <a:xfrm>
+            <a:off x="4065418" y="2037996"/>
+            <a:ext cx="206829" cy="276999"/>
+          </a:xfrm>
+          <a:prstGeom prst="rect">
+            <a:avLst/>
+          </a:prstGeom>
+          <a:noFill/>
+        </p:spPr>
+        <p:txBody>
+          <a:bodyPr wrap="square" rtlCol="0">
+            <a:spAutoFit/>
+          </a:bodyPr>
+          <a:lstStyle/>
+          <a:p>
+            <a:pPr algn="ctr"/>
+            <a:r>
+              <a:rPr lang="en-US" sz="1200" b="1" dirty="0"/>
+              <a:t>2</a:t>
+            </a:r>
+            <a:endParaRPr lang="en-IN" sz="1200" b="1" dirty="0"/>
+          </a:p>
+        </p:txBody>
+      </p:sp>
+      <p:sp>
+        <p:nvSpPr>
+          <p:cNvPr id="90" name="TextBox 89">
+            <a:extLst>
+              <a:ext uri="{FF2B5EF4-FFF2-40B4-BE49-F238E27FC236}">
+                <a16:creationId xmlns:a16="http://schemas.microsoft.com/office/drawing/2014/main" id="{8774DD07-2F53-2310-1C20-D4A346EAD71A}"/>
+              </a:ext>
+            </a:extLst>
+          </p:cNvPr>
+          <p:cNvSpPr txBox="1"/>
+          <p:nvPr/>
+        </p:nvSpPr>
+        <p:spPr>
+          <a:xfrm>
+            <a:off x="4655084" y="2190273"/>
+            <a:ext cx="206829" cy="276999"/>
+          </a:xfrm>
+          <a:prstGeom prst="rect">
+            <a:avLst/>
+          </a:prstGeom>
+          <a:noFill/>
+        </p:spPr>
+        <p:txBody>
+          <a:bodyPr wrap="square" rtlCol="0">
+            <a:spAutoFit/>
+          </a:bodyPr>
+          <a:lstStyle/>
+          <a:p>
+            <a:pPr algn="ctr"/>
+            <a:r>
+              <a:rPr lang="en-US" sz="1200" b="1" dirty="0"/>
+              <a:t>3</a:t>
+            </a:r>
+            <a:endParaRPr lang="en-IN" sz="1200" b="1" dirty="0"/>
+          </a:p>
+        </p:txBody>
+      </p:sp>
+      <p:sp>
+        <p:nvSpPr>
+          <p:cNvPr id="91" name="TextBox 90">
+            <a:extLst>
+              <a:ext uri="{FF2B5EF4-FFF2-40B4-BE49-F238E27FC236}">
+                <a16:creationId xmlns:a16="http://schemas.microsoft.com/office/drawing/2014/main" id="{7414823B-0CDA-A24E-65AF-C260022A4FC1}"/>
+              </a:ext>
+            </a:extLst>
+          </p:cNvPr>
+          <p:cNvSpPr txBox="1"/>
+          <p:nvPr/>
+        </p:nvSpPr>
+        <p:spPr>
+          <a:xfrm>
+            <a:off x="4617342" y="3659885"/>
+            <a:ext cx="206829" cy="276999"/>
+          </a:xfrm>
+          <a:prstGeom prst="rect">
+            <a:avLst/>
+          </a:prstGeom>
+          <a:noFill/>
+        </p:spPr>
+        <p:txBody>
+          <a:bodyPr wrap="square" rtlCol="0">
+            <a:spAutoFit/>
+          </a:bodyPr>
+          <a:lstStyle/>
+          <a:p>
+            <a:pPr algn="ctr"/>
+            <a:r>
+              <a:rPr lang="en-US" sz="1200" b="1" dirty="0"/>
+              <a:t>4</a:t>
+            </a:r>
+            <a:endParaRPr lang="en-IN" sz="1200" b="1" dirty="0"/>
+          </a:p>
+        </p:txBody>
+      </p:sp>
+      <p:sp>
+        <p:nvSpPr>
+          <p:cNvPr id="92" name="TextBox 91">
+            <a:extLst>
+              <a:ext uri="{FF2B5EF4-FFF2-40B4-BE49-F238E27FC236}">
+                <a16:creationId xmlns:a16="http://schemas.microsoft.com/office/drawing/2014/main" id="{ADB5424C-08BB-E003-4A87-F86CDB8FDBC6}"/>
+              </a:ext>
+            </a:extLst>
+          </p:cNvPr>
+          <p:cNvSpPr txBox="1"/>
+          <p:nvPr/>
+        </p:nvSpPr>
+        <p:spPr>
+          <a:xfrm>
+            <a:off x="5016202" y="1876561"/>
+            <a:ext cx="206829" cy="276999"/>
+          </a:xfrm>
+          <a:prstGeom prst="rect">
+            <a:avLst/>
+          </a:prstGeom>
+          <a:noFill/>
+        </p:spPr>
+        <p:txBody>
+          <a:bodyPr wrap="square" rtlCol="0">
+            <a:spAutoFit/>
+          </a:bodyPr>
+          <a:lstStyle/>
+          <a:p>
+            <a:pPr algn="ctr"/>
+            <a:r>
+              <a:rPr lang="en-US" sz="1200" b="1" dirty="0"/>
+              <a:t>5</a:t>
+            </a:r>
+            <a:endParaRPr lang="en-IN" sz="1200" b="1" dirty="0"/>
+          </a:p>
+        </p:txBody>
+      </p:sp>
+      <p:sp>
+        <p:nvSpPr>
+          <p:cNvPr id="94" name="TextBox 93">
+            <a:extLst>
+              <a:ext uri="{FF2B5EF4-FFF2-40B4-BE49-F238E27FC236}">
+                <a16:creationId xmlns:a16="http://schemas.microsoft.com/office/drawing/2014/main" id="{EBBF435A-433D-9FAD-B25E-C689B82B2127}"/>
+              </a:ext>
+            </a:extLst>
+          </p:cNvPr>
+          <p:cNvSpPr txBox="1"/>
+          <p:nvPr/>
+        </p:nvSpPr>
+        <p:spPr>
+          <a:xfrm>
+            <a:off x="7784867" y="2440595"/>
+            <a:ext cx="206829" cy="276999"/>
+          </a:xfrm>
+          <a:prstGeom prst="rect">
+            <a:avLst/>
+          </a:prstGeom>
+          <a:noFill/>
+        </p:spPr>
+        <p:txBody>
+          <a:bodyPr wrap="square" rtlCol="0">
+            <a:spAutoFit/>
+          </a:bodyPr>
+          <a:lstStyle/>
+          <a:p>
+            <a:pPr algn="ctr"/>
+            <a:r>
+              <a:rPr lang="en-US" sz="1200" b="1" dirty="0"/>
+              <a:t>6</a:t>
+            </a:r>
+            <a:endParaRPr lang="en-IN" sz="1200" b="1" dirty="0"/>
+          </a:p>
+        </p:txBody>
+      </p:sp>
+      <p:sp>
+        <p:nvSpPr>
+          <p:cNvPr id="96" name="TextBox 95">
+            <a:extLst>
+              <a:ext uri="{FF2B5EF4-FFF2-40B4-BE49-F238E27FC236}">
+                <a16:creationId xmlns:a16="http://schemas.microsoft.com/office/drawing/2014/main" id="{D5BFDB68-AEE9-7918-76B0-68AED3073CB1}"/>
+              </a:ext>
+            </a:extLst>
+          </p:cNvPr>
+          <p:cNvSpPr txBox="1"/>
+          <p:nvPr/>
+        </p:nvSpPr>
+        <p:spPr>
+          <a:xfrm>
+            <a:off x="5856363" y="2448248"/>
+            <a:ext cx="206829" cy="276999"/>
+          </a:xfrm>
+          <a:prstGeom prst="rect">
+            <a:avLst/>
+          </a:prstGeom>
+          <a:noFill/>
+        </p:spPr>
+        <p:txBody>
+          <a:bodyPr wrap="square" rtlCol="0">
+            <a:spAutoFit/>
+          </a:bodyPr>
+          <a:lstStyle/>
+          <a:p>
+            <a:pPr algn="ctr"/>
+            <a:r>
+              <a:rPr lang="en-US" sz="1200" b="1" dirty="0"/>
+              <a:t>7</a:t>
+            </a:r>
+            <a:endParaRPr lang="en-IN" sz="1200" b="1" dirty="0"/>
+          </a:p>
+        </p:txBody>
+      </p:sp>
+      <p:sp>
+        <p:nvSpPr>
+          <p:cNvPr id="97" name="TextBox 96">
+            <a:extLst>
+              <a:ext uri="{FF2B5EF4-FFF2-40B4-BE49-F238E27FC236}">
+                <a16:creationId xmlns:a16="http://schemas.microsoft.com/office/drawing/2014/main" id="{C35B1AE8-AE0E-DB8F-4CF7-E3E2EF20B953}"/>
+              </a:ext>
+            </a:extLst>
+          </p:cNvPr>
+          <p:cNvSpPr txBox="1"/>
+          <p:nvPr/>
+        </p:nvSpPr>
+        <p:spPr>
+          <a:xfrm>
+            <a:off x="6562530" y="3807325"/>
+            <a:ext cx="206829" cy="276999"/>
+          </a:xfrm>
+          <a:prstGeom prst="rect">
+            <a:avLst/>
+          </a:prstGeom>
+          <a:noFill/>
+        </p:spPr>
+        <p:txBody>
+          <a:bodyPr wrap="square" rtlCol="0">
+            <a:spAutoFit/>
+          </a:bodyPr>
+          <a:lstStyle/>
+          <a:p>
+            <a:pPr algn="ctr"/>
+            <a:r>
+              <a:rPr lang="en-US" sz="1200" b="1" dirty="0"/>
+              <a:t>8</a:t>
+            </a:r>
+            <a:endParaRPr lang="en-IN" sz="1200" b="1" dirty="0"/>
+          </a:p>
+        </p:txBody>
+      </p:sp>
+      <p:sp>
+        <p:nvSpPr>
+          <p:cNvPr id="98" name="TextBox 97">
+            <a:extLst>
+              <a:ext uri="{FF2B5EF4-FFF2-40B4-BE49-F238E27FC236}">
+                <a16:creationId xmlns:a16="http://schemas.microsoft.com/office/drawing/2014/main" id="{29CF831D-D0A7-D75E-5007-777411798891}"/>
+              </a:ext>
+            </a:extLst>
+          </p:cNvPr>
+          <p:cNvSpPr txBox="1"/>
+          <p:nvPr/>
+        </p:nvSpPr>
+        <p:spPr>
+          <a:xfrm>
+            <a:off x="5926231" y="1607018"/>
+            <a:ext cx="206829" cy="276999"/>
+          </a:xfrm>
+          <a:prstGeom prst="rect">
+            <a:avLst/>
+          </a:prstGeom>
+          <a:noFill/>
+        </p:spPr>
+        <p:txBody>
+          <a:bodyPr wrap="square" rtlCol="0">
+            <a:spAutoFit/>
+          </a:bodyPr>
+          <a:lstStyle/>
+          <a:p>
+            <a:pPr algn="ctr"/>
+            <a:r>
+              <a:rPr lang="en-US" sz="1200" b="1" dirty="0"/>
+              <a:t>9</a:t>
+            </a:r>
+            <a:endParaRPr lang="en-IN" sz="1200" b="1" dirty="0"/>
+          </a:p>
+        </p:txBody>
+      </p:sp>
+      <p:sp>
+        <p:nvSpPr>
+          <p:cNvPr id="99" name="TextBox 98">
+            <a:extLst>
+              <a:ext uri="{FF2B5EF4-FFF2-40B4-BE49-F238E27FC236}">
+                <a16:creationId xmlns:a16="http://schemas.microsoft.com/office/drawing/2014/main" id="{D1F36E56-3F8F-0FD2-2E2C-275E03F4C3C2}"/>
+              </a:ext>
+            </a:extLst>
+          </p:cNvPr>
+          <p:cNvSpPr txBox="1"/>
+          <p:nvPr/>
+        </p:nvSpPr>
+        <p:spPr>
+          <a:xfrm>
+            <a:off x="7289453" y="1416220"/>
+            <a:ext cx="395077" cy="276999"/>
+          </a:xfrm>
+          <a:prstGeom prst="rect">
+            <a:avLst/>
+          </a:prstGeom>
+          <a:noFill/>
+        </p:spPr>
+        <p:txBody>
+          <a:bodyPr wrap="square" rtlCol="0">
+            <a:spAutoFit/>
+          </a:bodyPr>
+          <a:lstStyle/>
+          <a:p>
+            <a:pPr algn="ctr"/>
+            <a:r>
+              <a:rPr lang="en-US" sz="1200" b="1" dirty="0"/>
+              <a:t>10</a:t>
+            </a:r>
+            <a:endParaRPr lang="en-IN" sz="1200" b="1" dirty="0"/>
+          </a:p>
+        </p:txBody>
+      </p:sp>
+      <mc:AlternateContent xmlns:mc="http://schemas.openxmlformats.org/markup-compatibility/2006" xmlns:a14="http://schemas.microsoft.com/office/drawing/2010/main">
+        <mc:Choice Requires="a14">
+          <p:sp>
+            <p:nvSpPr>
+              <p:cNvPr id="100" name="TextBox 99">
+                <a:extLst>
+                  <a:ext uri="{FF2B5EF4-FFF2-40B4-BE49-F238E27FC236}">
+                    <a16:creationId xmlns:a16="http://schemas.microsoft.com/office/drawing/2014/main" id="{E7B31CAD-2362-B9E8-D289-062EF5F780C2}"/>
+                  </a:ext>
+                </a:extLst>
+              </p:cNvPr>
+              <p:cNvSpPr txBox="1"/>
+              <p:nvPr/>
+            </p:nvSpPr>
+            <p:spPr>
+              <a:xfrm>
+                <a:off x="3768675" y="2727340"/>
+                <a:ext cx="211661" cy="215444"/>
+              </a:xfrm>
+              <a:prstGeom prst="rect">
+                <a:avLst/>
+              </a:prstGeom>
+              <a:noFill/>
+            </p:spPr>
+            <p:txBody>
+              <a:bodyPr wrap="none" lIns="0" tIns="0" rIns="0" bIns="0" rtlCol="0">
+                <a:spAutoFit/>
+              </a:bodyPr>
+              <a:lstStyle/>
+              <a:p>
+                <a:pPr/>
+                <a14:m>
+                  <m:oMathPara xmlns:m="http://schemas.openxmlformats.org/officeDocument/2006/math">
+                    <m:oMath>
+                      <m:sSub>
+                        <m:sSubPr>
+                          <m:ctrlPr>
+                            <a:rPr lang="en-IN" sz="1400" i="1" smtClean="0">
+                              <a:solidFill>
+                                <a:srgbClr val="FF0000"/>
+                              </a:solidFill>
+                              <a:latin typeface="Cambria Math" panose="02040503050406030204" pitchFamily="18" charset="0"/>
+                              <a:ea typeface="Cambria Math" panose="02040503050406030204" pitchFamily="18" charset="0"/>
+                            </a:rPr>
+                          </m:ctrlPr>
+                        </m:sSubPr>
+                        <m:e>
+                          <m:r>
+                            <a:rPr lang="en-IN" sz="1400" i="1" smtClean="0">
+                              <a:solidFill>
+                                <a:srgbClr val="FF0000"/>
+                              </a:solidFill>
+                              <a:latin typeface="Cambria Math" panose="02040503050406030204" pitchFamily="18" charset="0"/>
+                              <a:ea typeface="Cambria Math" panose="02040503050406030204" pitchFamily="18" charset="0"/>
+                            </a:rPr>
+                            <m:t>𝜆</m:t>
+                          </m:r>
+                        </m:e>
+                        <m:sub>
+                          <m:r>
+                            <a:rPr lang="en-US" sz="1400" b="0" i="1" smtClean="0">
+                              <a:solidFill>
+                                <a:srgbClr val="FF0000"/>
+                              </a:solidFill>
+                              <a:latin typeface="Cambria Math" panose="02040503050406030204" pitchFamily="18" charset="0"/>
+                            </a:rPr>
+                            <m:t>1</m:t>
+                          </m:r>
+                        </m:sub>
+                      </m:sSub>
+                    </m:oMath>
+                  </m:oMathPara>
+                </a14:m>
+                <a:endParaRPr lang="en-IN" sz="1400" dirty="0"/>
+              </a:p>
+            </p:txBody>
+          </p:sp>
+        </mc:Choice>
+        <mc:Fallback xmlns="">
+          <p:sp>
+            <p:nvSpPr>
+              <p:cNvPr id="100" name="TextBox 99">
+                <a:extLst>
+                  <a:ext uri="{FF2B5EF4-FFF2-40B4-BE49-F238E27FC236}">
+                    <a16:creationId xmlns:a16="http://schemas.microsoft.com/office/drawing/2014/main" id="{E7B31CAD-2362-B9E8-D289-062EF5F780C2}"/>
+                  </a:ext>
+                </a:extLst>
+              </p:cNvPr>
+              <p:cNvSpPr txBox="1">
+                <a:spLocks noRot="1" noChangeAspect="1" noMove="1" noResize="1" noEditPoints="1" noAdjustHandles="1" noChangeArrowheads="1" noChangeShapeType="1" noTextEdit="1"/>
+              </p:cNvSpPr>
+              <p:nvPr/>
+            </p:nvSpPr>
+            <p:spPr>
+              <a:xfrm>
+                <a:off x="3768675" y="2727340"/>
+                <a:ext cx="211661" cy="215444"/>
+              </a:xfrm>
+              <a:prstGeom prst="rect">
+                <a:avLst/>
+              </a:prstGeom>
+              <a:blipFill>
+                <a:blip r:embed="rId2"/>
+                <a:stretch>
+                  <a:fillRect l="-20000" r="-2857" b="-11111"/>
+                </a:stretch>
+              </a:blipFill>
+            </p:spPr>
+            <p:txBody>
+              <a:bodyPr/>
+              <a:lstStyle/>
+              <a:p>
+                <a:r>
+                  <a:rPr lang="en-IN">
+                    <a:noFill/>
+                  </a:rPr>
+                  <a:t> </a:t>
+                </a:r>
+              </a:p>
+            </p:txBody>
+          </p:sp>
+        </mc:Fallback>
+      </mc:AlternateContent>
+      <mc:AlternateContent xmlns:mc="http://schemas.openxmlformats.org/markup-compatibility/2006" xmlns:a14="http://schemas.microsoft.com/office/drawing/2010/main">
+        <mc:Choice Requires="a14">
+          <p:sp>
+            <p:nvSpPr>
+              <p:cNvPr id="101" name="TextBox 100">
+                <a:extLst>
+                  <a:ext uri="{FF2B5EF4-FFF2-40B4-BE49-F238E27FC236}">
+                    <a16:creationId xmlns:a16="http://schemas.microsoft.com/office/drawing/2014/main" id="{F9A19F15-A1B2-1AD5-C934-F029AA6C193B}"/>
+                  </a:ext>
+                </a:extLst>
+              </p:cNvPr>
+              <p:cNvSpPr txBox="1"/>
+              <p:nvPr/>
+            </p:nvSpPr>
+            <p:spPr>
+              <a:xfrm>
+                <a:off x="4328219" y="2333362"/>
+                <a:ext cx="215828" cy="215444"/>
+              </a:xfrm>
+              <a:prstGeom prst="rect">
+                <a:avLst/>
+              </a:prstGeom>
+              <a:noFill/>
+            </p:spPr>
+            <p:txBody>
+              <a:bodyPr wrap="none" lIns="0" tIns="0" rIns="0" bIns="0" rtlCol="0">
+                <a:spAutoFit/>
+              </a:bodyPr>
+              <a:lstStyle/>
+              <a:p>
+                <a:pPr/>
+                <a14:m>
+                  <m:oMathPara xmlns:m="http://schemas.openxmlformats.org/officeDocument/2006/math">
+                    <m:oMath>
+                      <m:sSub>
+                        <m:sSubPr>
+                          <m:ctrlPr>
+                            <a:rPr lang="en-IN" sz="1400" i="1" smtClean="0">
+                              <a:solidFill>
+                                <a:srgbClr val="FF0000"/>
+                              </a:solidFill>
+                              <a:latin typeface="Cambria Math" panose="02040503050406030204" pitchFamily="18" charset="0"/>
+                              <a:ea typeface="Cambria Math" panose="02040503050406030204" pitchFamily="18" charset="0"/>
+                            </a:rPr>
+                          </m:ctrlPr>
+                        </m:sSubPr>
+                        <m:e>
+                          <m:r>
+                            <a:rPr lang="en-IN" sz="1400" i="1" smtClean="0">
+                              <a:solidFill>
+                                <a:srgbClr val="FF0000"/>
+                              </a:solidFill>
+                              <a:latin typeface="Cambria Math" panose="02040503050406030204" pitchFamily="18" charset="0"/>
+                              <a:ea typeface="Cambria Math" panose="02040503050406030204" pitchFamily="18" charset="0"/>
+                            </a:rPr>
+                            <m:t>𝜆</m:t>
+                          </m:r>
+                        </m:e>
+                        <m:sub>
+                          <m:r>
+                            <a:rPr lang="en-US" sz="1400" b="0" i="1" smtClean="0">
+                              <a:solidFill>
+                                <a:srgbClr val="FF0000"/>
+                              </a:solidFill>
+                              <a:latin typeface="Cambria Math" panose="02040503050406030204" pitchFamily="18" charset="0"/>
+                            </a:rPr>
+                            <m:t>2</m:t>
+                          </m:r>
+                        </m:sub>
+                      </m:sSub>
+                    </m:oMath>
+                  </m:oMathPara>
+                </a14:m>
+                <a:endParaRPr lang="en-IN" sz="1400" dirty="0"/>
+              </a:p>
+            </p:txBody>
+          </p:sp>
+        </mc:Choice>
+        <mc:Fallback xmlns="">
+          <p:sp>
+            <p:nvSpPr>
+              <p:cNvPr id="101" name="TextBox 100">
+                <a:extLst>
+                  <a:ext uri="{FF2B5EF4-FFF2-40B4-BE49-F238E27FC236}">
+                    <a16:creationId xmlns:a16="http://schemas.microsoft.com/office/drawing/2014/main" id="{F9A19F15-A1B2-1AD5-C934-F029AA6C193B}"/>
+                  </a:ext>
+                </a:extLst>
+              </p:cNvPr>
+              <p:cNvSpPr txBox="1">
+                <a:spLocks noRot="1" noChangeAspect="1" noMove="1" noResize="1" noEditPoints="1" noAdjustHandles="1" noChangeArrowheads="1" noChangeShapeType="1" noTextEdit="1"/>
+              </p:cNvSpPr>
+              <p:nvPr/>
+            </p:nvSpPr>
+            <p:spPr>
+              <a:xfrm>
+                <a:off x="4328219" y="2333362"/>
+                <a:ext cx="215828" cy="215444"/>
+              </a:xfrm>
+              <a:prstGeom prst="rect">
+                <a:avLst/>
+              </a:prstGeom>
+              <a:blipFill>
+                <a:blip r:embed="rId3"/>
+                <a:stretch>
+                  <a:fillRect l="-20000" r="-5714" b="-14286"/>
+                </a:stretch>
+              </a:blipFill>
+            </p:spPr>
+            <p:txBody>
+              <a:bodyPr/>
+              <a:lstStyle/>
+              <a:p>
+                <a:r>
+                  <a:rPr lang="en-IN">
+                    <a:noFill/>
+                  </a:rPr>
+                  <a:t> </a:t>
+                </a:r>
+              </a:p>
+            </p:txBody>
+          </p:sp>
+        </mc:Fallback>
+      </mc:AlternateContent>
+      <mc:AlternateContent xmlns:mc="http://schemas.openxmlformats.org/markup-compatibility/2006" xmlns:a14="http://schemas.microsoft.com/office/drawing/2010/main">
+        <mc:Choice Requires="a14">
+          <p:sp>
+            <p:nvSpPr>
+              <p:cNvPr id="102" name="TextBox 101">
+                <a:extLst>
+                  <a:ext uri="{FF2B5EF4-FFF2-40B4-BE49-F238E27FC236}">
+                    <a16:creationId xmlns:a16="http://schemas.microsoft.com/office/drawing/2014/main" id="{CE9289BB-676D-6737-6A7C-37E3C06D6A26}"/>
+                  </a:ext>
+                </a:extLst>
+              </p:cNvPr>
+              <p:cNvSpPr txBox="1"/>
+              <p:nvPr/>
+            </p:nvSpPr>
+            <p:spPr>
+              <a:xfrm>
+                <a:off x="4539357" y="3031106"/>
+                <a:ext cx="215828" cy="215444"/>
+              </a:xfrm>
+              <a:prstGeom prst="rect">
+                <a:avLst/>
+              </a:prstGeom>
+              <a:noFill/>
+            </p:spPr>
+            <p:txBody>
+              <a:bodyPr wrap="none" lIns="0" tIns="0" rIns="0" bIns="0" rtlCol="0">
+                <a:spAutoFit/>
+              </a:bodyPr>
+              <a:lstStyle/>
+              <a:p>
+                <a:pPr/>
+                <a14:m>
+                  <m:oMathPara xmlns:m="http://schemas.openxmlformats.org/officeDocument/2006/math">
+                    <m:oMath>
+                      <m:sSub>
+                        <m:sSubPr>
+                          <m:ctrlPr>
+                            <a:rPr lang="en-IN" sz="1400" i="1" smtClean="0">
+                              <a:solidFill>
+                                <a:srgbClr val="FF0000"/>
+                              </a:solidFill>
+                              <a:latin typeface="Cambria Math" panose="02040503050406030204" pitchFamily="18" charset="0"/>
+                              <a:ea typeface="Cambria Math" panose="02040503050406030204" pitchFamily="18" charset="0"/>
+                            </a:rPr>
+                          </m:ctrlPr>
+                        </m:sSubPr>
+                        <m:e>
+                          <m:r>
+                            <a:rPr lang="en-IN" sz="1400" i="1" smtClean="0">
+                              <a:solidFill>
+                                <a:srgbClr val="FF0000"/>
+                              </a:solidFill>
+                              <a:latin typeface="Cambria Math" panose="02040503050406030204" pitchFamily="18" charset="0"/>
+                              <a:ea typeface="Cambria Math" panose="02040503050406030204" pitchFamily="18" charset="0"/>
+                            </a:rPr>
+                            <m:t>𝜆</m:t>
+                          </m:r>
+                        </m:e>
+                        <m:sub>
+                          <m:r>
+                            <a:rPr lang="en-US" sz="1400" b="0" i="1" smtClean="0">
+                              <a:solidFill>
+                                <a:srgbClr val="FF0000"/>
+                              </a:solidFill>
+                              <a:latin typeface="Cambria Math" panose="02040503050406030204" pitchFamily="18" charset="0"/>
+                            </a:rPr>
+                            <m:t>3</m:t>
+                          </m:r>
+                        </m:sub>
+                      </m:sSub>
+                    </m:oMath>
+                  </m:oMathPara>
+                </a14:m>
+                <a:endParaRPr lang="en-IN" sz="1400" dirty="0"/>
+              </a:p>
+            </p:txBody>
+          </p:sp>
+        </mc:Choice>
+        <mc:Fallback xmlns="">
+          <p:sp>
+            <p:nvSpPr>
+              <p:cNvPr id="102" name="TextBox 101">
+                <a:extLst>
+                  <a:ext uri="{FF2B5EF4-FFF2-40B4-BE49-F238E27FC236}">
+                    <a16:creationId xmlns:a16="http://schemas.microsoft.com/office/drawing/2014/main" id="{CE9289BB-676D-6737-6A7C-37E3C06D6A26}"/>
+                  </a:ext>
+                </a:extLst>
+              </p:cNvPr>
+              <p:cNvSpPr txBox="1">
+                <a:spLocks noRot="1" noChangeAspect="1" noMove="1" noResize="1" noEditPoints="1" noAdjustHandles="1" noChangeArrowheads="1" noChangeShapeType="1" noTextEdit="1"/>
+              </p:cNvSpPr>
+              <p:nvPr/>
+            </p:nvSpPr>
+            <p:spPr>
+              <a:xfrm>
+                <a:off x="4539357" y="3031106"/>
+                <a:ext cx="215828" cy="215444"/>
+              </a:xfrm>
+              <a:prstGeom prst="rect">
+                <a:avLst/>
+              </a:prstGeom>
+              <a:blipFill>
+                <a:blip r:embed="rId4"/>
+                <a:stretch>
+                  <a:fillRect l="-22857" r="-5714" b="-11111"/>
+                </a:stretch>
+              </a:blipFill>
+            </p:spPr>
+            <p:txBody>
+              <a:bodyPr/>
+              <a:lstStyle/>
+              <a:p>
+                <a:r>
+                  <a:rPr lang="en-IN">
+                    <a:noFill/>
+                  </a:rPr>
+                  <a:t> </a:t>
+                </a:r>
+              </a:p>
+            </p:txBody>
+          </p:sp>
+        </mc:Fallback>
+      </mc:AlternateContent>
+      <mc:AlternateContent xmlns:mc="http://schemas.openxmlformats.org/markup-compatibility/2006" xmlns:a14="http://schemas.microsoft.com/office/drawing/2010/main">
+        <mc:Choice Requires="a14">
+          <p:sp>
+            <p:nvSpPr>
+              <p:cNvPr id="103" name="TextBox 102">
+                <a:extLst>
+                  <a:ext uri="{FF2B5EF4-FFF2-40B4-BE49-F238E27FC236}">
+                    <a16:creationId xmlns:a16="http://schemas.microsoft.com/office/drawing/2014/main" id="{B4873CF2-E34C-6844-F777-0379EC04D08D}"/>
+                  </a:ext>
+                </a:extLst>
+              </p:cNvPr>
+              <p:cNvSpPr txBox="1"/>
+              <p:nvPr/>
+            </p:nvSpPr>
+            <p:spPr>
+              <a:xfrm>
+                <a:off x="5077678" y="2752355"/>
+                <a:ext cx="215828" cy="215444"/>
+              </a:xfrm>
+              <a:prstGeom prst="rect">
+                <a:avLst/>
+              </a:prstGeom>
+              <a:noFill/>
+            </p:spPr>
+            <p:txBody>
+              <a:bodyPr wrap="none" lIns="0" tIns="0" rIns="0" bIns="0" rtlCol="0">
+                <a:spAutoFit/>
+              </a:bodyPr>
+              <a:lstStyle/>
+              <a:p>
+                <a:pPr/>
+                <a14:m>
+                  <m:oMathPara xmlns:m="http://schemas.openxmlformats.org/officeDocument/2006/math">
+                    <m:oMath>
+                      <m:sSub>
+                        <m:sSubPr>
+                          <m:ctrlPr>
+                            <a:rPr lang="en-IN" sz="1400" i="1" smtClean="0">
+                              <a:solidFill>
+                                <a:srgbClr val="FF0000"/>
+                              </a:solidFill>
+                              <a:latin typeface="Cambria Math" panose="02040503050406030204" pitchFamily="18" charset="0"/>
+                              <a:ea typeface="Cambria Math" panose="02040503050406030204" pitchFamily="18" charset="0"/>
+                            </a:rPr>
+                          </m:ctrlPr>
+                        </m:sSubPr>
+                        <m:e>
+                          <m:r>
+                            <a:rPr lang="en-IN" sz="1400" i="1" smtClean="0">
+                              <a:solidFill>
+                                <a:srgbClr val="FF0000"/>
+                              </a:solidFill>
+                              <a:latin typeface="Cambria Math" panose="02040503050406030204" pitchFamily="18" charset="0"/>
+                              <a:ea typeface="Cambria Math" panose="02040503050406030204" pitchFamily="18" charset="0"/>
+                            </a:rPr>
+                            <m:t>𝜆</m:t>
+                          </m:r>
+                        </m:e>
+                        <m:sub>
+                          <m:r>
+                            <a:rPr lang="en-US" sz="1400" b="0" i="1" smtClean="0">
+                              <a:solidFill>
+                                <a:srgbClr val="FF0000"/>
+                              </a:solidFill>
+                              <a:latin typeface="Cambria Math" panose="02040503050406030204" pitchFamily="18" charset="0"/>
+                            </a:rPr>
+                            <m:t>4</m:t>
+                          </m:r>
+                        </m:sub>
+                      </m:sSub>
+                    </m:oMath>
+                  </m:oMathPara>
+                </a14:m>
+                <a:endParaRPr lang="en-IN" sz="1400" dirty="0"/>
+              </a:p>
+            </p:txBody>
+          </p:sp>
+        </mc:Choice>
+        <mc:Fallback xmlns="">
+          <p:sp>
+            <p:nvSpPr>
+              <p:cNvPr id="103" name="TextBox 102">
+                <a:extLst>
+                  <a:ext uri="{FF2B5EF4-FFF2-40B4-BE49-F238E27FC236}">
+                    <a16:creationId xmlns:a16="http://schemas.microsoft.com/office/drawing/2014/main" id="{B4873CF2-E34C-6844-F777-0379EC04D08D}"/>
+                  </a:ext>
+                </a:extLst>
+              </p:cNvPr>
+              <p:cNvSpPr txBox="1">
+                <a:spLocks noRot="1" noChangeAspect="1" noMove="1" noResize="1" noEditPoints="1" noAdjustHandles="1" noChangeArrowheads="1" noChangeShapeType="1" noTextEdit="1"/>
+              </p:cNvSpPr>
+              <p:nvPr/>
+            </p:nvSpPr>
+            <p:spPr>
+              <a:xfrm>
+                <a:off x="5077678" y="2752355"/>
+                <a:ext cx="215828" cy="215444"/>
+              </a:xfrm>
+              <a:prstGeom prst="rect">
+                <a:avLst/>
+              </a:prstGeom>
+              <a:blipFill>
+                <a:blip r:embed="rId5"/>
+                <a:stretch>
+                  <a:fillRect l="-22857" r="-5714" b="-14286"/>
+                </a:stretch>
+              </a:blipFill>
+            </p:spPr>
+            <p:txBody>
+              <a:bodyPr/>
+              <a:lstStyle/>
+              <a:p>
+                <a:r>
+                  <a:rPr lang="en-IN">
+                    <a:noFill/>
+                  </a:rPr>
+                  <a:t> </a:t>
+                </a:r>
+              </a:p>
+            </p:txBody>
+          </p:sp>
+        </mc:Fallback>
+      </mc:AlternateContent>
+      <mc:AlternateContent xmlns:mc="http://schemas.openxmlformats.org/markup-compatibility/2006" xmlns:a14="http://schemas.microsoft.com/office/drawing/2010/main">
+        <mc:Choice Requires="a14">
+          <p:sp>
+            <p:nvSpPr>
+              <p:cNvPr id="104" name="TextBox 103">
+                <a:extLst>
+                  <a:ext uri="{FF2B5EF4-FFF2-40B4-BE49-F238E27FC236}">
+                    <a16:creationId xmlns:a16="http://schemas.microsoft.com/office/drawing/2014/main" id="{8A1B806B-270B-44E3-943D-F64A780CD7EA}"/>
+                  </a:ext>
+                </a:extLst>
+              </p:cNvPr>
+              <p:cNvSpPr txBox="1"/>
+              <p:nvPr/>
+            </p:nvSpPr>
+            <p:spPr>
+              <a:xfrm>
+                <a:off x="5992893" y="2110027"/>
+                <a:ext cx="215828" cy="215444"/>
+              </a:xfrm>
+              <a:prstGeom prst="rect">
+                <a:avLst/>
+              </a:prstGeom>
+              <a:noFill/>
+            </p:spPr>
+            <p:txBody>
+              <a:bodyPr wrap="none" lIns="0" tIns="0" rIns="0" bIns="0" rtlCol="0">
+                <a:spAutoFit/>
+              </a:bodyPr>
+              <a:lstStyle/>
+              <a:p>
+                <a:pPr/>
+                <a14:m>
+                  <m:oMathPara xmlns:m="http://schemas.openxmlformats.org/officeDocument/2006/math">
+                    <m:oMath>
+                      <m:sSub>
+                        <m:sSubPr>
+                          <m:ctrlPr>
+                            <a:rPr lang="en-IN" sz="1400" i="1" smtClean="0">
+                              <a:solidFill>
+                                <a:srgbClr val="FF0000"/>
+                              </a:solidFill>
+                              <a:latin typeface="Cambria Math" panose="02040503050406030204" pitchFamily="18" charset="0"/>
+                              <a:ea typeface="Cambria Math" panose="02040503050406030204" pitchFamily="18" charset="0"/>
+                            </a:rPr>
+                          </m:ctrlPr>
+                        </m:sSubPr>
+                        <m:e>
+                          <m:r>
+                            <a:rPr lang="en-IN" sz="1400" i="1" smtClean="0">
+                              <a:solidFill>
+                                <a:srgbClr val="FF0000"/>
+                              </a:solidFill>
+                              <a:latin typeface="Cambria Math" panose="02040503050406030204" pitchFamily="18" charset="0"/>
+                              <a:ea typeface="Cambria Math" panose="02040503050406030204" pitchFamily="18" charset="0"/>
+                            </a:rPr>
+                            <m:t>𝜆</m:t>
+                          </m:r>
+                        </m:e>
+                        <m:sub>
+                          <m:r>
+                            <a:rPr lang="en-US" sz="1400" b="0" i="1" smtClean="0">
+                              <a:solidFill>
+                                <a:srgbClr val="FF0000"/>
+                              </a:solidFill>
+                              <a:latin typeface="Cambria Math" panose="02040503050406030204" pitchFamily="18" charset="0"/>
+                            </a:rPr>
+                            <m:t>5</m:t>
+                          </m:r>
+                        </m:sub>
+                      </m:sSub>
+                    </m:oMath>
+                  </m:oMathPara>
+                </a14:m>
+                <a:endParaRPr lang="en-IN" sz="1400" dirty="0"/>
+              </a:p>
+            </p:txBody>
+          </p:sp>
+        </mc:Choice>
+        <mc:Fallback xmlns="">
+          <p:sp>
+            <p:nvSpPr>
+              <p:cNvPr id="104" name="TextBox 103">
+                <a:extLst>
+                  <a:ext uri="{FF2B5EF4-FFF2-40B4-BE49-F238E27FC236}">
+                    <a16:creationId xmlns:a16="http://schemas.microsoft.com/office/drawing/2014/main" id="{8A1B806B-270B-44E3-943D-F64A780CD7EA}"/>
+                  </a:ext>
+                </a:extLst>
+              </p:cNvPr>
+              <p:cNvSpPr txBox="1">
+                <a:spLocks noRot="1" noChangeAspect="1" noMove="1" noResize="1" noEditPoints="1" noAdjustHandles="1" noChangeArrowheads="1" noChangeShapeType="1" noTextEdit="1"/>
+              </p:cNvSpPr>
+              <p:nvPr/>
+            </p:nvSpPr>
+            <p:spPr>
+              <a:xfrm>
+                <a:off x="5992893" y="2110027"/>
+                <a:ext cx="215828" cy="215444"/>
+              </a:xfrm>
+              <a:prstGeom prst="rect">
+                <a:avLst/>
+              </a:prstGeom>
+              <a:blipFill>
+                <a:blip r:embed="rId6"/>
+                <a:stretch>
+                  <a:fillRect l="-20000" r="-8571" b="-17143"/>
+                </a:stretch>
+              </a:blipFill>
+            </p:spPr>
+            <p:txBody>
+              <a:bodyPr/>
+              <a:lstStyle/>
+              <a:p>
+                <a:r>
+                  <a:rPr lang="en-IN">
+                    <a:noFill/>
+                  </a:rPr>
+                  <a:t> </a:t>
+                </a:r>
+              </a:p>
+            </p:txBody>
+          </p:sp>
+        </mc:Fallback>
+      </mc:AlternateContent>
+      <mc:AlternateContent xmlns:mc="http://schemas.openxmlformats.org/markup-compatibility/2006" xmlns:a14="http://schemas.microsoft.com/office/drawing/2010/main">
+        <mc:Choice Requires="a14">
+          <p:sp>
+            <p:nvSpPr>
+              <p:cNvPr id="105" name="TextBox 104">
+                <a:extLst>
+                  <a:ext uri="{FF2B5EF4-FFF2-40B4-BE49-F238E27FC236}">
+                    <a16:creationId xmlns:a16="http://schemas.microsoft.com/office/drawing/2014/main" id="{79366CD4-C8F8-504B-05E6-3E4F1E9B4C49}"/>
+                  </a:ext>
+                </a:extLst>
+              </p:cNvPr>
+              <p:cNvSpPr txBox="1"/>
+              <p:nvPr/>
+            </p:nvSpPr>
+            <p:spPr>
+              <a:xfrm>
+                <a:off x="6716673" y="2369974"/>
+                <a:ext cx="215828" cy="215444"/>
+              </a:xfrm>
+              <a:prstGeom prst="rect">
+                <a:avLst/>
+              </a:prstGeom>
+              <a:noFill/>
+            </p:spPr>
+            <p:txBody>
+              <a:bodyPr wrap="none" lIns="0" tIns="0" rIns="0" bIns="0" rtlCol="0">
+                <a:spAutoFit/>
+              </a:bodyPr>
+              <a:lstStyle/>
+              <a:p>
+                <a:pPr/>
+                <a14:m>
+                  <m:oMathPara xmlns:m="http://schemas.openxmlformats.org/officeDocument/2006/math">
+                    <m:oMath>
+                      <m:sSub>
+                        <m:sSubPr>
+                          <m:ctrlPr>
+                            <a:rPr lang="en-IN" sz="1400" i="1" smtClean="0">
+                              <a:solidFill>
+                                <a:srgbClr val="FF0000"/>
+                              </a:solidFill>
+                              <a:latin typeface="Cambria Math" panose="02040503050406030204" pitchFamily="18" charset="0"/>
+                              <a:ea typeface="Cambria Math" panose="02040503050406030204" pitchFamily="18" charset="0"/>
+                            </a:rPr>
+                          </m:ctrlPr>
+                        </m:sSubPr>
+                        <m:e>
+                          <m:r>
+                            <a:rPr lang="en-IN" sz="1400" i="1" smtClean="0">
+                              <a:solidFill>
+                                <a:srgbClr val="FF0000"/>
+                              </a:solidFill>
+                              <a:latin typeface="Cambria Math" panose="02040503050406030204" pitchFamily="18" charset="0"/>
+                              <a:ea typeface="Cambria Math" panose="02040503050406030204" pitchFamily="18" charset="0"/>
+                            </a:rPr>
+                            <m:t>𝜆</m:t>
+                          </m:r>
+                        </m:e>
+                        <m:sub>
+                          <m:r>
+                            <a:rPr lang="en-US" sz="1400" b="0" i="1" smtClean="0">
+                              <a:solidFill>
+                                <a:srgbClr val="FF0000"/>
+                              </a:solidFill>
+                              <a:latin typeface="Cambria Math" panose="02040503050406030204" pitchFamily="18" charset="0"/>
+                            </a:rPr>
+                            <m:t>6</m:t>
+                          </m:r>
+                        </m:sub>
+                      </m:sSub>
+                    </m:oMath>
+                  </m:oMathPara>
+                </a14:m>
+                <a:endParaRPr lang="en-IN" sz="1400" dirty="0"/>
+              </a:p>
+            </p:txBody>
+          </p:sp>
+        </mc:Choice>
+        <mc:Fallback xmlns="">
+          <p:sp>
+            <p:nvSpPr>
+              <p:cNvPr id="105" name="TextBox 104">
+                <a:extLst>
+                  <a:ext uri="{FF2B5EF4-FFF2-40B4-BE49-F238E27FC236}">
+                    <a16:creationId xmlns:a16="http://schemas.microsoft.com/office/drawing/2014/main" id="{79366CD4-C8F8-504B-05E6-3E4F1E9B4C49}"/>
+                  </a:ext>
+                </a:extLst>
+              </p:cNvPr>
+              <p:cNvSpPr txBox="1">
+                <a:spLocks noRot="1" noChangeAspect="1" noMove="1" noResize="1" noEditPoints="1" noAdjustHandles="1" noChangeArrowheads="1" noChangeShapeType="1" noTextEdit="1"/>
+              </p:cNvSpPr>
+              <p:nvPr/>
+            </p:nvSpPr>
+            <p:spPr>
+              <a:xfrm>
+                <a:off x="6716673" y="2369974"/>
+                <a:ext cx="215828" cy="215444"/>
+              </a:xfrm>
+              <a:prstGeom prst="rect">
+                <a:avLst/>
+              </a:prstGeom>
+              <a:blipFill>
+                <a:blip r:embed="rId7"/>
+                <a:stretch>
+                  <a:fillRect l="-22857" r="-5714" b="-14286"/>
+                </a:stretch>
+              </a:blipFill>
+            </p:spPr>
+            <p:txBody>
+              <a:bodyPr/>
+              <a:lstStyle/>
+              <a:p>
+                <a:r>
+                  <a:rPr lang="en-IN">
+                    <a:noFill/>
+                  </a:rPr>
+                  <a:t> </a:t>
+                </a:r>
+              </a:p>
+            </p:txBody>
+          </p:sp>
+        </mc:Fallback>
+      </mc:AlternateContent>
+      <mc:AlternateContent xmlns:mc="http://schemas.openxmlformats.org/markup-compatibility/2006" xmlns:a14="http://schemas.microsoft.com/office/drawing/2010/main">
+        <mc:Choice Requires="a14">
+          <p:sp>
+            <p:nvSpPr>
+              <p:cNvPr id="106" name="TextBox 105">
+                <a:extLst>
+                  <a:ext uri="{FF2B5EF4-FFF2-40B4-BE49-F238E27FC236}">
+                    <a16:creationId xmlns:a16="http://schemas.microsoft.com/office/drawing/2014/main" id="{D4DF85F2-E8AA-472B-2A10-C4834A423FE1}"/>
+                  </a:ext>
+                </a:extLst>
+              </p:cNvPr>
+              <p:cNvSpPr txBox="1"/>
+              <p:nvPr/>
+            </p:nvSpPr>
+            <p:spPr>
+              <a:xfrm>
+                <a:off x="6076142" y="3195194"/>
+                <a:ext cx="215828" cy="215444"/>
+              </a:xfrm>
+              <a:prstGeom prst="rect">
+                <a:avLst/>
+              </a:prstGeom>
+              <a:noFill/>
+            </p:spPr>
+            <p:txBody>
+              <a:bodyPr wrap="none" lIns="0" tIns="0" rIns="0" bIns="0" rtlCol="0">
+                <a:spAutoFit/>
+              </a:bodyPr>
+              <a:lstStyle/>
+              <a:p>
+                <a:pPr/>
+                <a14:m>
+                  <m:oMathPara xmlns:m="http://schemas.openxmlformats.org/officeDocument/2006/math">
+                    <m:oMath>
+                      <m:sSub>
+                        <m:sSubPr>
+                          <m:ctrlPr>
+                            <a:rPr lang="en-IN" sz="1400" i="1" smtClean="0">
+                              <a:solidFill>
+                                <a:srgbClr val="FF0000"/>
+                              </a:solidFill>
+                              <a:latin typeface="Cambria Math" panose="02040503050406030204" pitchFamily="18" charset="0"/>
+                              <a:ea typeface="Cambria Math" panose="02040503050406030204" pitchFamily="18" charset="0"/>
+                            </a:rPr>
+                          </m:ctrlPr>
+                        </m:sSubPr>
+                        <m:e>
+                          <m:r>
+                            <a:rPr lang="en-IN" sz="1400" i="1" smtClean="0">
+                              <a:solidFill>
+                                <a:srgbClr val="FF0000"/>
+                              </a:solidFill>
+                              <a:latin typeface="Cambria Math" panose="02040503050406030204" pitchFamily="18" charset="0"/>
+                              <a:ea typeface="Cambria Math" panose="02040503050406030204" pitchFamily="18" charset="0"/>
+                            </a:rPr>
+                            <m:t>𝜆</m:t>
+                          </m:r>
+                        </m:e>
+                        <m:sub>
+                          <m:r>
+                            <a:rPr lang="en-US" sz="1400" b="0" i="1" smtClean="0">
+                              <a:solidFill>
+                                <a:srgbClr val="FF0000"/>
+                              </a:solidFill>
+                              <a:latin typeface="Cambria Math" panose="02040503050406030204" pitchFamily="18" charset="0"/>
+                            </a:rPr>
+                            <m:t>7</m:t>
+                          </m:r>
+                        </m:sub>
+                      </m:sSub>
+                    </m:oMath>
+                  </m:oMathPara>
+                </a14:m>
+                <a:endParaRPr lang="en-IN" sz="1400" dirty="0"/>
+              </a:p>
+            </p:txBody>
+          </p:sp>
+        </mc:Choice>
+        <mc:Fallback xmlns="">
+          <p:sp>
+            <p:nvSpPr>
+              <p:cNvPr id="106" name="TextBox 105">
+                <a:extLst>
+                  <a:ext uri="{FF2B5EF4-FFF2-40B4-BE49-F238E27FC236}">
+                    <a16:creationId xmlns:a16="http://schemas.microsoft.com/office/drawing/2014/main" id="{D4DF85F2-E8AA-472B-2A10-C4834A423FE1}"/>
+                  </a:ext>
+                </a:extLst>
+              </p:cNvPr>
+              <p:cNvSpPr txBox="1">
+                <a:spLocks noRot="1" noChangeAspect="1" noMove="1" noResize="1" noEditPoints="1" noAdjustHandles="1" noChangeArrowheads="1" noChangeShapeType="1" noTextEdit="1"/>
+              </p:cNvSpPr>
+              <p:nvPr/>
+            </p:nvSpPr>
+            <p:spPr>
+              <a:xfrm>
+                <a:off x="6076142" y="3195194"/>
+                <a:ext cx="215828" cy="215444"/>
+              </a:xfrm>
+              <a:prstGeom prst="rect">
+                <a:avLst/>
+              </a:prstGeom>
+              <a:blipFill>
+                <a:blip r:embed="rId8"/>
+                <a:stretch>
+                  <a:fillRect l="-22857" r="-5714" b="-14286"/>
+                </a:stretch>
+              </a:blipFill>
+            </p:spPr>
+            <p:txBody>
+              <a:bodyPr/>
+              <a:lstStyle/>
+              <a:p>
+                <a:r>
+                  <a:rPr lang="en-IN">
+                    <a:noFill/>
+                  </a:rPr>
+                  <a:t> </a:t>
+                </a:r>
+              </a:p>
+            </p:txBody>
+          </p:sp>
+        </mc:Fallback>
+      </mc:AlternateContent>
+      <mc:AlternateContent xmlns:mc="http://schemas.openxmlformats.org/markup-compatibility/2006" xmlns:a14="http://schemas.microsoft.com/office/drawing/2010/main">
+        <mc:Choice Requires="a14">
+          <p:sp>
+            <p:nvSpPr>
+              <p:cNvPr id="107" name="TextBox 106">
+                <a:extLst>
+                  <a:ext uri="{FF2B5EF4-FFF2-40B4-BE49-F238E27FC236}">
+                    <a16:creationId xmlns:a16="http://schemas.microsoft.com/office/drawing/2014/main" id="{E786D889-94C4-9E24-F899-875780FCBF75}"/>
+                  </a:ext>
+                </a:extLst>
+              </p:cNvPr>
+              <p:cNvSpPr txBox="1"/>
+              <p:nvPr/>
+            </p:nvSpPr>
+            <p:spPr>
+              <a:xfrm>
+                <a:off x="6559307" y="2883303"/>
+                <a:ext cx="215828" cy="215444"/>
+              </a:xfrm>
+              <a:prstGeom prst="rect">
+                <a:avLst/>
+              </a:prstGeom>
+              <a:noFill/>
+            </p:spPr>
+            <p:txBody>
+              <a:bodyPr wrap="none" lIns="0" tIns="0" rIns="0" bIns="0" rtlCol="0">
+                <a:spAutoFit/>
+              </a:bodyPr>
+              <a:lstStyle/>
+              <a:p>
+                <a:pPr/>
+                <a14:m>
+                  <m:oMathPara xmlns:m="http://schemas.openxmlformats.org/officeDocument/2006/math">
+                    <m:oMath>
+                      <m:sSub>
+                        <m:sSubPr>
+                          <m:ctrlPr>
+                            <a:rPr lang="en-IN" sz="1400" i="1" smtClean="0">
+                              <a:solidFill>
+                                <a:srgbClr val="FF0000"/>
+                              </a:solidFill>
+                              <a:latin typeface="Cambria Math" panose="02040503050406030204" pitchFamily="18" charset="0"/>
+                              <a:ea typeface="Cambria Math" panose="02040503050406030204" pitchFamily="18" charset="0"/>
+                            </a:rPr>
+                          </m:ctrlPr>
+                        </m:sSubPr>
+                        <m:e>
+                          <m:r>
+                            <a:rPr lang="en-IN" sz="1400" i="1" smtClean="0">
+                              <a:solidFill>
+                                <a:srgbClr val="FF0000"/>
+                              </a:solidFill>
+                              <a:latin typeface="Cambria Math" panose="02040503050406030204" pitchFamily="18" charset="0"/>
+                              <a:ea typeface="Cambria Math" panose="02040503050406030204" pitchFamily="18" charset="0"/>
+                            </a:rPr>
+                            <m:t>𝜆</m:t>
+                          </m:r>
+                        </m:e>
+                        <m:sub>
+                          <m:r>
+                            <a:rPr lang="en-US" sz="1400" b="0" i="1" smtClean="0">
+                              <a:solidFill>
+                                <a:srgbClr val="FF0000"/>
+                              </a:solidFill>
+                              <a:latin typeface="Cambria Math" panose="02040503050406030204" pitchFamily="18" charset="0"/>
+                            </a:rPr>
+                            <m:t>8</m:t>
+                          </m:r>
+                        </m:sub>
+                      </m:sSub>
+                    </m:oMath>
+                  </m:oMathPara>
+                </a14:m>
+                <a:endParaRPr lang="en-IN" sz="1400" dirty="0"/>
+              </a:p>
+            </p:txBody>
+          </p:sp>
+        </mc:Choice>
+        <mc:Fallback xmlns="">
+          <p:sp>
+            <p:nvSpPr>
+              <p:cNvPr id="107" name="TextBox 106">
+                <a:extLst>
+                  <a:ext uri="{FF2B5EF4-FFF2-40B4-BE49-F238E27FC236}">
+                    <a16:creationId xmlns:a16="http://schemas.microsoft.com/office/drawing/2014/main" id="{E786D889-94C4-9E24-F899-875780FCBF75}"/>
+                  </a:ext>
+                </a:extLst>
+              </p:cNvPr>
+              <p:cNvSpPr txBox="1">
+                <a:spLocks noRot="1" noChangeAspect="1" noMove="1" noResize="1" noEditPoints="1" noAdjustHandles="1" noChangeArrowheads="1" noChangeShapeType="1" noTextEdit="1"/>
+              </p:cNvSpPr>
+              <p:nvPr/>
+            </p:nvSpPr>
+            <p:spPr>
+              <a:xfrm>
+                <a:off x="6559307" y="2883303"/>
+                <a:ext cx="215828" cy="215444"/>
+              </a:xfrm>
+              <a:prstGeom prst="rect">
+                <a:avLst/>
+              </a:prstGeom>
+              <a:blipFill>
+                <a:blip r:embed="rId9"/>
+                <a:stretch>
+                  <a:fillRect l="-20000" r="-5714" b="-14286"/>
+                </a:stretch>
+              </a:blipFill>
+            </p:spPr>
+            <p:txBody>
+              <a:bodyPr/>
+              <a:lstStyle/>
+              <a:p>
+                <a:r>
+                  <a:rPr lang="en-IN">
+                    <a:noFill/>
+                  </a:rPr>
+                  <a:t> </a:t>
+                </a:r>
+              </a:p>
+            </p:txBody>
+          </p:sp>
+        </mc:Fallback>
+      </mc:AlternateContent>
+      <mc:AlternateContent xmlns:mc="http://schemas.openxmlformats.org/markup-compatibility/2006" xmlns:a14="http://schemas.microsoft.com/office/drawing/2010/main">
+        <mc:Choice Requires="a14">
+          <p:sp>
+            <p:nvSpPr>
+              <p:cNvPr id="108" name="TextBox 107">
+                <a:extLst>
+                  <a:ext uri="{FF2B5EF4-FFF2-40B4-BE49-F238E27FC236}">
+                    <a16:creationId xmlns:a16="http://schemas.microsoft.com/office/drawing/2014/main" id="{3D06AECD-C932-39D9-B3A3-E5E22E31C1E9}"/>
+                  </a:ext>
+                </a:extLst>
+              </p:cNvPr>
+              <p:cNvSpPr txBox="1"/>
+              <p:nvPr/>
+            </p:nvSpPr>
+            <p:spPr>
+              <a:xfrm>
+                <a:off x="6731002" y="1422487"/>
+                <a:ext cx="215828" cy="215444"/>
+              </a:xfrm>
+              <a:prstGeom prst="rect">
+                <a:avLst/>
+              </a:prstGeom>
+              <a:noFill/>
+            </p:spPr>
+            <p:txBody>
+              <a:bodyPr wrap="none" lIns="0" tIns="0" rIns="0" bIns="0" rtlCol="0">
+                <a:spAutoFit/>
+              </a:bodyPr>
+              <a:lstStyle/>
+              <a:p>
+                <a:pPr/>
+                <a14:m>
+                  <m:oMathPara xmlns:m="http://schemas.openxmlformats.org/officeDocument/2006/math">
+                    <m:oMath>
+                      <m:sSub>
+                        <m:sSubPr>
+                          <m:ctrlPr>
+                            <a:rPr lang="en-IN" sz="1400" i="1" smtClean="0">
+                              <a:solidFill>
+                                <a:srgbClr val="FF0000"/>
+                              </a:solidFill>
+                              <a:latin typeface="Cambria Math" panose="02040503050406030204" pitchFamily="18" charset="0"/>
+                              <a:ea typeface="Cambria Math" panose="02040503050406030204" pitchFamily="18" charset="0"/>
+                            </a:rPr>
+                          </m:ctrlPr>
+                        </m:sSubPr>
+                        <m:e>
+                          <m:r>
+                            <a:rPr lang="en-IN" sz="1400" i="1" smtClean="0">
+                              <a:solidFill>
+                                <a:srgbClr val="FF0000"/>
+                              </a:solidFill>
+                              <a:latin typeface="Cambria Math" panose="02040503050406030204" pitchFamily="18" charset="0"/>
+                              <a:ea typeface="Cambria Math" panose="02040503050406030204" pitchFamily="18" charset="0"/>
+                            </a:rPr>
+                            <m:t>𝜆</m:t>
+                          </m:r>
+                        </m:e>
+                        <m:sub>
+                          <m:r>
+                            <a:rPr lang="en-US" sz="1400" b="0" i="1" smtClean="0">
+                              <a:solidFill>
+                                <a:srgbClr val="FF0000"/>
+                              </a:solidFill>
+                              <a:latin typeface="Cambria Math" panose="02040503050406030204" pitchFamily="18" charset="0"/>
+                            </a:rPr>
+                            <m:t>9</m:t>
+                          </m:r>
+                        </m:sub>
+                      </m:sSub>
+                    </m:oMath>
+                  </m:oMathPara>
+                </a14:m>
+                <a:endParaRPr lang="en-IN" sz="1400" dirty="0"/>
+              </a:p>
+            </p:txBody>
+          </p:sp>
+        </mc:Choice>
+        <mc:Fallback xmlns="">
+          <p:sp>
+            <p:nvSpPr>
+              <p:cNvPr id="108" name="TextBox 107">
+                <a:extLst>
+                  <a:ext uri="{FF2B5EF4-FFF2-40B4-BE49-F238E27FC236}">
+                    <a16:creationId xmlns:a16="http://schemas.microsoft.com/office/drawing/2014/main" id="{3D06AECD-C932-39D9-B3A3-E5E22E31C1E9}"/>
+                  </a:ext>
+                </a:extLst>
+              </p:cNvPr>
+              <p:cNvSpPr txBox="1">
+                <a:spLocks noRot="1" noChangeAspect="1" noMove="1" noResize="1" noEditPoints="1" noAdjustHandles="1" noChangeArrowheads="1" noChangeShapeType="1" noTextEdit="1"/>
+              </p:cNvSpPr>
+              <p:nvPr/>
+            </p:nvSpPr>
+            <p:spPr>
+              <a:xfrm>
+                <a:off x="6731002" y="1422487"/>
+                <a:ext cx="215828" cy="215444"/>
+              </a:xfrm>
+              <a:prstGeom prst="rect">
+                <a:avLst/>
+              </a:prstGeom>
+              <a:blipFill>
+                <a:blip r:embed="rId10"/>
+                <a:stretch>
+                  <a:fillRect l="-16667" r="-5556" b="-11111"/>
+                </a:stretch>
+              </a:blipFill>
+            </p:spPr>
+            <p:txBody>
+              <a:bodyPr/>
+              <a:lstStyle/>
+              <a:p>
+                <a:r>
+                  <a:rPr lang="en-IN">
+                    <a:noFill/>
+                  </a:rPr>
+                  <a:t> </a:t>
+                </a:r>
+              </a:p>
+            </p:txBody>
+          </p:sp>
+        </mc:Fallback>
+      </mc:AlternateContent>
+      <p:cxnSp>
+        <p:nvCxnSpPr>
+          <p:cNvPr id="109" name="Straight Arrow Connector 108">
+            <a:extLst>
+              <a:ext uri="{FF2B5EF4-FFF2-40B4-BE49-F238E27FC236}">
+                <a16:creationId xmlns:a16="http://schemas.microsoft.com/office/drawing/2014/main" id="{64FC5167-E50A-BDAF-A442-4B672C396C22}"/>
+              </a:ext>
+            </a:extLst>
+          </p:cNvPr>
+          <p:cNvCxnSpPr>
+            <a:cxnSpLocks/>
+          </p:cNvCxnSpPr>
+          <p:nvPr/>
+        </p:nvCxnSpPr>
+        <p:spPr>
+          <a:xfrm flipH="1">
+            <a:off x="8656320" y="3256802"/>
+            <a:ext cx="330496" cy="942350"/>
+          </a:xfrm>
+          <a:prstGeom prst="straightConnector1">
+            <a:avLst/>
+          </a:prstGeom>
+          <a:ln w="12700">
+            <a:solidFill>
+              <a:srgbClr val="C00000"/>
+            </a:solidFill>
+            <a:tailEnd type="triangle"/>
+          </a:ln>
+        </p:spPr>
+        <p:style>
+          <a:lnRef idx="1">
+            <a:schemeClr val="accent1"/>
+          </a:lnRef>
+          <a:fillRef idx="0">
+            <a:schemeClr val="accent1"/>
+          </a:fillRef>
+          <a:effectRef idx="0">
+            <a:schemeClr val="accent1"/>
+          </a:effectRef>
+          <a:fontRef idx="minor">
+            <a:schemeClr val="tx1"/>
+          </a:fontRef>
+        </p:style>
+      </p:cxnSp>
+      <mc:AlternateContent xmlns:mc="http://schemas.openxmlformats.org/markup-compatibility/2006" xmlns:a14="http://schemas.microsoft.com/office/drawing/2010/main">
+        <mc:Choice Requires="a14">
+          <p:sp>
+            <p:nvSpPr>
+              <p:cNvPr id="115" name="TextBox 114">
+                <a:extLst>
+                  <a:ext uri="{FF2B5EF4-FFF2-40B4-BE49-F238E27FC236}">
+                    <a16:creationId xmlns:a16="http://schemas.microsoft.com/office/drawing/2014/main" id="{9466BBB8-8A3D-55EE-987B-E6121F3A7A8A}"/>
+                  </a:ext>
+                </a:extLst>
+              </p:cNvPr>
+              <p:cNvSpPr txBox="1"/>
+              <p:nvPr/>
+            </p:nvSpPr>
+            <p:spPr>
+              <a:xfrm>
+                <a:off x="8362021" y="2277567"/>
+                <a:ext cx="287002" cy="215444"/>
+              </a:xfrm>
+              <a:prstGeom prst="rect">
+                <a:avLst/>
+              </a:prstGeom>
+              <a:noFill/>
+            </p:spPr>
+            <p:txBody>
+              <a:bodyPr wrap="none" lIns="0" tIns="0" rIns="0" bIns="0" rtlCol="0">
+                <a:spAutoFit/>
+              </a:bodyPr>
+              <a:lstStyle/>
+              <a:p>
+                <a:pPr/>
+                <a14:m>
+                  <m:oMathPara xmlns:m="http://schemas.openxmlformats.org/officeDocument/2006/math">
+                    <m:oMath>
+                      <m:sSub>
+                        <m:sSubPr>
+                          <m:ctrlPr>
+                            <a:rPr lang="en-IN" sz="1400" i="1" smtClean="0">
+                              <a:solidFill>
+                                <a:srgbClr val="FF0000"/>
+                              </a:solidFill>
+                              <a:latin typeface="Cambria Math" panose="02040503050406030204" pitchFamily="18" charset="0"/>
+                              <a:ea typeface="Cambria Math" panose="02040503050406030204" pitchFamily="18" charset="0"/>
+                            </a:rPr>
+                          </m:ctrlPr>
+                        </m:sSubPr>
+                        <m:e>
+                          <m:r>
+                            <a:rPr lang="en-IN" sz="1400" i="1" smtClean="0">
+                              <a:solidFill>
+                                <a:srgbClr val="FF0000"/>
+                              </a:solidFill>
+                              <a:latin typeface="Cambria Math" panose="02040503050406030204" pitchFamily="18" charset="0"/>
+                              <a:ea typeface="Cambria Math" panose="02040503050406030204" pitchFamily="18" charset="0"/>
+                            </a:rPr>
+                            <m:t>𝜆</m:t>
+                          </m:r>
+                        </m:e>
+                        <m:sub>
+                          <m:r>
+                            <a:rPr lang="en-US" sz="1400" b="0" i="1" smtClean="0">
+                              <a:solidFill>
+                                <a:srgbClr val="FF0000"/>
+                              </a:solidFill>
+                              <a:latin typeface="Cambria Math" panose="02040503050406030204" pitchFamily="18" charset="0"/>
+                            </a:rPr>
+                            <m:t>10</m:t>
+                          </m:r>
+                        </m:sub>
+                      </m:sSub>
+                    </m:oMath>
+                  </m:oMathPara>
+                </a14:m>
+                <a:endParaRPr lang="en-IN" sz="1400" dirty="0"/>
+              </a:p>
+            </p:txBody>
+          </p:sp>
+        </mc:Choice>
+        <mc:Fallback xmlns="">
+          <p:sp>
+            <p:nvSpPr>
+              <p:cNvPr id="115" name="TextBox 114">
+                <a:extLst>
+                  <a:ext uri="{FF2B5EF4-FFF2-40B4-BE49-F238E27FC236}">
+                    <a16:creationId xmlns:a16="http://schemas.microsoft.com/office/drawing/2014/main" id="{9466BBB8-8A3D-55EE-987B-E6121F3A7A8A}"/>
+                  </a:ext>
+                </a:extLst>
+              </p:cNvPr>
+              <p:cNvSpPr txBox="1">
+                <a:spLocks noRot="1" noChangeAspect="1" noMove="1" noResize="1" noEditPoints="1" noAdjustHandles="1" noChangeArrowheads="1" noChangeShapeType="1" noTextEdit="1"/>
+              </p:cNvSpPr>
+              <p:nvPr/>
+            </p:nvSpPr>
+            <p:spPr>
+              <a:xfrm>
+                <a:off x="8362021" y="2277567"/>
+                <a:ext cx="287002" cy="215444"/>
+              </a:xfrm>
+              <a:prstGeom prst="rect">
+                <a:avLst/>
+              </a:prstGeom>
+              <a:blipFill>
+                <a:blip r:embed="rId11"/>
+                <a:stretch>
+                  <a:fillRect l="-17021" r="-2128" b="-14286"/>
+                </a:stretch>
+              </a:blipFill>
+            </p:spPr>
+            <p:txBody>
+              <a:bodyPr/>
+              <a:lstStyle/>
+              <a:p>
+                <a:r>
+                  <a:rPr lang="en-IN">
+                    <a:noFill/>
+                  </a:rPr>
+                  <a:t> </a:t>
+                </a:r>
+              </a:p>
+            </p:txBody>
+          </p:sp>
+        </mc:Fallback>
+      </mc:AlternateContent>
+      <p:sp>
+        <p:nvSpPr>
+          <p:cNvPr id="116" name="TextBox 115">
+            <a:extLst>
+              <a:ext uri="{FF2B5EF4-FFF2-40B4-BE49-F238E27FC236}">
+                <a16:creationId xmlns:a16="http://schemas.microsoft.com/office/drawing/2014/main" id="{277FF5D1-1F13-DAF1-CE4F-4424B036D36A}"/>
+              </a:ext>
+            </a:extLst>
+          </p:cNvPr>
+          <p:cNvSpPr txBox="1"/>
+          <p:nvPr/>
+        </p:nvSpPr>
+        <p:spPr>
+          <a:xfrm>
+            <a:off x="8595911" y="3146448"/>
+            <a:ext cx="395077" cy="276999"/>
+          </a:xfrm>
+          <a:prstGeom prst="rect">
+            <a:avLst/>
+          </a:prstGeom>
+          <a:noFill/>
+        </p:spPr>
+        <p:txBody>
+          <a:bodyPr wrap="square" rtlCol="0">
+            <a:spAutoFit/>
+          </a:bodyPr>
+          <a:lstStyle/>
+          <a:p>
+            <a:pPr algn="ctr"/>
+            <a:r>
+              <a:rPr lang="en-US" sz="1200" b="1" dirty="0"/>
+              <a:t>11</a:t>
+            </a:r>
+            <a:endParaRPr lang="en-IN" sz="1200" b="1" dirty="0"/>
+          </a:p>
+        </p:txBody>
+      </p:sp>
+    </p:spTree>
+    <p:extLst>
+      <p:ext uri="{BB962C8B-B14F-4D97-AF65-F5344CB8AC3E}">
+        <p14:creationId xmlns:p14="http://schemas.microsoft.com/office/powerpoint/2010/main" val="3544004827"/>
       </p:ext>
     </p:extLst>
   </p:cSld>

--- a/U1-Distribution-of-Velocities/figures/all-figs.pptx
+++ b/U1-Distribution-of-Velocities/figures/all-figs.pptx
@@ -10,6 +10,8 @@
     <p:sldId id="258" r:id="rId4"/>
     <p:sldId id="259" r:id="rId5"/>
     <p:sldId id="260" r:id="rId6"/>
+    <p:sldId id="261" r:id="rId7"/>
+    <p:sldId id="262" r:id="rId8"/>
   </p:sldIdLst>
   <p:sldSz cx="12192000" cy="6858000"/>
   <p:notesSz cx="6858000" cy="9144000"/>
@@ -276,7 +278,7 @@
           <a:p>
             <a:fld id="{B47390B5-D7E4-4A9A-ABAD-920B3BD530F5}" type="datetimeFigureOut">
               <a:rPr lang="en-IN" smtClean="0"/>
-              <a:t>27-08-2026</a:t>
+              <a:t>28-08-2026</a:t>
             </a:fld>
             <a:endParaRPr lang="en-IN"/>
           </a:p>
@@ -476,7 +478,7 @@
           <a:p>
             <a:fld id="{B47390B5-D7E4-4A9A-ABAD-920B3BD530F5}" type="datetimeFigureOut">
               <a:rPr lang="en-IN" smtClean="0"/>
-              <a:t>27-08-2026</a:t>
+              <a:t>28-08-2026</a:t>
             </a:fld>
             <a:endParaRPr lang="en-IN"/>
           </a:p>
@@ -686,7 +688,7 @@
           <a:p>
             <a:fld id="{B47390B5-D7E4-4A9A-ABAD-920B3BD530F5}" type="datetimeFigureOut">
               <a:rPr lang="en-IN" smtClean="0"/>
-              <a:t>27-08-2026</a:t>
+              <a:t>28-08-2026</a:t>
             </a:fld>
             <a:endParaRPr lang="en-IN"/>
           </a:p>
@@ -886,7 +888,7 @@
           <a:p>
             <a:fld id="{B47390B5-D7E4-4A9A-ABAD-920B3BD530F5}" type="datetimeFigureOut">
               <a:rPr lang="en-IN" smtClean="0"/>
-              <a:t>27-08-2026</a:t>
+              <a:t>28-08-2026</a:t>
             </a:fld>
             <a:endParaRPr lang="en-IN"/>
           </a:p>
@@ -1162,7 +1164,7 @@
           <a:p>
             <a:fld id="{B47390B5-D7E4-4A9A-ABAD-920B3BD530F5}" type="datetimeFigureOut">
               <a:rPr lang="en-IN" smtClean="0"/>
-              <a:t>27-08-2026</a:t>
+              <a:t>28-08-2026</a:t>
             </a:fld>
             <a:endParaRPr lang="en-IN"/>
           </a:p>
@@ -1430,7 +1432,7 @@
           <a:p>
             <a:fld id="{B47390B5-D7E4-4A9A-ABAD-920B3BD530F5}" type="datetimeFigureOut">
               <a:rPr lang="en-IN" smtClean="0"/>
-              <a:t>27-08-2026</a:t>
+              <a:t>28-08-2026</a:t>
             </a:fld>
             <a:endParaRPr lang="en-IN"/>
           </a:p>
@@ -1845,7 +1847,7 @@
           <a:p>
             <a:fld id="{B47390B5-D7E4-4A9A-ABAD-920B3BD530F5}" type="datetimeFigureOut">
               <a:rPr lang="en-IN" smtClean="0"/>
-              <a:t>27-08-2026</a:t>
+              <a:t>28-08-2026</a:t>
             </a:fld>
             <a:endParaRPr lang="en-IN"/>
           </a:p>
@@ -1987,7 +1989,7 @@
           <a:p>
             <a:fld id="{B47390B5-D7E4-4A9A-ABAD-920B3BD530F5}" type="datetimeFigureOut">
               <a:rPr lang="en-IN" smtClean="0"/>
-              <a:t>27-08-2026</a:t>
+              <a:t>28-08-2026</a:t>
             </a:fld>
             <a:endParaRPr lang="en-IN"/>
           </a:p>
@@ -2100,7 +2102,7 @@
           <a:p>
             <a:fld id="{B47390B5-D7E4-4A9A-ABAD-920B3BD530F5}" type="datetimeFigureOut">
               <a:rPr lang="en-IN" smtClean="0"/>
-              <a:t>27-08-2026</a:t>
+              <a:t>28-08-2026</a:t>
             </a:fld>
             <a:endParaRPr lang="en-IN"/>
           </a:p>
@@ -2413,7 +2415,7 @@
           <a:p>
             <a:fld id="{B47390B5-D7E4-4A9A-ABAD-920B3BD530F5}" type="datetimeFigureOut">
               <a:rPr lang="en-IN" smtClean="0"/>
-              <a:t>27-08-2026</a:t>
+              <a:t>28-08-2026</a:t>
             </a:fld>
             <a:endParaRPr lang="en-IN"/>
           </a:p>
@@ -2702,7 +2704,7 @@
           <a:p>
             <a:fld id="{B47390B5-D7E4-4A9A-ABAD-920B3BD530F5}" type="datetimeFigureOut">
               <a:rPr lang="en-IN" smtClean="0"/>
-              <a:t>27-08-2026</a:t>
+              <a:t>28-08-2026</a:t>
             </a:fld>
             <a:endParaRPr lang="en-IN"/>
           </a:p>
@@ -2945,7 +2947,7 @@
           <a:p>
             <a:fld id="{B47390B5-D7E4-4A9A-ABAD-920B3BD530F5}" type="datetimeFigureOut">
               <a:rPr lang="en-IN" smtClean="0"/>
-              <a:t>27-08-2026</a:t>
+              <a:t>28-08-2026</a:t>
             </a:fld>
             <a:endParaRPr lang="en-IN"/>
           </a:p>
@@ -5033,7 +5035,10 @@
                 <a:pPr/>
                 <a14:m>
                   <m:oMathPara xmlns:m="http://schemas.openxmlformats.org/officeDocument/2006/math">
-                    <m:oMath>
+                    <m:oMathParaPr>
+                      <m:jc m:val="centerGroup"/>
+                    </m:oMathParaPr>
+                    <m:oMath xmlns:m="http://schemas.openxmlformats.org/officeDocument/2006/math">
                       <m:sSub>
                         <m:sSubPr>
                           <m:ctrlPr>
@@ -5145,7 +5150,10 @@
                 <a:pPr/>
                 <a14:m>
                   <m:oMathPara xmlns:m="http://schemas.openxmlformats.org/officeDocument/2006/math">
-                    <m:oMath>
+                    <m:oMathParaPr>
+                      <m:jc m:val="centerGroup"/>
+                    </m:oMathParaPr>
+                    <m:oMath xmlns:m="http://schemas.openxmlformats.org/officeDocument/2006/math">
                       <m:sSub>
                         <m:sSubPr>
                           <m:ctrlPr>
@@ -5257,7 +5265,10 @@
                 <a:pPr/>
                 <a14:m>
                   <m:oMathPara xmlns:m="http://schemas.openxmlformats.org/officeDocument/2006/math">
-                    <m:oMath>
+                    <m:oMathParaPr>
+                      <m:jc m:val="centerGroup"/>
+                    </m:oMathParaPr>
+                    <m:oMath xmlns:m="http://schemas.openxmlformats.org/officeDocument/2006/math">
                       <m:sSub>
                         <m:sSubPr>
                           <m:ctrlPr>
@@ -5369,7 +5380,10 @@
                 <a:pPr/>
                 <a14:m>
                   <m:oMathPara xmlns:m="http://schemas.openxmlformats.org/officeDocument/2006/math">
-                    <m:oMath>
+                    <m:oMathParaPr>
+                      <m:jc m:val="centerGroup"/>
+                    </m:oMathParaPr>
+                    <m:oMath xmlns:m="http://schemas.openxmlformats.org/officeDocument/2006/math">
                       <m:r>
                         <a:rPr lang="en-US" sz="2400" b="0" i="1" smtClean="0">
                           <a:latin typeface="Cambria Math" panose="02040503050406030204" pitchFamily="18" charset="0"/>
@@ -5462,7 +5476,10 @@
                 <a:pPr/>
                 <a14:m>
                   <m:oMathPara xmlns:m="http://schemas.openxmlformats.org/officeDocument/2006/math">
-                    <m:oMath>
+                    <m:oMathParaPr>
+                      <m:jc m:val="centerGroup"/>
+                    </m:oMathParaPr>
+                    <m:oMath xmlns:m="http://schemas.openxmlformats.org/officeDocument/2006/math">
                       <m:acc>
                         <m:accPr>
                           <m:chr m:val="⃗"/>
@@ -5567,7 +5584,10 @@
                 <a:pPr/>
                 <a14:m>
                   <m:oMathPara xmlns:m="http://schemas.openxmlformats.org/officeDocument/2006/math">
-                    <m:oMath>
+                    <m:oMathParaPr>
+                      <m:jc m:val="centerGroup"/>
+                    </m:oMathParaPr>
+                    <m:oMath xmlns:m="http://schemas.openxmlformats.org/officeDocument/2006/math">
                       <m:r>
                         <a:rPr lang="en-US" sz="2400" b="0" i="1" smtClean="0">
                           <a:latin typeface="Cambria Math" panose="02040503050406030204" pitchFamily="18" charset="0"/>
@@ -5952,7 +5972,10 @@
                 <a:pPr/>
                 <a14:m>
                   <m:oMathPara xmlns:m="http://schemas.openxmlformats.org/officeDocument/2006/math">
-                    <m:oMath>
+                    <m:oMathParaPr>
+                      <m:jc m:val="centerGroup"/>
+                    </m:oMathParaPr>
+                    <m:oMath xmlns:m="http://schemas.openxmlformats.org/officeDocument/2006/math">
                       <m:acc>
                         <m:accPr>
                           <m:chr m:val="⃗"/>
@@ -6185,7 +6208,10 @@
                 <a:pPr/>
                 <a14:m>
                   <m:oMathPara xmlns:m="http://schemas.openxmlformats.org/officeDocument/2006/math">
-                    <m:oMath>
+                    <m:oMathParaPr>
+                      <m:jc m:val="centerGroup"/>
+                    </m:oMathParaPr>
+                    <m:oMath xmlns:m="http://schemas.openxmlformats.org/officeDocument/2006/math">
                       <m:sSub>
                         <m:sSubPr>
                           <m:ctrlPr>
@@ -6297,7 +6323,10 @@
                 <a:pPr/>
                 <a14:m>
                   <m:oMathPara xmlns:m="http://schemas.openxmlformats.org/officeDocument/2006/math">
-                    <m:oMath>
+                    <m:oMathParaPr>
+                      <m:jc m:val="centerGroup"/>
+                    </m:oMathParaPr>
+                    <m:oMath xmlns:m="http://schemas.openxmlformats.org/officeDocument/2006/math">
                       <m:sSub>
                         <m:sSubPr>
                           <m:ctrlPr>
@@ -6584,7 +6613,10 @@
                 <a:pPr/>
                 <a14:m>
                   <m:oMathPara xmlns:m="http://schemas.openxmlformats.org/officeDocument/2006/math">
-                    <m:oMath>
+                    <m:oMathParaPr>
+                      <m:jc m:val="centerGroup"/>
+                    </m:oMathParaPr>
+                    <m:oMath xmlns:m="http://schemas.openxmlformats.org/officeDocument/2006/math">
                       <m:r>
                         <a:rPr lang="en-US" sz="2400" b="0" i="1" smtClean="0">
                           <a:latin typeface="Cambria Math" panose="02040503050406030204" pitchFamily="18" charset="0"/>
@@ -6724,7 +6756,10 @@
                 <a:pPr/>
                 <a14:m>
                   <m:oMathPara xmlns:m="http://schemas.openxmlformats.org/officeDocument/2006/math">
-                    <m:oMath>
+                    <m:oMathParaPr>
+                      <m:jc m:val="centerGroup"/>
+                    </m:oMathParaPr>
+                    <m:oMath xmlns:m="http://schemas.openxmlformats.org/officeDocument/2006/math">
                       <m:r>
                         <a:rPr lang="en-US" sz="2400" b="0" i="1" smtClean="0">
                           <a:latin typeface="Cambria Math" panose="02040503050406030204" pitchFamily="18" charset="0"/>
@@ -6997,7 +7032,10 @@
                 <a:pPr/>
                 <a14:m>
                   <m:oMathPara xmlns:m="http://schemas.openxmlformats.org/officeDocument/2006/math">
-                    <m:oMath>
+                    <m:oMathParaPr>
+                      <m:jc m:val="centerGroup"/>
+                    </m:oMathParaPr>
+                    <m:oMath xmlns:m="http://schemas.openxmlformats.org/officeDocument/2006/math">
                       <m:f>
                         <m:fPr>
                           <m:ctrlPr>
@@ -9864,7 +9902,10 @@
                 <a:pPr/>
                 <a14:m>
                   <m:oMathPara xmlns:m="http://schemas.openxmlformats.org/officeDocument/2006/math">
-                    <m:oMath>
+                    <m:oMathParaPr>
+                      <m:jc m:val="centerGroup"/>
+                    </m:oMathParaPr>
+                    <m:oMath xmlns:m="http://schemas.openxmlformats.org/officeDocument/2006/math">
                       <m:sSub>
                         <m:sSubPr>
                           <m:ctrlPr>
@@ -9987,7 +10028,10 @@
                 <a:pPr/>
                 <a14:m>
                   <m:oMathPara xmlns:m="http://schemas.openxmlformats.org/officeDocument/2006/math">
-                    <m:oMath>
+                    <m:oMathParaPr>
+                      <m:jc m:val="centerGroup"/>
+                    </m:oMathParaPr>
+                    <m:oMath xmlns:m="http://schemas.openxmlformats.org/officeDocument/2006/math">
                       <m:sSub>
                         <m:sSubPr>
                           <m:ctrlPr>
@@ -10110,7 +10154,10 @@
                 <a:pPr/>
                 <a14:m>
                   <m:oMathPara xmlns:m="http://schemas.openxmlformats.org/officeDocument/2006/math">
-                    <m:oMath>
+                    <m:oMathParaPr>
+                      <m:jc m:val="centerGroup"/>
+                    </m:oMathParaPr>
+                    <m:oMath xmlns:m="http://schemas.openxmlformats.org/officeDocument/2006/math">
                       <m:sSub>
                         <m:sSubPr>
                           <m:ctrlPr>
@@ -10233,7 +10280,10 @@
                 <a:pPr/>
                 <a14:m>
                   <m:oMathPara xmlns:m="http://schemas.openxmlformats.org/officeDocument/2006/math">
-                    <m:oMath>
+                    <m:oMathParaPr>
+                      <m:jc m:val="centerGroup"/>
+                    </m:oMathParaPr>
+                    <m:oMath xmlns:m="http://schemas.openxmlformats.org/officeDocument/2006/math">
                       <m:sSub>
                         <m:sSubPr>
                           <m:ctrlPr>
@@ -10356,7 +10406,10 @@
                 <a:pPr/>
                 <a14:m>
                   <m:oMathPara xmlns:m="http://schemas.openxmlformats.org/officeDocument/2006/math">
-                    <m:oMath>
+                    <m:oMathParaPr>
+                      <m:jc m:val="centerGroup"/>
+                    </m:oMathParaPr>
+                    <m:oMath xmlns:m="http://schemas.openxmlformats.org/officeDocument/2006/math">
                       <m:sSub>
                         <m:sSubPr>
                           <m:ctrlPr>
@@ -10479,7 +10532,10 @@
                 <a:pPr/>
                 <a14:m>
                   <m:oMathPara xmlns:m="http://schemas.openxmlformats.org/officeDocument/2006/math">
-                    <m:oMath>
+                    <m:oMathParaPr>
+                      <m:jc m:val="centerGroup"/>
+                    </m:oMathParaPr>
+                    <m:oMath xmlns:m="http://schemas.openxmlformats.org/officeDocument/2006/math">
                       <m:sSub>
                         <m:sSubPr>
                           <m:ctrlPr>
@@ -10602,7 +10658,10 @@
                 <a:pPr/>
                 <a14:m>
                   <m:oMathPara xmlns:m="http://schemas.openxmlformats.org/officeDocument/2006/math">
-                    <m:oMath>
+                    <m:oMathParaPr>
+                      <m:jc m:val="centerGroup"/>
+                    </m:oMathParaPr>
+                    <m:oMath xmlns:m="http://schemas.openxmlformats.org/officeDocument/2006/math">
                       <m:sSub>
                         <m:sSubPr>
                           <m:ctrlPr>
@@ -10725,7 +10784,10 @@
                 <a:pPr/>
                 <a14:m>
                   <m:oMathPara xmlns:m="http://schemas.openxmlformats.org/officeDocument/2006/math">
-                    <m:oMath>
+                    <m:oMathParaPr>
+                      <m:jc m:val="centerGroup"/>
+                    </m:oMathParaPr>
+                    <m:oMath xmlns:m="http://schemas.openxmlformats.org/officeDocument/2006/math">
                       <m:sSub>
                         <m:sSubPr>
                           <m:ctrlPr>
@@ -10848,7 +10910,10 @@
                 <a:pPr/>
                 <a14:m>
                   <m:oMathPara xmlns:m="http://schemas.openxmlformats.org/officeDocument/2006/math">
-                    <m:oMath>
+                    <m:oMathParaPr>
+                      <m:jc m:val="centerGroup"/>
+                    </m:oMathParaPr>
+                    <m:oMath xmlns:m="http://schemas.openxmlformats.org/officeDocument/2006/math">
                       <m:sSub>
                         <m:sSubPr>
                           <m:ctrlPr>
@@ -11015,7 +11080,10 @@
                 <a:pPr/>
                 <a14:m>
                   <m:oMathPara xmlns:m="http://schemas.openxmlformats.org/officeDocument/2006/math">
-                    <m:oMath>
+                    <m:oMathParaPr>
+                      <m:jc m:val="centerGroup"/>
+                    </m:oMathParaPr>
+                    <m:oMath xmlns:m="http://schemas.openxmlformats.org/officeDocument/2006/math">
                       <m:sSub>
                         <m:sSubPr>
                           <m:ctrlPr>
@@ -11146,6 +11214,2680 @@
     <p:extLst>
       <p:ext uri="{BB962C8B-B14F-4D97-AF65-F5344CB8AC3E}">
         <p14:creationId xmlns:p14="http://schemas.microsoft.com/office/powerpoint/2010/main" val="3544004827"/>
+      </p:ext>
+    </p:extLst>
+  </p:cSld>
+  <p:clrMapOvr>
+    <a:masterClrMapping/>
+  </p:clrMapOvr>
+</p:sld>
+</file>
+
+<file path=ppt/slides/slide6.xml><?xml version="1.0" encoding="utf-8"?>
+<p:sld xmlns:a="http://schemas.openxmlformats.org/drawingml/2006/main" xmlns:r="http://schemas.openxmlformats.org/officeDocument/2006/relationships" xmlns:p="http://schemas.openxmlformats.org/presentationml/2006/main">
+  <p:cSld>
+    <p:spTree>
+      <p:nvGrpSpPr>
+        <p:cNvPr id="1" name=""/>
+        <p:cNvGrpSpPr/>
+        <p:nvPr/>
+      </p:nvGrpSpPr>
+      <p:grpSpPr>
+        <a:xfrm>
+          <a:off x="0" y="0"/>
+          <a:ext cx="0" cy="0"/>
+          <a:chOff x="0" y="0"/>
+          <a:chExt cx="0" cy="0"/>
+        </a:xfrm>
+      </p:grpSpPr>
+      <p:sp>
+        <p:nvSpPr>
+          <p:cNvPr id="13" name="Oval 12"/>
+          <p:cNvSpPr>
+            <a:spLocks noChangeAspect="1"/>
+          </p:cNvSpPr>
+          <p:nvPr/>
+        </p:nvSpPr>
+        <p:spPr>
+          <a:xfrm>
+            <a:off x="9770455" y="1803255"/>
+            <a:ext cx="1440000" cy="1440000"/>
+          </a:xfrm>
+          <a:prstGeom prst="ellipse">
+            <a:avLst/>
+          </a:prstGeom>
+          <a:gradFill flip="none" rotWithShape="1">
+            <a:gsLst>
+              <a:gs pos="0">
+                <a:srgbClr val="C00000"/>
+              </a:gs>
+              <a:gs pos="50000">
+                <a:schemeClr val="accent2">
+                  <a:lumMod val="40000"/>
+                  <a:lumOff val="60000"/>
+                </a:schemeClr>
+              </a:gs>
+              <a:gs pos="100000">
+                <a:schemeClr val="accent2">
+                  <a:lumMod val="20000"/>
+                  <a:lumOff val="80000"/>
+                </a:schemeClr>
+              </a:gs>
+            </a:gsLst>
+            <a:lin ang="18900000" scaled="1"/>
+            <a:tileRect/>
+          </a:gradFill>
+          <a:ln w="12700">
+            <a:solidFill>
+              <a:schemeClr val="tx1"/>
+            </a:solidFill>
+          </a:ln>
+        </p:spPr>
+        <p:style>
+          <a:lnRef idx="2">
+            <a:schemeClr val="accent1">
+              <a:shade val="50000"/>
+            </a:schemeClr>
+          </a:lnRef>
+          <a:fillRef idx="1">
+            <a:schemeClr val="accent1"/>
+          </a:fillRef>
+          <a:effectRef idx="0">
+            <a:schemeClr val="accent1"/>
+          </a:effectRef>
+          <a:fontRef idx="minor">
+            <a:schemeClr val="lt1"/>
+          </a:fontRef>
+        </p:style>
+        <p:txBody>
+          <a:bodyPr rtlCol="0" anchor="ctr"/>
+          <a:lstStyle/>
+          <a:p>
+            <a:pPr algn="ctr"/>
+            <a:endParaRPr lang="en-US"/>
+          </a:p>
+        </p:txBody>
+      </p:sp>
+      <p:sp>
+        <p:nvSpPr>
+          <p:cNvPr id="12" name="Oval 11"/>
+          <p:cNvSpPr>
+            <a:spLocks noChangeAspect="1"/>
+          </p:cNvSpPr>
+          <p:nvPr/>
+        </p:nvSpPr>
+        <p:spPr>
+          <a:xfrm>
+            <a:off x="7482611" y="4404215"/>
+            <a:ext cx="1440000" cy="1440000"/>
+          </a:xfrm>
+          <a:prstGeom prst="ellipse">
+            <a:avLst/>
+          </a:prstGeom>
+          <a:gradFill flip="none" rotWithShape="1">
+            <a:gsLst>
+              <a:gs pos="0">
+                <a:schemeClr val="bg1">
+                  <a:lumMod val="50000"/>
+                </a:schemeClr>
+              </a:gs>
+              <a:gs pos="50000">
+                <a:schemeClr val="bg1">
+                  <a:lumMod val="75000"/>
+                </a:schemeClr>
+              </a:gs>
+              <a:gs pos="100000">
+                <a:schemeClr val="bg1">
+                  <a:lumMod val="95000"/>
+                </a:schemeClr>
+              </a:gs>
+            </a:gsLst>
+            <a:lin ang="18900000" scaled="1"/>
+            <a:tileRect/>
+          </a:gradFill>
+          <a:ln w="12700">
+            <a:solidFill>
+              <a:schemeClr val="tx1"/>
+            </a:solidFill>
+          </a:ln>
+        </p:spPr>
+        <p:style>
+          <a:lnRef idx="2">
+            <a:schemeClr val="accent1">
+              <a:shade val="50000"/>
+            </a:schemeClr>
+          </a:lnRef>
+          <a:fillRef idx="1">
+            <a:schemeClr val="accent1"/>
+          </a:fillRef>
+          <a:effectRef idx="0">
+            <a:schemeClr val="accent1"/>
+          </a:effectRef>
+          <a:fontRef idx="minor">
+            <a:schemeClr val="lt1"/>
+          </a:fontRef>
+        </p:style>
+        <p:txBody>
+          <a:bodyPr rtlCol="0" anchor="ctr"/>
+          <a:lstStyle/>
+          <a:p>
+            <a:pPr algn="ctr"/>
+            <a:endParaRPr lang="en-US"/>
+          </a:p>
+        </p:txBody>
+      </p:sp>
+      <p:sp>
+        <p:nvSpPr>
+          <p:cNvPr id="11" name="Oval 10"/>
+          <p:cNvSpPr>
+            <a:spLocks noChangeAspect="1"/>
+          </p:cNvSpPr>
+          <p:nvPr/>
+        </p:nvSpPr>
+        <p:spPr>
+          <a:xfrm>
+            <a:off x="6617162" y="1142855"/>
+            <a:ext cx="1440000" cy="1440000"/>
+          </a:xfrm>
+          <a:prstGeom prst="ellipse">
+            <a:avLst/>
+          </a:prstGeom>
+          <a:gradFill flip="none" rotWithShape="1">
+            <a:gsLst>
+              <a:gs pos="0">
+                <a:schemeClr val="bg1">
+                  <a:lumMod val="50000"/>
+                </a:schemeClr>
+              </a:gs>
+              <a:gs pos="50000">
+                <a:schemeClr val="bg1">
+                  <a:lumMod val="75000"/>
+                </a:schemeClr>
+              </a:gs>
+              <a:gs pos="100000">
+                <a:schemeClr val="bg1">
+                  <a:lumMod val="95000"/>
+                </a:schemeClr>
+              </a:gs>
+            </a:gsLst>
+            <a:lin ang="18900000" scaled="1"/>
+            <a:tileRect/>
+          </a:gradFill>
+          <a:ln w="12700">
+            <a:solidFill>
+              <a:schemeClr val="tx1"/>
+            </a:solidFill>
+          </a:ln>
+        </p:spPr>
+        <p:style>
+          <a:lnRef idx="2">
+            <a:schemeClr val="accent1">
+              <a:shade val="50000"/>
+            </a:schemeClr>
+          </a:lnRef>
+          <a:fillRef idx="1">
+            <a:schemeClr val="accent1"/>
+          </a:fillRef>
+          <a:effectRef idx="0">
+            <a:schemeClr val="accent1"/>
+          </a:effectRef>
+          <a:fontRef idx="minor">
+            <a:schemeClr val="lt1"/>
+          </a:fontRef>
+        </p:style>
+        <p:txBody>
+          <a:bodyPr rtlCol="0" anchor="ctr"/>
+          <a:lstStyle/>
+          <a:p>
+            <a:pPr algn="ctr"/>
+            <a:endParaRPr lang="en-US"/>
+          </a:p>
+        </p:txBody>
+      </p:sp>
+      <p:sp>
+        <p:nvSpPr>
+          <p:cNvPr id="2" name="Oval 1"/>
+          <p:cNvSpPr>
+            <a:spLocks noChangeAspect="1"/>
+          </p:cNvSpPr>
+          <p:nvPr/>
+        </p:nvSpPr>
+        <p:spPr>
+          <a:xfrm>
+            <a:off x="767542" y="431655"/>
+            <a:ext cx="1440000" cy="1440000"/>
+          </a:xfrm>
+          <a:prstGeom prst="ellipse">
+            <a:avLst/>
+          </a:prstGeom>
+          <a:gradFill flip="none" rotWithShape="1">
+            <a:gsLst>
+              <a:gs pos="0">
+                <a:schemeClr val="bg1">
+                  <a:lumMod val="50000"/>
+                </a:schemeClr>
+              </a:gs>
+              <a:gs pos="50000">
+                <a:schemeClr val="bg1">
+                  <a:lumMod val="75000"/>
+                </a:schemeClr>
+              </a:gs>
+              <a:gs pos="100000">
+                <a:schemeClr val="bg1">
+                  <a:lumMod val="95000"/>
+                </a:schemeClr>
+              </a:gs>
+            </a:gsLst>
+            <a:lin ang="18900000" scaled="1"/>
+            <a:tileRect/>
+          </a:gradFill>
+          <a:ln w="12700">
+            <a:solidFill>
+              <a:schemeClr val="tx1"/>
+            </a:solidFill>
+          </a:ln>
+        </p:spPr>
+        <p:style>
+          <a:lnRef idx="2">
+            <a:schemeClr val="accent1">
+              <a:shade val="50000"/>
+            </a:schemeClr>
+          </a:lnRef>
+          <a:fillRef idx="1">
+            <a:schemeClr val="accent1"/>
+          </a:fillRef>
+          <a:effectRef idx="0">
+            <a:schemeClr val="accent1"/>
+          </a:effectRef>
+          <a:fontRef idx="minor">
+            <a:schemeClr val="lt1"/>
+          </a:fontRef>
+        </p:style>
+        <p:txBody>
+          <a:bodyPr rtlCol="0" anchor="ctr"/>
+          <a:lstStyle/>
+          <a:p>
+            <a:pPr algn="ctr"/>
+            <a:endParaRPr lang="en-US"/>
+          </a:p>
+        </p:txBody>
+      </p:sp>
+      <p:sp>
+        <p:nvSpPr>
+          <p:cNvPr id="3" name="Oval 2"/>
+          <p:cNvSpPr>
+            <a:spLocks noChangeAspect="1"/>
+          </p:cNvSpPr>
+          <p:nvPr/>
+        </p:nvSpPr>
+        <p:spPr>
+          <a:xfrm>
+            <a:off x="2207722" y="431655"/>
+            <a:ext cx="1440000" cy="1440000"/>
+          </a:xfrm>
+          <a:prstGeom prst="ellipse">
+            <a:avLst/>
+          </a:prstGeom>
+          <a:gradFill flip="none" rotWithShape="1">
+            <a:gsLst>
+              <a:gs pos="0">
+                <a:schemeClr val="bg1">
+                  <a:lumMod val="50000"/>
+                </a:schemeClr>
+              </a:gs>
+              <a:gs pos="50000">
+                <a:schemeClr val="bg1">
+                  <a:lumMod val="75000"/>
+                </a:schemeClr>
+              </a:gs>
+              <a:gs pos="100000">
+                <a:schemeClr val="bg1">
+                  <a:lumMod val="95000"/>
+                </a:schemeClr>
+              </a:gs>
+            </a:gsLst>
+            <a:lin ang="18900000" scaled="1"/>
+            <a:tileRect/>
+          </a:gradFill>
+          <a:ln w="12700">
+            <a:solidFill>
+              <a:schemeClr val="tx1"/>
+            </a:solidFill>
+          </a:ln>
+        </p:spPr>
+        <p:style>
+          <a:lnRef idx="2">
+            <a:schemeClr val="accent1">
+              <a:shade val="50000"/>
+            </a:schemeClr>
+          </a:lnRef>
+          <a:fillRef idx="1">
+            <a:schemeClr val="accent1"/>
+          </a:fillRef>
+          <a:effectRef idx="0">
+            <a:schemeClr val="accent1"/>
+          </a:effectRef>
+          <a:fontRef idx="minor">
+            <a:schemeClr val="lt1"/>
+          </a:fontRef>
+        </p:style>
+        <p:txBody>
+          <a:bodyPr rtlCol="0" anchor="ctr"/>
+          <a:lstStyle/>
+          <a:p>
+            <a:pPr algn="ctr"/>
+            <a:endParaRPr lang="en-US"/>
+          </a:p>
+        </p:txBody>
+      </p:sp>
+      <p:sp>
+        <p:nvSpPr>
+          <p:cNvPr id="4" name="Oval 3"/>
+          <p:cNvSpPr>
+            <a:spLocks noChangeAspect="1"/>
+          </p:cNvSpPr>
+          <p:nvPr/>
+        </p:nvSpPr>
+        <p:spPr>
+          <a:xfrm>
+            <a:off x="805642" y="2240135"/>
+            <a:ext cx="2880000" cy="2880000"/>
+          </a:xfrm>
+          <a:prstGeom prst="ellipse">
+            <a:avLst/>
+          </a:prstGeom>
+          <a:noFill/>
+          <a:ln w="19050">
+            <a:solidFill>
+              <a:schemeClr val="tx1"/>
+            </a:solidFill>
+          </a:ln>
+        </p:spPr>
+        <p:style>
+          <a:lnRef idx="2">
+            <a:schemeClr val="accent1">
+              <a:shade val="50000"/>
+            </a:schemeClr>
+          </a:lnRef>
+          <a:fillRef idx="1">
+            <a:schemeClr val="accent1"/>
+          </a:fillRef>
+          <a:effectRef idx="0">
+            <a:schemeClr val="accent1"/>
+          </a:effectRef>
+          <a:fontRef idx="minor">
+            <a:schemeClr val="lt1"/>
+          </a:fontRef>
+        </p:style>
+        <p:txBody>
+          <a:bodyPr rtlCol="0" anchor="ctr"/>
+          <a:lstStyle/>
+          <a:p>
+            <a:pPr algn="ctr"/>
+            <a:endParaRPr lang="en-US"/>
+          </a:p>
+        </p:txBody>
+      </p:sp>
+      <p:sp>
+        <p:nvSpPr>
+          <p:cNvPr id="5" name="Oval 4"/>
+          <p:cNvSpPr>
+            <a:spLocks noChangeAspect="1"/>
+          </p:cNvSpPr>
+          <p:nvPr/>
+        </p:nvSpPr>
+        <p:spPr>
+          <a:xfrm>
+            <a:off x="1525642" y="2960135"/>
+            <a:ext cx="1440000" cy="1440000"/>
+          </a:xfrm>
+          <a:prstGeom prst="ellipse">
+            <a:avLst/>
+          </a:prstGeom>
+          <a:gradFill flip="none" rotWithShape="1">
+            <a:gsLst>
+              <a:gs pos="0">
+                <a:schemeClr val="bg1">
+                  <a:lumMod val="50000"/>
+                </a:schemeClr>
+              </a:gs>
+              <a:gs pos="50000">
+                <a:schemeClr val="bg1">
+                  <a:lumMod val="75000"/>
+                </a:schemeClr>
+              </a:gs>
+              <a:gs pos="100000">
+                <a:schemeClr val="bg1">
+                  <a:lumMod val="95000"/>
+                </a:schemeClr>
+              </a:gs>
+            </a:gsLst>
+            <a:lin ang="18900000" scaled="1"/>
+            <a:tileRect/>
+          </a:gradFill>
+          <a:ln w="12700">
+            <a:solidFill>
+              <a:schemeClr val="tx1"/>
+            </a:solidFill>
+          </a:ln>
+        </p:spPr>
+        <p:style>
+          <a:lnRef idx="2">
+            <a:schemeClr val="accent1">
+              <a:shade val="50000"/>
+            </a:schemeClr>
+          </a:lnRef>
+          <a:fillRef idx="1">
+            <a:schemeClr val="accent1"/>
+          </a:fillRef>
+          <a:effectRef idx="0">
+            <a:schemeClr val="accent1"/>
+          </a:effectRef>
+          <a:fontRef idx="minor">
+            <a:schemeClr val="lt1"/>
+          </a:fontRef>
+        </p:style>
+        <p:txBody>
+          <a:bodyPr rtlCol="0" anchor="ctr"/>
+          <a:lstStyle/>
+          <a:p>
+            <a:pPr algn="ctr"/>
+            <a:endParaRPr lang="en-US"/>
+          </a:p>
+        </p:txBody>
+      </p:sp>
+      <p:sp>
+        <p:nvSpPr>
+          <p:cNvPr id="8" name="Can 7"/>
+          <p:cNvSpPr/>
+          <p:nvPr/>
+        </p:nvSpPr>
+        <p:spPr>
+          <a:xfrm rot="16200000">
+            <a:off x="7254420" y="620688"/>
+            <a:ext cx="2880000" cy="6121400"/>
+          </a:xfrm>
+          <a:prstGeom prst="can">
+            <a:avLst>
+              <a:gd name="adj" fmla="val 46615"/>
+            </a:avLst>
+          </a:prstGeom>
+          <a:solidFill>
+            <a:schemeClr val="accent1">
+              <a:alpha val="43000"/>
+            </a:schemeClr>
+          </a:solidFill>
+        </p:spPr>
+        <p:style>
+          <a:lnRef idx="2">
+            <a:schemeClr val="accent1">
+              <a:shade val="50000"/>
+            </a:schemeClr>
+          </a:lnRef>
+          <a:fillRef idx="1">
+            <a:schemeClr val="accent1"/>
+          </a:fillRef>
+          <a:effectRef idx="0">
+            <a:schemeClr val="accent1"/>
+          </a:effectRef>
+          <a:fontRef idx="minor">
+            <a:schemeClr val="lt1"/>
+          </a:fontRef>
+        </p:style>
+        <p:txBody>
+          <a:bodyPr rtlCol="0" anchor="ctr"/>
+          <a:lstStyle/>
+          <a:p>
+            <a:pPr algn="ctr"/>
+            <a:endParaRPr lang="en-US"/>
+          </a:p>
+        </p:txBody>
+      </p:sp>
+      <p:sp>
+        <p:nvSpPr>
+          <p:cNvPr id="9" name="Oval 8"/>
+          <p:cNvSpPr>
+            <a:spLocks noChangeAspect="1"/>
+          </p:cNvSpPr>
+          <p:nvPr/>
+        </p:nvSpPr>
+        <p:spPr>
+          <a:xfrm>
+            <a:off x="4294242" y="2961387"/>
+            <a:ext cx="1440000" cy="1440000"/>
+          </a:xfrm>
+          <a:prstGeom prst="ellipse">
+            <a:avLst/>
+          </a:prstGeom>
+          <a:gradFill flip="none" rotWithShape="1">
+            <a:gsLst>
+              <a:gs pos="0">
+                <a:schemeClr val="bg1">
+                  <a:lumMod val="50000"/>
+                </a:schemeClr>
+              </a:gs>
+              <a:gs pos="50000">
+                <a:schemeClr val="bg1">
+                  <a:lumMod val="75000"/>
+                </a:schemeClr>
+              </a:gs>
+              <a:gs pos="100000">
+                <a:schemeClr val="bg1">
+                  <a:lumMod val="95000"/>
+                </a:schemeClr>
+              </a:gs>
+            </a:gsLst>
+            <a:lin ang="18900000" scaled="1"/>
+            <a:tileRect/>
+          </a:gradFill>
+          <a:ln w="12700">
+            <a:solidFill>
+              <a:schemeClr val="tx1"/>
+            </a:solidFill>
+          </a:ln>
+        </p:spPr>
+        <p:style>
+          <a:lnRef idx="2">
+            <a:schemeClr val="accent1">
+              <a:shade val="50000"/>
+            </a:schemeClr>
+          </a:lnRef>
+          <a:fillRef idx="1">
+            <a:schemeClr val="accent1"/>
+          </a:fillRef>
+          <a:effectRef idx="0">
+            <a:schemeClr val="accent1"/>
+          </a:effectRef>
+          <a:fontRef idx="minor">
+            <a:schemeClr val="lt1"/>
+          </a:fontRef>
+        </p:style>
+        <p:txBody>
+          <a:bodyPr rtlCol="0" anchor="ctr"/>
+          <a:lstStyle/>
+          <a:p>
+            <a:pPr algn="ctr"/>
+            <a:endParaRPr lang="en-US"/>
+          </a:p>
+        </p:txBody>
+      </p:sp>
+      <p:sp>
+        <p:nvSpPr>
+          <p:cNvPr id="10" name="Can 9"/>
+          <p:cNvSpPr/>
+          <p:nvPr/>
+        </p:nvSpPr>
+        <p:spPr>
+          <a:xfrm rot="16200000">
+            <a:off x="7913462" y="961046"/>
+            <a:ext cx="1440000" cy="5440683"/>
+          </a:xfrm>
+          <a:prstGeom prst="can">
+            <a:avLst>
+              <a:gd name="adj" fmla="val 46615"/>
+            </a:avLst>
+          </a:prstGeom>
+          <a:solidFill>
+            <a:schemeClr val="accent1">
+              <a:alpha val="50000"/>
+            </a:schemeClr>
+          </a:solidFill>
+          <a:ln w="9525">
+            <a:solidFill>
+              <a:schemeClr val="bg2">
+                <a:lumMod val="50000"/>
+              </a:schemeClr>
+            </a:solidFill>
+            <a:prstDash val="dashDot"/>
+          </a:ln>
+        </p:spPr>
+        <p:style>
+          <a:lnRef idx="2">
+            <a:schemeClr val="accent1">
+              <a:shade val="50000"/>
+            </a:schemeClr>
+          </a:lnRef>
+          <a:fillRef idx="1">
+            <a:schemeClr val="accent1"/>
+          </a:fillRef>
+          <a:effectRef idx="0">
+            <a:schemeClr val="accent1"/>
+          </a:effectRef>
+          <a:fontRef idx="minor">
+            <a:schemeClr val="lt1"/>
+          </a:fontRef>
+        </p:style>
+        <p:txBody>
+          <a:bodyPr rtlCol="0" anchor="ctr"/>
+          <a:lstStyle/>
+          <a:p>
+            <a:pPr algn="ctr"/>
+            <a:endParaRPr lang="en-US"/>
+          </a:p>
+        </p:txBody>
+      </p:sp>
+      <p:cxnSp>
+        <p:nvCxnSpPr>
+          <p:cNvPr id="15" name="Straight Connector 14"/>
+          <p:cNvCxnSpPr/>
+          <p:nvPr/>
+        </p:nvCxnSpPr>
+        <p:spPr>
+          <a:xfrm>
+            <a:off x="4005349" y="3685308"/>
+            <a:ext cx="8007927" cy="0"/>
+          </a:xfrm>
+          <a:prstGeom prst="line">
+            <a:avLst/>
+          </a:prstGeom>
+          <a:ln w="12700">
+            <a:solidFill>
+              <a:schemeClr val="tx1"/>
+            </a:solidFill>
+            <a:prstDash val="dash"/>
+          </a:ln>
+        </p:spPr>
+        <p:style>
+          <a:lnRef idx="1">
+            <a:schemeClr val="accent1"/>
+          </a:lnRef>
+          <a:fillRef idx="0">
+            <a:schemeClr val="accent1"/>
+          </a:fillRef>
+          <a:effectRef idx="0">
+            <a:schemeClr val="accent1"/>
+          </a:effectRef>
+          <a:fontRef idx="minor">
+            <a:schemeClr val="tx1"/>
+          </a:fontRef>
+        </p:style>
+      </p:cxnSp>
+      <p:sp>
+        <p:nvSpPr>
+          <p:cNvPr id="19" name="Oval 18"/>
+          <p:cNvSpPr>
+            <a:spLocks noChangeAspect="1"/>
+          </p:cNvSpPr>
+          <p:nvPr/>
+        </p:nvSpPr>
+        <p:spPr>
+          <a:xfrm>
+            <a:off x="9242144" y="5193924"/>
+            <a:ext cx="1440000" cy="1440000"/>
+          </a:xfrm>
+          <a:prstGeom prst="ellipse">
+            <a:avLst/>
+          </a:prstGeom>
+          <a:gradFill flip="none" rotWithShape="1">
+            <a:gsLst>
+              <a:gs pos="0">
+                <a:schemeClr val="bg1">
+                  <a:lumMod val="50000"/>
+                </a:schemeClr>
+              </a:gs>
+              <a:gs pos="50000">
+                <a:schemeClr val="bg1">
+                  <a:lumMod val="75000"/>
+                </a:schemeClr>
+              </a:gs>
+              <a:gs pos="100000">
+                <a:schemeClr val="bg1">
+                  <a:lumMod val="95000"/>
+                </a:schemeClr>
+              </a:gs>
+            </a:gsLst>
+            <a:lin ang="18900000" scaled="1"/>
+            <a:tileRect/>
+          </a:gradFill>
+          <a:ln w="12700">
+            <a:solidFill>
+              <a:schemeClr val="tx1"/>
+            </a:solidFill>
+          </a:ln>
+        </p:spPr>
+        <p:style>
+          <a:lnRef idx="2">
+            <a:schemeClr val="accent1">
+              <a:shade val="50000"/>
+            </a:schemeClr>
+          </a:lnRef>
+          <a:fillRef idx="1">
+            <a:schemeClr val="accent1"/>
+          </a:fillRef>
+          <a:effectRef idx="0">
+            <a:schemeClr val="accent1"/>
+          </a:effectRef>
+          <a:fontRef idx="minor">
+            <a:schemeClr val="lt1"/>
+          </a:fontRef>
+        </p:style>
+        <p:txBody>
+          <a:bodyPr rtlCol="0" anchor="ctr"/>
+          <a:lstStyle/>
+          <a:p>
+            <a:pPr algn="ctr"/>
+            <a:endParaRPr lang="en-US"/>
+          </a:p>
+        </p:txBody>
+      </p:sp>
+      <p:cxnSp>
+        <p:nvCxnSpPr>
+          <p:cNvPr id="21" name="Straight Connector 20"/>
+          <p:cNvCxnSpPr/>
+          <p:nvPr/>
+        </p:nvCxnSpPr>
+        <p:spPr>
+          <a:xfrm flipV="1">
+            <a:off x="8202930" y="3688080"/>
+            <a:ext cx="0" cy="1432560"/>
+          </a:xfrm>
+          <a:prstGeom prst="line">
+            <a:avLst/>
+          </a:prstGeom>
+          <a:ln w="19050">
+            <a:solidFill>
+              <a:schemeClr val="tx1"/>
+            </a:solidFill>
+          </a:ln>
+        </p:spPr>
+        <p:style>
+          <a:lnRef idx="1">
+            <a:schemeClr val="accent1"/>
+          </a:lnRef>
+          <a:fillRef idx="0">
+            <a:schemeClr val="accent1"/>
+          </a:fillRef>
+          <a:effectRef idx="0">
+            <a:schemeClr val="accent1"/>
+          </a:effectRef>
+          <a:fontRef idx="minor">
+            <a:schemeClr val="tx1"/>
+          </a:fontRef>
+        </p:style>
+      </p:cxnSp>
+      <p:cxnSp>
+        <p:nvCxnSpPr>
+          <p:cNvPr id="25" name="Straight Arrow Connector 24"/>
+          <p:cNvCxnSpPr/>
+          <p:nvPr/>
+        </p:nvCxnSpPr>
+        <p:spPr>
+          <a:xfrm>
+            <a:off x="5734242" y="3685197"/>
+            <a:ext cx="697038" cy="0"/>
+          </a:xfrm>
+          <a:prstGeom prst="straightConnector1">
+            <a:avLst/>
+          </a:prstGeom>
+          <a:ln w="28575">
+            <a:solidFill>
+              <a:schemeClr val="accent2">
+                <a:lumMod val="75000"/>
+              </a:schemeClr>
+            </a:solidFill>
+            <a:tailEnd type="triangle"/>
+          </a:ln>
+        </p:spPr>
+        <p:style>
+          <a:lnRef idx="1">
+            <a:schemeClr val="accent1"/>
+          </a:lnRef>
+          <a:fillRef idx="0">
+            <a:schemeClr val="accent1"/>
+          </a:fillRef>
+          <a:effectRef idx="0">
+            <a:schemeClr val="accent1"/>
+          </a:effectRef>
+          <a:fontRef idx="minor">
+            <a:schemeClr val="tx1"/>
+          </a:fontRef>
+        </p:style>
+      </p:cxnSp>
+      <p:cxnSp>
+        <p:nvCxnSpPr>
+          <p:cNvPr id="27" name="Straight Connector 26"/>
+          <p:cNvCxnSpPr/>
+          <p:nvPr/>
+        </p:nvCxnSpPr>
+        <p:spPr>
+          <a:xfrm flipV="1">
+            <a:off x="7333488" y="1838960"/>
+            <a:ext cx="0" cy="1846834"/>
+          </a:xfrm>
+          <a:prstGeom prst="line">
+            <a:avLst/>
+          </a:prstGeom>
+          <a:ln w="19050">
+            <a:solidFill>
+              <a:schemeClr val="tx1"/>
+            </a:solidFill>
+          </a:ln>
+        </p:spPr>
+        <p:style>
+          <a:lnRef idx="1">
+            <a:schemeClr val="accent1"/>
+          </a:lnRef>
+          <a:fillRef idx="0">
+            <a:schemeClr val="accent1"/>
+          </a:fillRef>
+          <a:effectRef idx="0">
+            <a:schemeClr val="accent1"/>
+          </a:effectRef>
+          <a:fontRef idx="minor">
+            <a:schemeClr val="tx1"/>
+          </a:fontRef>
+        </p:style>
+      </p:cxnSp>
+      <p:cxnSp>
+        <p:nvCxnSpPr>
+          <p:cNvPr id="31" name="Straight Connector 30"/>
+          <p:cNvCxnSpPr/>
+          <p:nvPr/>
+        </p:nvCxnSpPr>
+        <p:spPr>
+          <a:xfrm flipV="1">
+            <a:off x="10490083" y="2529840"/>
+            <a:ext cx="0" cy="1158240"/>
+          </a:xfrm>
+          <a:prstGeom prst="line">
+            <a:avLst/>
+          </a:prstGeom>
+          <a:ln w="19050">
+            <a:solidFill>
+              <a:schemeClr val="tx1"/>
+            </a:solidFill>
+          </a:ln>
+        </p:spPr>
+        <p:style>
+          <a:lnRef idx="1">
+            <a:schemeClr val="accent1"/>
+          </a:lnRef>
+          <a:fillRef idx="0">
+            <a:schemeClr val="accent1"/>
+          </a:fillRef>
+          <a:effectRef idx="0">
+            <a:schemeClr val="accent1"/>
+          </a:effectRef>
+          <a:fontRef idx="minor">
+            <a:schemeClr val="tx1"/>
+          </a:fontRef>
+        </p:style>
+      </p:cxnSp>
+      <p:cxnSp>
+        <p:nvCxnSpPr>
+          <p:cNvPr id="35" name="Straight Connector 34"/>
+          <p:cNvCxnSpPr/>
+          <p:nvPr/>
+        </p:nvCxnSpPr>
+        <p:spPr>
+          <a:xfrm flipV="1">
+            <a:off x="9961079" y="3685540"/>
+            <a:ext cx="0" cy="2232660"/>
+          </a:xfrm>
+          <a:prstGeom prst="line">
+            <a:avLst/>
+          </a:prstGeom>
+          <a:ln w="19050">
+            <a:solidFill>
+              <a:schemeClr val="tx1"/>
+            </a:solidFill>
+          </a:ln>
+        </p:spPr>
+        <p:style>
+          <a:lnRef idx="1">
+            <a:schemeClr val="accent1"/>
+          </a:lnRef>
+          <a:fillRef idx="0">
+            <a:schemeClr val="accent1"/>
+          </a:fillRef>
+          <a:effectRef idx="0">
+            <a:schemeClr val="accent1"/>
+          </a:effectRef>
+          <a:fontRef idx="minor">
+            <a:schemeClr val="tx1"/>
+          </a:fontRef>
+        </p:style>
+      </p:cxnSp>
+      <p:cxnSp>
+        <p:nvCxnSpPr>
+          <p:cNvPr id="37" name="Straight Connector 36"/>
+          <p:cNvCxnSpPr/>
+          <p:nvPr/>
+        </p:nvCxnSpPr>
+        <p:spPr>
+          <a:xfrm rot="16200000" flipV="1">
+            <a:off x="2226772" y="437110"/>
+            <a:ext cx="0" cy="1432560"/>
+          </a:xfrm>
+          <a:prstGeom prst="line">
+            <a:avLst/>
+          </a:prstGeom>
+          <a:ln w="19050">
+            <a:solidFill>
+              <a:schemeClr val="tx1"/>
+            </a:solidFill>
+          </a:ln>
+        </p:spPr>
+        <p:style>
+          <a:lnRef idx="1">
+            <a:schemeClr val="accent1"/>
+          </a:lnRef>
+          <a:fillRef idx="0">
+            <a:schemeClr val="accent1"/>
+          </a:fillRef>
+          <a:effectRef idx="0">
+            <a:schemeClr val="accent1"/>
+          </a:effectRef>
+          <a:fontRef idx="minor">
+            <a:schemeClr val="tx1"/>
+          </a:fontRef>
+        </p:style>
+      </p:cxnSp>
+      <p:cxnSp>
+        <p:nvCxnSpPr>
+          <p:cNvPr id="38" name="Straight Connector 37"/>
+          <p:cNvCxnSpPr/>
+          <p:nvPr/>
+        </p:nvCxnSpPr>
+        <p:spPr>
+          <a:xfrm flipV="1">
+            <a:off x="2251710" y="2240280"/>
+            <a:ext cx="0" cy="1432560"/>
+          </a:xfrm>
+          <a:prstGeom prst="line">
+            <a:avLst/>
+          </a:prstGeom>
+          <a:ln w="19050">
+            <a:solidFill>
+              <a:schemeClr val="tx1"/>
+            </a:solidFill>
+          </a:ln>
+        </p:spPr>
+        <p:style>
+          <a:lnRef idx="1">
+            <a:schemeClr val="accent1"/>
+          </a:lnRef>
+          <a:fillRef idx="0">
+            <a:schemeClr val="accent1"/>
+          </a:fillRef>
+          <a:effectRef idx="0">
+            <a:schemeClr val="accent1"/>
+          </a:effectRef>
+          <a:fontRef idx="minor">
+            <a:schemeClr val="tx1"/>
+          </a:fontRef>
+        </p:style>
+      </p:cxnSp>
+      <p:cxnSp>
+        <p:nvCxnSpPr>
+          <p:cNvPr id="39" name="Straight Connector 38"/>
+          <p:cNvCxnSpPr>
+            <a:endCxn id="5" idx="6"/>
+          </p:cNvCxnSpPr>
+          <p:nvPr/>
+        </p:nvCxnSpPr>
+        <p:spPr>
+          <a:xfrm>
+            <a:off x="2251710" y="3672840"/>
+            <a:ext cx="713932" cy="7295"/>
+          </a:xfrm>
+          <a:prstGeom prst="line">
+            <a:avLst/>
+          </a:prstGeom>
+          <a:ln w="19050">
+            <a:solidFill>
+              <a:schemeClr val="tx1"/>
+            </a:solidFill>
+          </a:ln>
+        </p:spPr>
+        <p:style>
+          <a:lnRef idx="1">
+            <a:schemeClr val="accent1"/>
+          </a:lnRef>
+          <a:fillRef idx="0">
+            <a:schemeClr val="accent1"/>
+          </a:fillRef>
+          <a:effectRef idx="0">
+            <a:schemeClr val="accent1"/>
+          </a:effectRef>
+          <a:fontRef idx="minor">
+            <a:schemeClr val="tx1"/>
+          </a:fontRef>
+        </p:style>
+      </p:cxnSp>
+      <mc:AlternateContent xmlns:mc="http://schemas.openxmlformats.org/markup-compatibility/2006" xmlns:a14="http://schemas.microsoft.com/office/drawing/2010/main">
+        <mc:Choice Requires="a14">
+          <p:sp>
+            <p:nvSpPr>
+              <p:cNvPr id="41" name="TextBox 40"/>
+              <p:cNvSpPr txBox="1"/>
+              <p:nvPr/>
+            </p:nvSpPr>
+            <p:spPr>
+              <a:xfrm>
+                <a:off x="7266730" y="4065847"/>
+                <a:ext cx="848117" cy="307777"/>
+              </a:xfrm>
+              <a:prstGeom prst="rect">
+                <a:avLst/>
+              </a:prstGeom>
+              <a:noFill/>
+            </p:spPr>
+            <p:txBody>
+              <a:bodyPr wrap="none" lIns="0" tIns="0" rIns="0" bIns="0" rtlCol="0">
+                <a:spAutoFit/>
+              </a:bodyPr>
+              <a:lstStyle/>
+              <a:p>
+                <a:pPr/>
+                <a14:m>
+                  <m:oMathPara xmlns:m="http://schemas.openxmlformats.org/officeDocument/2006/math">
+                    <m:oMathParaPr>
+                      <m:jc m:val="centerGroup"/>
+                    </m:oMathParaPr>
+                    <m:oMath xmlns:m="http://schemas.openxmlformats.org/officeDocument/2006/math">
+                      <m:r>
+                        <a:rPr lang="en-US" sz="2000" b="0" i="1" smtClean="0">
+                          <a:latin typeface="Cambria Math" panose="02040503050406030204" pitchFamily="18" charset="0"/>
+                        </a:rPr>
+                        <m:t>𝐷</m:t>
+                      </m:r>
+                      <m:r>
+                        <a:rPr lang="en-US" sz="2000" b="0" i="1" smtClean="0">
+                          <a:latin typeface="Cambria Math" panose="02040503050406030204" pitchFamily="18" charset="0"/>
+                        </a:rPr>
+                        <m:t>=2</m:t>
+                      </m:r>
+                      <m:r>
+                        <a:rPr lang="en-US" sz="2000" b="0" i="1" smtClean="0">
+                          <a:latin typeface="Cambria Math" panose="02040503050406030204" pitchFamily="18" charset="0"/>
+                        </a:rPr>
+                        <m:t>𝑟</m:t>
+                      </m:r>
+                    </m:oMath>
+                  </m:oMathPara>
+                </a14:m>
+                <a:endParaRPr lang="en-US" sz="2000" dirty="0"/>
+              </a:p>
+            </p:txBody>
+          </p:sp>
+        </mc:Choice>
+        <mc:Fallback xmlns="">
+          <p:sp>
+            <p:nvSpPr>
+              <p:cNvPr id="41" name="TextBox 40"/>
+              <p:cNvSpPr txBox="1">
+                <a:spLocks noRot="1" noChangeAspect="1" noMove="1" noResize="1" noEditPoints="1" noAdjustHandles="1" noChangeArrowheads="1" noChangeShapeType="1" noTextEdit="1"/>
+              </p:cNvSpPr>
+              <p:nvPr/>
+            </p:nvSpPr>
+            <p:spPr>
+              <a:xfrm>
+                <a:off x="7266730" y="4065847"/>
+                <a:ext cx="848117" cy="307777"/>
+              </a:xfrm>
+              <a:prstGeom prst="rect">
+                <a:avLst/>
+              </a:prstGeom>
+              <a:blipFill>
+                <a:blip r:embed="rId2"/>
+                <a:stretch>
+                  <a:fillRect l="-6475" r="-6475" b="-6000"/>
+                </a:stretch>
+              </a:blipFill>
+            </p:spPr>
+            <p:txBody>
+              <a:bodyPr/>
+              <a:lstStyle/>
+              <a:p>
+                <a:r>
+                  <a:rPr lang="en-US">
+                    <a:noFill/>
+                  </a:rPr>
+                  <a:t> </a:t>
+                </a:r>
+              </a:p>
+            </p:txBody>
+          </p:sp>
+        </mc:Fallback>
+      </mc:AlternateContent>
+      <mc:AlternateContent xmlns:mc="http://schemas.openxmlformats.org/markup-compatibility/2006" xmlns:a14="http://schemas.microsoft.com/office/drawing/2010/main">
+        <mc:Choice Requires="a14">
+          <p:sp>
+            <p:nvSpPr>
+              <p:cNvPr id="42" name="TextBox 41"/>
+              <p:cNvSpPr txBox="1"/>
+              <p:nvPr/>
+            </p:nvSpPr>
+            <p:spPr>
+              <a:xfrm>
+                <a:off x="2321560" y="2631440"/>
+                <a:ext cx="327847" cy="307777"/>
+              </a:xfrm>
+              <a:prstGeom prst="rect">
+                <a:avLst/>
+              </a:prstGeom>
+              <a:noFill/>
+            </p:spPr>
+            <p:txBody>
+              <a:bodyPr wrap="none" lIns="0" tIns="0" rIns="0" bIns="0" rtlCol="0">
+                <a:spAutoFit/>
+              </a:bodyPr>
+              <a:lstStyle/>
+              <a:p>
+                <a:pPr/>
+                <a14:m>
+                  <m:oMathPara xmlns:m="http://schemas.openxmlformats.org/officeDocument/2006/math">
+                    <m:oMathParaPr>
+                      <m:jc m:val="centerGroup"/>
+                    </m:oMathParaPr>
+                    <m:oMath xmlns:m="http://schemas.openxmlformats.org/officeDocument/2006/math">
+                      <m:r>
+                        <a:rPr lang="en-US" sz="2000" b="0" i="1" smtClean="0">
+                          <a:latin typeface="Cambria Math" panose="02040503050406030204" pitchFamily="18" charset="0"/>
+                        </a:rPr>
+                        <m:t>2</m:t>
+                      </m:r>
+                      <m:r>
+                        <a:rPr lang="en-US" sz="2000" b="0" i="1" smtClean="0">
+                          <a:latin typeface="Cambria Math" panose="02040503050406030204" pitchFamily="18" charset="0"/>
+                        </a:rPr>
+                        <m:t>𝑟</m:t>
+                      </m:r>
+                    </m:oMath>
+                  </m:oMathPara>
+                </a14:m>
+                <a:endParaRPr lang="en-US" sz="2000" dirty="0"/>
+              </a:p>
+            </p:txBody>
+          </p:sp>
+        </mc:Choice>
+        <mc:Fallback xmlns="">
+          <p:sp>
+            <p:nvSpPr>
+              <p:cNvPr id="42" name="TextBox 41"/>
+              <p:cNvSpPr txBox="1">
+                <a:spLocks noRot="1" noChangeAspect="1" noMove="1" noResize="1" noEditPoints="1" noAdjustHandles="1" noChangeArrowheads="1" noChangeShapeType="1" noTextEdit="1"/>
+              </p:cNvSpPr>
+              <p:nvPr/>
+            </p:nvSpPr>
+            <p:spPr>
+              <a:xfrm>
+                <a:off x="2321560" y="2631440"/>
+                <a:ext cx="327847" cy="307777"/>
+              </a:xfrm>
+              <a:prstGeom prst="rect">
+                <a:avLst/>
+              </a:prstGeom>
+              <a:blipFill>
+                <a:blip r:embed="rId3"/>
+                <a:stretch>
+                  <a:fillRect l="-18519" r="-14815" b="-6000"/>
+                </a:stretch>
+              </a:blipFill>
+            </p:spPr>
+            <p:txBody>
+              <a:bodyPr/>
+              <a:lstStyle/>
+              <a:p>
+                <a:r>
+                  <a:rPr lang="en-US">
+                    <a:noFill/>
+                  </a:rPr>
+                  <a:t> </a:t>
+                </a:r>
+              </a:p>
+            </p:txBody>
+          </p:sp>
+        </mc:Fallback>
+      </mc:AlternateContent>
+      <mc:AlternateContent xmlns:mc="http://schemas.openxmlformats.org/markup-compatibility/2006" xmlns:a14="http://schemas.microsoft.com/office/drawing/2010/main">
+        <mc:Choice Requires="a14">
+          <p:sp>
+            <p:nvSpPr>
+              <p:cNvPr id="43" name="TextBox 42"/>
+              <p:cNvSpPr txBox="1"/>
+              <p:nvPr/>
+            </p:nvSpPr>
+            <p:spPr>
+              <a:xfrm>
+                <a:off x="2560320" y="833120"/>
+                <a:ext cx="185179" cy="307777"/>
+              </a:xfrm>
+              <a:prstGeom prst="rect">
+                <a:avLst/>
+              </a:prstGeom>
+              <a:noFill/>
+            </p:spPr>
+            <p:txBody>
+              <a:bodyPr wrap="none" lIns="0" tIns="0" rIns="0" bIns="0" rtlCol="0">
+                <a:spAutoFit/>
+              </a:bodyPr>
+              <a:lstStyle/>
+              <a:p>
+                <a:pPr/>
+                <a14:m>
+                  <m:oMathPara xmlns:m="http://schemas.openxmlformats.org/officeDocument/2006/math">
+                    <m:oMathParaPr>
+                      <m:jc m:val="centerGroup"/>
+                    </m:oMathParaPr>
+                    <m:oMath xmlns:m="http://schemas.openxmlformats.org/officeDocument/2006/math">
+                      <m:r>
+                        <a:rPr lang="en-US" sz="2000" b="0" i="1" smtClean="0">
+                          <a:latin typeface="Cambria Math" panose="02040503050406030204" pitchFamily="18" charset="0"/>
+                        </a:rPr>
+                        <m:t>𝑟</m:t>
+                      </m:r>
+                    </m:oMath>
+                  </m:oMathPara>
+                </a14:m>
+                <a:endParaRPr lang="en-US" sz="2000" dirty="0"/>
+              </a:p>
+            </p:txBody>
+          </p:sp>
+        </mc:Choice>
+        <mc:Fallback xmlns="">
+          <p:sp>
+            <p:nvSpPr>
+              <p:cNvPr id="43" name="TextBox 42"/>
+              <p:cNvSpPr txBox="1">
+                <a:spLocks noRot="1" noChangeAspect="1" noMove="1" noResize="1" noEditPoints="1" noAdjustHandles="1" noChangeArrowheads="1" noChangeShapeType="1" noTextEdit="1"/>
+              </p:cNvSpPr>
+              <p:nvPr/>
+            </p:nvSpPr>
+            <p:spPr>
+              <a:xfrm>
+                <a:off x="2560320" y="833120"/>
+                <a:ext cx="185179" cy="307777"/>
+              </a:xfrm>
+              <a:prstGeom prst="rect">
+                <a:avLst/>
+              </a:prstGeom>
+              <a:blipFill>
+                <a:blip r:embed="rId4"/>
+                <a:stretch>
+                  <a:fillRect l="-16667" r="-16667"/>
+                </a:stretch>
+              </a:blipFill>
+            </p:spPr>
+            <p:txBody>
+              <a:bodyPr/>
+              <a:lstStyle/>
+              <a:p>
+                <a:r>
+                  <a:rPr lang="en-US">
+                    <a:noFill/>
+                  </a:rPr>
+                  <a:t> </a:t>
+                </a:r>
+              </a:p>
+            </p:txBody>
+          </p:sp>
+        </mc:Fallback>
+      </mc:AlternateContent>
+      <mc:AlternateContent xmlns:mc="http://schemas.openxmlformats.org/markup-compatibility/2006" xmlns:a14="http://schemas.microsoft.com/office/drawing/2010/main">
+        <mc:Choice Requires="a14">
+          <p:sp>
+            <p:nvSpPr>
+              <p:cNvPr id="44" name="TextBox 43"/>
+              <p:cNvSpPr txBox="1"/>
+              <p:nvPr/>
+            </p:nvSpPr>
+            <p:spPr>
+              <a:xfrm>
+                <a:off x="1796415" y="833755"/>
+                <a:ext cx="185179" cy="307777"/>
+              </a:xfrm>
+              <a:prstGeom prst="rect">
+                <a:avLst/>
+              </a:prstGeom>
+              <a:noFill/>
+            </p:spPr>
+            <p:txBody>
+              <a:bodyPr wrap="none" lIns="0" tIns="0" rIns="0" bIns="0" rtlCol="0">
+                <a:spAutoFit/>
+              </a:bodyPr>
+              <a:lstStyle/>
+              <a:p>
+                <a:pPr/>
+                <a14:m>
+                  <m:oMathPara xmlns:m="http://schemas.openxmlformats.org/officeDocument/2006/math">
+                    <m:oMathParaPr>
+                      <m:jc m:val="centerGroup"/>
+                    </m:oMathParaPr>
+                    <m:oMath xmlns:m="http://schemas.openxmlformats.org/officeDocument/2006/math">
+                      <m:r>
+                        <a:rPr lang="en-US" sz="2000" b="0" i="1" smtClean="0">
+                          <a:latin typeface="Cambria Math" panose="02040503050406030204" pitchFamily="18" charset="0"/>
+                        </a:rPr>
+                        <m:t>𝑟</m:t>
+                      </m:r>
+                    </m:oMath>
+                  </m:oMathPara>
+                </a14:m>
+                <a:endParaRPr lang="en-US" sz="2000" dirty="0"/>
+              </a:p>
+            </p:txBody>
+          </p:sp>
+        </mc:Choice>
+        <mc:Fallback xmlns="">
+          <p:sp>
+            <p:nvSpPr>
+              <p:cNvPr id="44" name="TextBox 43"/>
+              <p:cNvSpPr txBox="1">
+                <a:spLocks noRot="1" noChangeAspect="1" noMove="1" noResize="1" noEditPoints="1" noAdjustHandles="1" noChangeArrowheads="1" noChangeShapeType="1" noTextEdit="1"/>
+              </p:cNvSpPr>
+              <p:nvPr/>
+            </p:nvSpPr>
+            <p:spPr>
+              <a:xfrm>
+                <a:off x="1796415" y="833755"/>
+                <a:ext cx="185179" cy="307777"/>
+              </a:xfrm>
+              <a:prstGeom prst="rect">
+                <a:avLst/>
+              </a:prstGeom>
+              <a:blipFill>
+                <a:blip r:embed="rId5"/>
+                <a:stretch>
+                  <a:fillRect l="-20000" r="-16667"/>
+                </a:stretch>
+              </a:blipFill>
+            </p:spPr>
+            <p:txBody>
+              <a:bodyPr/>
+              <a:lstStyle/>
+              <a:p>
+                <a:r>
+                  <a:rPr lang="en-US">
+                    <a:noFill/>
+                  </a:rPr>
+                  <a:t> </a:t>
+                </a:r>
+              </a:p>
+            </p:txBody>
+          </p:sp>
+        </mc:Fallback>
+      </mc:AlternateContent>
+      <mc:AlternateContent xmlns:mc="http://schemas.openxmlformats.org/markup-compatibility/2006" xmlns:a14="http://schemas.microsoft.com/office/drawing/2010/main">
+        <mc:Choice Requires="a14">
+          <p:sp>
+            <p:nvSpPr>
+              <p:cNvPr id="46" name="TextBox 45"/>
+              <p:cNvSpPr txBox="1"/>
+              <p:nvPr/>
+            </p:nvSpPr>
+            <p:spPr>
+              <a:xfrm>
+                <a:off x="7391422" y="2648067"/>
+                <a:ext cx="848117" cy="307777"/>
+              </a:xfrm>
+              <a:prstGeom prst="rect">
+                <a:avLst/>
+              </a:prstGeom>
+              <a:noFill/>
+            </p:spPr>
+            <p:txBody>
+              <a:bodyPr wrap="none" lIns="0" tIns="0" rIns="0" bIns="0" rtlCol="0">
+                <a:spAutoFit/>
+              </a:bodyPr>
+              <a:lstStyle/>
+              <a:p>
+                <a:pPr/>
+                <a14:m>
+                  <m:oMathPara xmlns:m="http://schemas.openxmlformats.org/officeDocument/2006/math">
+                    <m:oMathParaPr>
+                      <m:jc m:val="centerGroup"/>
+                    </m:oMathParaPr>
+                    <m:oMath xmlns:m="http://schemas.openxmlformats.org/officeDocument/2006/math">
+                      <m:r>
+                        <a:rPr lang="en-US" sz="2000" b="0" i="1" smtClean="0">
+                          <a:latin typeface="Cambria Math" panose="02040503050406030204" pitchFamily="18" charset="0"/>
+                        </a:rPr>
+                        <m:t>𝐷</m:t>
+                      </m:r>
+                      <m:r>
+                        <a:rPr lang="en-US" sz="2000" b="0" i="1" smtClean="0">
+                          <a:latin typeface="Cambria Math" panose="02040503050406030204" pitchFamily="18" charset="0"/>
+                        </a:rPr>
+                        <m:t>&gt;2</m:t>
+                      </m:r>
+                      <m:r>
+                        <a:rPr lang="en-US" sz="2000" b="0" i="1" smtClean="0">
+                          <a:latin typeface="Cambria Math" panose="02040503050406030204" pitchFamily="18" charset="0"/>
+                        </a:rPr>
+                        <m:t>𝑟</m:t>
+                      </m:r>
+                    </m:oMath>
+                  </m:oMathPara>
+                </a14:m>
+                <a:endParaRPr lang="en-US" sz="2000" dirty="0"/>
+              </a:p>
+            </p:txBody>
+          </p:sp>
+        </mc:Choice>
+        <mc:Fallback xmlns="">
+          <p:sp>
+            <p:nvSpPr>
+              <p:cNvPr id="46" name="TextBox 45"/>
+              <p:cNvSpPr txBox="1">
+                <a:spLocks noRot="1" noChangeAspect="1" noMove="1" noResize="1" noEditPoints="1" noAdjustHandles="1" noChangeArrowheads="1" noChangeShapeType="1" noTextEdit="1"/>
+              </p:cNvSpPr>
+              <p:nvPr/>
+            </p:nvSpPr>
+            <p:spPr>
+              <a:xfrm>
+                <a:off x="7391422" y="2648067"/>
+                <a:ext cx="848117" cy="307777"/>
+              </a:xfrm>
+              <a:prstGeom prst="rect">
+                <a:avLst/>
+              </a:prstGeom>
+              <a:blipFill>
+                <a:blip r:embed="rId6"/>
+                <a:stretch>
+                  <a:fillRect l="-7194" r="-5755" b="-5882"/>
+                </a:stretch>
+              </a:blipFill>
+            </p:spPr>
+            <p:txBody>
+              <a:bodyPr/>
+              <a:lstStyle/>
+              <a:p>
+                <a:r>
+                  <a:rPr lang="en-US">
+                    <a:noFill/>
+                  </a:rPr>
+                  <a:t> </a:t>
+                </a:r>
+              </a:p>
+            </p:txBody>
+          </p:sp>
+        </mc:Fallback>
+      </mc:AlternateContent>
+      <mc:AlternateContent xmlns:mc="http://schemas.openxmlformats.org/markup-compatibility/2006" xmlns:a14="http://schemas.microsoft.com/office/drawing/2010/main">
+        <mc:Choice Requires="a14">
+          <p:sp>
+            <p:nvSpPr>
+              <p:cNvPr id="47" name="TextBox 46"/>
+              <p:cNvSpPr txBox="1"/>
+              <p:nvPr/>
+            </p:nvSpPr>
+            <p:spPr>
+              <a:xfrm>
+                <a:off x="9575825" y="3280751"/>
+                <a:ext cx="848117" cy="307777"/>
+              </a:xfrm>
+              <a:prstGeom prst="rect">
+                <a:avLst/>
+              </a:prstGeom>
+              <a:noFill/>
+            </p:spPr>
+            <p:txBody>
+              <a:bodyPr wrap="none" lIns="0" tIns="0" rIns="0" bIns="0" rtlCol="0">
+                <a:spAutoFit/>
+              </a:bodyPr>
+              <a:lstStyle/>
+              <a:p>
+                <a:pPr/>
+                <a14:m>
+                  <m:oMathPara xmlns:m="http://schemas.openxmlformats.org/officeDocument/2006/math">
+                    <m:oMathParaPr>
+                      <m:jc m:val="centerGroup"/>
+                    </m:oMathParaPr>
+                    <m:oMath xmlns:m="http://schemas.openxmlformats.org/officeDocument/2006/math">
+                      <m:r>
+                        <a:rPr lang="en-US" sz="2000" b="0" i="1" smtClean="0">
+                          <a:latin typeface="Cambria Math" panose="02040503050406030204" pitchFamily="18" charset="0"/>
+                        </a:rPr>
+                        <m:t>𝐷</m:t>
+                      </m:r>
+                      <m:r>
+                        <a:rPr lang="en-US" sz="2000" b="0" i="1" smtClean="0">
+                          <a:latin typeface="Cambria Math" panose="02040503050406030204" pitchFamily="18" charset="0"/>
+                        </a:rPr>
+                        <m:t>&lt;2</m:t>
+                      </m:r>
+                      <m:r>
+                        <a:rPr lang="en-US" sz="2000" b="0" i="1" smtClean="0">
+                          <a:latin typeface="Cambria Math" panose="02040503050406030204" pitchFamily="18" charset="0"/>
+                        </a:rPr>
+                        <m:t>𝑟</m:t>
+                      </m:r>
+                    </m:oMath>
+                  </m:oMathPara>
+                </a14:m>
+                <a:endParaRPr lang="en-US" sz="2000" dirty="0"/>
+              </a:p>
+            </p:txBody>
+          </p:sp>
+        </mc:Choice>
+        <mc:Fallback xmlns="">
+          <p:sp>
+            <p:nvSpPr>
+              <p:cNvPr id="47" name="TextBox 46"/>
+              <p:cNvSpPr txBox="1">
+                <a:spLocks noRot="1" noChangeAspect="1" noMove="1" noResize="1" noEditPoints="1" noAdjustHandles="1" noChangeArrowheads="1" noChangeShapeType="1" noTextEdit="1"/>
+              </p:cNvSpPr>
+              <p:nvPr/>
+            </p:nvSpPr>
+            <p:spPr>
+              <a:xfrm>
+                <a:off x="9575825" y="3280751"/>
+                <a:ext cx="848117" cy="307777"/>
+              </a:xfrm>
+              <a:prstGeom prst="rect">
+                <a:avLst/>
+              </a:prstGeom>
+              <a:blipFill>
+                <a:blip r:embed="rId7"/>
+                <a:stretch>
+                  <a:fillRect l="-7194" r="-5755" b="-5882"/>
+                </a:stretch>
+              </a:blipFill>
+            </p:spPr>
+            <p:txBody>
+              <a:bodyPr/>
+              <a:lstStyle/>
+              <a:p>
+                <a:r>
+                  <a:rPr lang="en-US">
+                    <a:noFill/>
+                  </a:rPr>
+                  <a:t> </a:t>
+                </a:r>
+              </a:p>
+            </p:txBody>
+          </p:sp>
+        </mc:Fallback>
+      </mc:AlternateContent>
+      <mc:AlternateContent xmlns:mc="http://schemas.openxmlformats.org/markup-compatibility/2006" xmlns:a14="http://schemas.microsoft.com/office/drawing/2010/main">
+        <mc:Choice Requires="a14">
+          <p:sp>
+            <p:nvSpPr>
+              <p:cNvPr id="48" name="TextBox 47"/>
+              <p:cNvSpPr txBox="1"/>
+              <p:nvPr/>
+            </p:nvSpPr>
+            <p:spPr>
+              <a:xfrm>
+                <a:off x="10065356" y="4490716"/>
+                <a:ext cx="848117" cy="307777"/>
+              </a:xfrm>
+              <a:prstGeom prst="rect">
+                <a:avLst/>
+              </a:prstGeom>
+              <a:noFill/>
+            </p:spPr>
+            <p:txBody>
+              <a:bodyPr wrap="none" lIns="0" tIns="0" rIns="0" bIns="0" rtlCol="0">
+                <a:spAutoFit/>
+              </a:bodyPr>
+              <a:lstStyle/>
+              <a:p>
+                <a:pPr/>
+                <a14:m>
+                  <m:oMathPara xmlns:m="http://schemas.openxmlformats.org/officeDocument/2006/math">
+                    <m:oMathParaPr>
+                      <m:jc m:val="centerGroup"/>
+                    </m:oMathParaPr>
+                    <m:oMath xmlns:m="http://schemas.openxmlformats.org/officeDocument/2006/math">
+                      <m:r>
+                        <a:rPr lang="en-US" sz="2000" b="0" i="1" smtClean="0">
+                          <a:latin typeface="Cambria Math" panose="02040503050406030204" pitchFamily="18" charset="0"/>
+                        </a:rPr>
+                        <m:t>𝐷</m:t>
+                      </m:r>
+                      <m:r>
+                        <a:rPr lang="en-US" sz="2000" b="0" i="1" smtClean="0">
+                          <a:latin typeface="Cambria Math" panose="02040503050406030204" pitchFamily="18" charset="0"/>
+                        </a:rPr>
+                        <m:t>&gt;2</m:t>
+                      </m:r>
+                      <m:r>
+                        <a:rPr lang="en-US" sz="2000" b="0" i="1" smtClean="0">
+                          <a:latin typeface="Cambria Math" panose="02040503050406030204" pitchFamily="18" charset="0"/>
+                        </a:rPr>
+                        <m:t>𝑟</m:t>
+                      </m:r>
+                    </m:oMath>
+                  </m:oMathPara>
+                </a14:m>
+                <a:endParaRPr lang="en-US" sz="2000" dirty="0"/>
+              </a:p>
+            </p:txBody>
+          </p:sp>
+        </mc:Choice>
+        <mc:Fallback xmlns="">
+          <p:sp>
+            <p:nvSpPr>
+              <p:cNvPr id="48" name="TextBox 47"/>
+              <p:cNvSpPr txBox="1">
+                <a:spLocks noRot="1" noChangeAspect="1" noMove="1" noResize="1" noEditPoints="1" noAdjustHandles="1" noChangeArrowheads="1" noChangeShapeType="1" noTextEdit="1"/>
+              </p:cNvSpPr>
+              <p:nvPr/>
+            </p:nvSpPr>
+            <p:spPr>
+              <a:xfrm>
+                <a:off x="10065356" y="4490716"/>
+                <a:ext cx="848117" cy="307777"/>
+              </a:xfrm>
+              <a:prstGeom prst="rect">
+                <a:avLst/>
+              </a:prstGeom>
+              <a:blipFill>
+                <a:blip r:embed="rId8"/>
+                <a:stretch>
+                  <a:fillRect l="-6475" r="-6475" b="-6000"/>
+                </a:stretch>
+              </a:blipFill>
+            </p:spPr>
+            <p:txBody>
+              <a:bodyPr/>
+              <a:lstStyle/>
+              <a:p>
+                <a:r>
+                  <a:rPr lang="en-US">
+                    <a:noFill/>
+                  </a:rPr>
+                  <a:t> </a:t>
+                </a:r>
+              </a:p>
+            </p:txBody>
+          </p:sp>
+        </mc:Fallback>
+      </mc:AlternateContent>
+      <mc:AlternateContent xmlns:mc="http://schemas.openxmlformats.org/markup-compatibility/2006" xmlns:a14="http://schemas.microsoft.com/office/drawing/2010/main">
+        <mc:Choice Requires="a14">
+          <p:sp>
+            <p:nvSpPr>
+              <p:cNvPr id="49" name="TextBox 48"/>
+              <p:cNvSpPr txBox="1"/>
+              <p:nvPr/>
+            </p:nvSpPr>
+            <p:spPr>
+              <a:xfrm>
+                <a:off x="2527994" y="3276140"/>
+                <a:ext cx="185179" cy="307777"/>
+              </a:xfrm>
+              <a:prstGeom prst="rect">
+                <a:avLst/>
+              </a:prstGeom>
+              <a:noFill/>
+            </p:spPr>
+            <p:txBody>
+              <a:bodyPr wrap="none" lIns="0" tIns="0" rIns="0" bIns="0" rtlCol="0">
+                <a:spAutoFit/>
+              </a:bodyPr>
+              <a:lstStyle/>
+              <a:p>
+                <a:pPr/>
+                <a14:m>
+                  <m:oMathPara xmlns:m="http://schemas.openxmlformats.org/officeDocument/2006/math">
+                    <m:oMathParaPr>
+                      <m:jc m:val="centerGroup"/>
+                    </m:oMathParaPr>
+                    <m:oMath xmlns:m="http://schemas.openxmlformats.org/officeDocument/2006/math">
+                      <m:r>
+                        <a:rPr lang="en-US" sz="2000" b="0" i="1" smtClean="0">
+                          <a:latin typeface="Cambria Math" panose="02040503050406030204" pitchFamily="18" charset="0"/>
+                        </a:rPr>
+                        <m:t>𝑟</m:t>
+                      </m:r>
+                    </m:oMath>
+                  </m:oMathPara>
+                </a14:m>
+                <a:endParaRPr lang="en-US" sz="2000" dirty="0"/>
+              </a:p>
+            </p:txBody>
+          </p:sp>
+        </mc:Choice>
+        <mc:Fallback xmlns="">
+          <p:sp>
+            <p:nvSpPr>
+              <p:cNvPr id="49" name="TextBox 48"/>
+              <p:cNvSpPr txBox="1">
+                <a:spLocks noRot="1" noChangeAspect="1" noMove="1" noResize="1" noEditPoints="1" noAdjustHandles="1" noChangeArrowheads="1" noChangeShapeType="1" noTextEdit="1"/>
+              </p:cNvSpPr>
+              <p:nvPr/>
+            </p:nvSpPr>
+            <p:spPr>
+              <a:xfrm>
+                <a:off x="2527994" y="3276140"/>
+                <a:ext cx="185179" cy="307777"/>
+              </a:xfrm>
+              <a:prstGeom prst="rect">
+                <a:avLst/>
+              </a:prstGeom>
+              <a:blipFill>
+                <a:blip r:embed="rId9"/>
+                <a:stretch>
+                  <a:fillRect l="-20000" r="-16667"/>
+                </a:stretch>
+              </a:blipFill>
+            </p:spPr>
+            <p:txBody>
+              <a:bodyPr/>
+              <a:lstStyle/>
+              <a:p>
+                <a:r>
+                  <a:rPr lang="en-US">
+                    <a:noFill/>
+                  </a:rPr>
+                  <a:t> </a:t>
+                </a:r>
+              </a:p>
+            </p:txBody>
+          </p:sp>
+        </mc:Fallback>
+      </mc:AlternateContent>
+      <p:cxnSp>
+        <p:nvCxnSpPr>
+          <p:cNvPr id="7" name="Straight Connector 6"/>
+          <p:cNvCxnSpPr/>
+          <p:nvPr/>
+        </p:nvCxnSpPr>
+        <p:spPr>
+          <a:xfrm flipV="1">
+            <a:off x="6333028" y="779665"/>
+            <a:ext cx="0" cy="1459345"/>
+          </a:xfrm>
+          <a:prstGeom prst="line">
+            <a:avLst/>
+          </a:prstGeom>
+          <a:ln w="12700">
+            <a:solidFill>
+              <a:schemeClr val="tx1"/>
+            </a:solidFill>
+            <a:prstDash val="dash"/>
+          </a:ln>
+        </p:spPr>
+        <p:style>
+          <a:lnRef idx="1">
+            <a:schemeClr val="accent1"/>
+          </a:lnRef>
+          <a:fillRef idx="0">
+            <a:schemeClr val="accent1"/>
+          </a:fillRef>
+          <a:effectRef idx="0">
+            <a:schemeClr val="accent1"/>
+          </a:effectRef>
+          <a:fontRef idx="minor">
+            <a:schemeClr val="tx1"/>
+          </a:fontRef>
+        </p:style>
+      </p:cxnSp>
+      <p:cxnSp>
+        <p:nvCxnSpPr>
+          <p:cNvPr id="32" name="Straight Connector 31"/>
+          <p:cNvCxnSpPr/>
+          <p:nvPr/>
+        </p:nvCxnSpPr>
+        <p:spPr>
+          <a:xfrm flipV="1">
+            <a:off x="11129818" y="783475"/>
+            <a:ext cx="0" cy="1459345"/>
+          </a:xfrm>
+          <a:prstGeom prst="line">
+            <a:avLst/>
+          </a:prstGeom>
+          <a:ln w="12700">
+            <a:solidFill>
+              <a:schemeClr val="tx1"/>
+            </a:solidFill>
+            <a:prstDash val="dash"/>
+          </a:ln>
+        </p:spPr>
+        <p:style>
+          <a:lnRef idx="1">
+            <a:schemeClr val="accent1"/>
+          </a:lnRef>
+          <a:fillRef idx="0">
+            <a:schemeClr val="accent1"/>
+          </a:fillRef>
+          <a:effectRef idx="0">
+            <a:schemeClr val="accent1"/>
+          </a:effectRef>
+          <a:fontRef idx="minor">
+            <a:schemeClr val="tx1"/>
+          </a:fontRef>
+        </p:style>
+      </p:cxnSp>
+      <p:cxnSp>
+        <p:nvCxnSpPr>
+          <p:cNvPr id="16" name="Straight Arrow Connector 15"/>
+          <p:cNvCxnSpPr/>
+          <p:nvPr/>
+        </p:nvCxnSpPr>
+        <p:spPr>
+          <a:xfrm>
+            <a:off x="6332220" y="906780"/>
+            <a:ext cx="4792980" cy="0"/>
+          </a:xfrm>
+          <a:prstGeom prst="straightConnector1">
+            <a:avLst/>
+          </a:prstGeom>
+          <a:ln w="12700">
+            <a:solidFill>
+              <a:schemeClr val="tx1"/>
+            </a:solidFill>
+            <a:headEnd type="triangle" w="lg" len="lg"/>
+            <a:tailEnd type="triangle" w="lg" len="lg"/>
+          </a:ln>
+        </p:spPr>
+        <p:style>
+          <a:lnRef idx="1">
+            <a:schemeClr val="accent1"/>
+          </a:lnRef>
+          <a:fillRef idx="0">
+            <a:schemeClr val="accent1"/>
+          </a:fillRef>
+          <a:effectRef idx="0">
+            <a:schemeClr val="accent1"/>
+          </a:effectRef>
+          <a:fontRef idx="minor">
+            <a:schemeClr val="tx1"/>
+          </a:fontRef>
+        </p:style>
+      </p:cxnSp>
+      <mc:AlternateContent xmlns:mc="http://schemas.openxmlformats.org/markup-compatibility/2006" xmlns:a14="http://schemas.microsoft.com/office/drawing/2010/main">
+        <mc:Choice Requires="a14">
+          <p:sp>
+            <p:nvSpPr>
+              <p:cNvPr id="17" name="TextBox 16"/>
+              <p:cNvSpPr txBox="1"/>
+              <p:nvPr/>
+            </p:nvSpPr>
+            <p:spPr>
+              <a:xfrm>
+                <a:off x="8382000" y="765048"/>
+                <a:ext cx="585481" cy="276999"/>
+              </a:xfrm>
+              <a:prstGeom prst="rect">
+                <a:avLst/>
+              </a:prstGeom>
+              <a:solidFill>
+                <a:schemeClr val="bg1"/>
+              </a:solidFill>
+            </p:spPr>
+            <p:txBody>
+              <a:bodyPr wrap="none" lIns="0" tIns="0" rIns="0" bIns="0" rtlCol="0">
+                <a:spAutoFit/>
+              </a:bodyPr>
+              <a:lstStyle/>
+              <a:p>
+                <a:pPr/>
+                <a14:m>
+                  <m:oMathPara xmlns:m="http://schemas.openxmlformats.org/officeDocument/2006/math">
+                    <m:oMathParaPr>
+                      <m:jc m:val="centerGroup"/>
+                    </m:oMathParaPr>
+                    <m:oMath xmlns:m="http://schemas.openxmlformats.org/officeDocument/2006/math">
+                      <m:d>
+                        <m:dPr>
+                          <m:begChr m:val="⟨"/>
+                          <m:endChr m:val="⟩"/>
+                          <m:ctrlPr>
+                            <a:rPr lang="en-US" i="1" smtClean="0">
+                              <a:latin typeface="Cambria Math" panose="02040503050406030204" pitchFamily="18" charset="0"/>
+                            </a:rPr>
+                          </m:ctrlPr>
+                        </m:dPr>
+                        <m:e>
+                          <m:r>
+                            <a:rPr lang="en-US" b="0" i="1" smtClean="0">
+                              <a:latin typeface="Cambria Math" panose="02040503050406030204" pitchFamily="18" charset="0"/>
+                            </a:rPr>
+                            <m:t>𝑣</m:t>
+                          </m:r>
+                        </m:e>
+                      </m:d>
+                      <m:r>
+                        <m:rPr>
+                          <m:sty m:val="p"/>
+                        </m:rPr>
+                        <a:rPr lang="el-GR" i="1" smtClean="0">
+                          <a:latin typeface="Cambria Math" panose="02040503050406030204" pitchFamily="18" charset="0"/>
+                          <a:ea typeface="Cambria Math" panose="02040503050406030204" pitchFamily="18" charset="0"/>
+                        </a:rPr>
+                        <m:t>Δ</m:t>
+                      </m:r>
+                      <m:r>
+                        <a:rPr lang="en-US" b="0" i="1" smtClean="0">
+                          <a:latin typeface="Cambria Math" panose="02040503050406030204" pitchFamily="18" charset="0"/>
+                          <a:ea typeface="Cambria Math" panose="02040503050406030204" pitchFamily="18" charset="0"/>
+                        </a:rPr>
+                        <m:t>𝑡</m:t>
+                      </m:r>
+                    </m:oMath>
+                  </m:oMathPara>
+                </a14:m>
+                <a:endParaRPr lang="en-US" dirty="0"/>
+              </a:p>
+            </p:txBody>
+          </p:sp>
+        </mc:Choice>
+        <mc:Fallback xmlns="">
+          <p:sp>
+            <p:nvSpPr>
+              <p:cNvPr id="17" name="TextBox 16"/>
+              <p:cNvSpPr txBox="1">
+                <a:spLocks noRot="1" noChangeAspect="1" noMove="1" noResize="1" noEditPoints="1" noAdjustHandles="1" noChangeArrowheads="1" noChangeShapeType="1" noTextEdit="1"/>
+              </p:cNvSpPr>
+              <p:nvPr/>
+            </p:nvSpPr>
+            <p:spPr>
+              <a:xfrm>
+                <a:off x="8382000" y="765048"/>
+                <a:ext cx="585481" cy="276999"/>
+              </a:xfrm>
+              <a:prstGeom prst="rect">
+                <a:avLst/>
+              </a:prstGeom>
+              <a:blipFill>
+                <a:blip r:embed="rId10"/>
+                <a:stretch>
+                  <a:fillRect r="-7292" b="-6667"/>
+                </a:stretch>
+              </a:blipFill>
+            </p:spPr>
+            <p:txBody>
+              <a:bodyPr/>
+              <a:lstStyle/>
+              <a:p>
+                <a:r>
+                  <a:rPr lang="en-US">
+                    <a:noFill/>
+                  </a:rPr>
+                  <a:t> </a:t>
+                </a:r>
+              </a:p>
+            </p:txBody>
+          </p:sp>
+        </mc:Fallback>
+      </mc:AlternateContent>
+    </p:spTree>
+    <p:extLst>
+      <p:ext uri="{BB962C8B-B14F-4D97-AF65-F5344CB8AC3E}">
+        <p14:creationId xmlns:p14="http://schemas.microsoft.com/office/powerpoint/2010/main" val="478181557"/>
+      </p:ext>
+    </p:extLst>
+  </p:cSld>
+  <p:clrMapOvr>
+    <a:masterClrMapping/>
+  </p:clrMapOvr>
+</p:sld>
+</file>
+
+<file path=ppt/slides/slide7.xml><?xml version="1.0" encoding="utf-8"?>
+<p:sld xmlns:a="http://schemas.openxmlformats.org/drawingml/2006/main" xmlns:r="http://schemas.openxmlformats.org/officeDocument/2006/relationships" xmlns:p="http://schemas.openxmlformats.org/presentationml/2006/main">
+  <p:cSld>
+    <p:spTree>
+      <p:nvGrpSpPr>
+        <p:cNvPr id="1" name=""/>
+        <p:cNvGrpSpPr/>
+        <p:nvPr/>
+      </p:nvGrpSpPr>
+      <p:grpSpPr>
+        <a:xfrm>
+          <a:off x="0" y="0"/>
+          <a:ext cx="0" cy="0"/>
+          <a:chOff x="0" y="0"/>
+          <a:chExt cx="0" cy="0"/>
+        </a:xfrm>
+      </p:grpSpPr>
+      <p:cxnSp>
+        <p:nvCxnSpPr>
+          <p:cNvPr id="3" name="Straight Arrow Connector 2"/>
+          <p:cNvCxnSpPr/>
+          <p:nvPr/>
+        </p:nvCxnSpPr>
+        <p:spPr>
+          <a:xfrm flipV="1">
+            <a:off x="2565588" y="1062183"/>
+            <a:ext cx="4333976" cy="1976292"/>
+          </a:xfrm>
+          <a:prstGeom prst="straightConnector1">
+            <a:avLst/>
+          </a:prstGeom>
+          <a:ln w="28575">
+            <a:solidFill>
+              <a:schemeClr val="tx1"/>
+            </a:solidFill>
+            <a:headEnd w="lg" len="lg"/>
+            <a:tailEnd type="triangle" w="lg" len="lg"/>
+          </a:ln>
+        </p:spPr>
+        <p:style>
+          <a:lnRef idx="1">
+            <a:schemeClr val="accent1"/>
+          </a:lnRef>
+          <a:fillRef idx="0">
+            <a:schemeClr val="accent1"/>
+          </a:fillRef>
+          <a:effectRef idx="0">
+            <a:schemeClr val="accent1"/>
+          </a:effectRef>
+          <a:fontRef idx="minor">
+            <a:schemeClr val="tx1"/>
+          </a:fontRef>
+        </p:style>
+      </p:cxnSp>
+      <p:cxnSp>
+        <p:nvCxnSpPr>
+          <p:cNvPr id="5" name="Straight Arrow Connector 4"/>
+          <p:cNvCxnSpPr/>
+          <p:nvPr/>
+        </p:nvCxnSpPr>
+        <p:spPr>
+          <a:xfrm>
+            <a:off x="2565588" y="3031953"/>
+            <a:ext cx="4333976" cy="1976292"/>
+          </a:xfrm>
+          <a:prstGeom prst="straightConnector1">
+            <a:avLst/>
+          </a:prstGeom>
+          <a:ln w="28575">
+            <a:solidFill>
+              <a:schemeClr val="tx1"/>
+            </a:solidFill>
+            <a:headEnd w="lg" len="lg"/>
+            <a:tailEnd type="triangle" w="lg" len="lg"/>
+          </a:ln>
+        </p:spPr>
+        <p:style>
+          <a:lnRef idx="1">
+            <a:schemeClr val="accent1"/>
+          </a:lnRef>
+          <a:fillRef idx="0">
+            <a:schemeClr val="accent1"/>
+          </a:fillRef>
+          <a:effectRef idx="0">
+            <a:schemeClr val="accent1"/>
+          </a:effectRef>
+          <a:fontRef idx="minor">
+            <a:schemeClr val="tx1"/>
+          </a:fontRef>
+        </p:style>
+      </p:cxnSp>
+      <p:sp>
+        <p:nvSpPr>
+          <p:cNvPr id="6" name="Arc 5"/>
+          <p:cNvSpPr/>
+          <p:nvPr/>
+        </p:nvSpPr>
+        <p:spPr>
+          <a:xfrm>
+            <a:off x="2971800" y="2707640"/>
+            <a:ext cx="340360" cy="695960"/>
+          </a:xfrm>
+          <a:prstGeom prst="arc">
+            <a:avLst>
+              <a:gd name="adj1" fmla="val 17004971"/>
+              <a:gd name="adj2" fmla="val 4182901"/>
+            </a:avLst>
+          </a:prstGeom>
+          <a:ln w="28575">
+            <a:solidFill>
+              <a:schemeClr val="tx1"/>
+            </a:solidFill>
+          </a:ln>
+        </p:spPr>
+        <p:style>
+          <a:lnRef idx="1">
+            <a:schemeClr val="accent1"/>
+          </a:lnRef>
+          <a:fillRef idx="0">
+            <a:schemeClr val="accent1"/>
+          </a:fillRef>
+          <a:effectRef idx="0">
+            <a:schemeClr val="accent1"/>
+          </a:effectRef>
+          <a:fontRef idx="minor">
+            <a:schemeClr val="tx1"/>
+          </a:fontRef>
+        </p:style>
+        <p:txBody>
+          <a:bodyPr rtlCol="0" anchor="ctr"/>
+          <a:lstStyle/>
+          <a:p>
+            <a:pPr algn="ctr"/>
+            <a:endParaRPr lang="en-US"/>
+          </a:p>
+        </p:txBody>
+      </p:sp>
+      <mc:AlternateContent xmlns:mc="http://schemas.openxmlformats.org/markup-compatibility/2006">
+        <mc:Choice xmlns:a14="http://schemas.microsoft.com/office/drawing/2010/main" Requires="a14">
+          <p:sp>
+            <p:nvSpPr>
+              <p:cNvPr id="7" name="TextBox 6"/>
+              <p:cNvSpPr txBox="1"/>
+              <p:nvPr/>
+            </p:nvSpPr>
+            <p:spPr>
+              <a:xfrm>
+                <a:off x="3390900" y="2819400"/>
+                <a:ext cx="294248" cy="430887"/>
+              </a:xfrm>
+              <a:prstGeom prst="rect">
+                <a:avLst/>
+              </a:prstGeom>
+              <a:noFill/>
+            </p:spPr>
+            <p:txBody>
+              <a:bodyPr wrap="none" lIns="0" tIns="0" rIns="0" bIns="0" rtlCol="0">
+                <a:spAutoFit/>
+              </a:bodyPr>
+              <a:lstStyle/>
+              <a:p>
+                <a14:m>
+                  <m:oMathPara xmlns:m="http://schemas.openxmlformats.org/officeDocument/2006/math">
+                    <m:oMathParaPr>
+                      <m:jc m:val="centerGroup"/>
+                    </m:oMathParaPr>
+                    <m:oMath xmlns:m="http://schemas.openxmlformats.org/officeDocument/2006/math">
+                      <m:r>
+                        <a:rPr lang="en-US" sz="2800" i="1" smtClean="0">
+                          <a:latin typeface="Cambria Math" panose="02040503050406030204" pitchFamily="18" charset="0"/>
+                          <a:ea typeface="Cambria Math" panose="02040503050406030204" pitchFamily="18" charset="0"/>
+                        </a:rPr>
+                        <m:t>𝜃</m:t>
+                      </m:r>
+                    </m:oMath>
+                  </m:oMathPara>
+                </a14:m>
+                <a:endParaRPr lang="en-US" sz="2800" dirty="0"/>
+              </a:p>
+            </p:txBody>
+          </p:sp>
+        </mc:Choice>
+        <mc:Fallback>
+          <p:sp>
+            <p:nvSpPr>
+              <p:cNvPr id="7" name="TextBox 6"/>
+              <p:cNvSpPr txBox="1">
+                <a:spLocks noRot="1" noChangeAspect="1" noMove="1" noResize="1" noEditPoints="1" noAdjustHandles="1" noChangeArrowheads="1" noChangeShapeType="1" noTextEdit="1"/>
+              </p:cNvSpPr>
+              <p:nvPr/>
+            </p:nvSpPr>
+            <p:spPr>
+              <a:xfrm>
+                <a:off x="3390900" y="2819400"/>
+                <a:ext cx="294248" cy="430887"/>
+              </a:xfrm>
+              <a:prstGeom prst="rect">
+                <a:avLst/>
+              </a:prstGeom>
+              <a:blipFill>
+                <a:blip r:embed="rId2"/>
+                <a:stretch>
+                  <a:fillRect/>
+                </a:stretch>
+              </a:blipFill>
+            </p:spPr>
+            <p:txBody>
+              <a:bodyPr/>
+              <a:lstStyle/>
+              <a:p>
+                <a:r>
+                  <a:rPr lang="en-US">
+                    <a:noFill/>
+                  </a:rPr>
+                  <a:t> </a:t>
+                </a:r>
+              </a:p>
+            </p:txBody>
+          </p:sp>
+        </mc:Fallback>
+      </mc:AlternateContent>
+      <p:sp>
+        <p:nvSpPr>
+          <p:cNvPr id="8" name="TextBox 7"/>
+          <p:cNvSpPr txBox="1"/>
+          <p:nvPr/>
+        </p:nvSpPr>
+        <p:spPr>
+          <a:xfrm>
+            <a:off x="2057400" y="2752725"/>
+            <a:ext cx="561975" cy="523220"/>
+          </a:xfrm>
+          <a:prstGeom prst="rect">
+            <a:avLst/>
+          </a:prstGeom>
+          <a:noFill/>
+        </p:spPr>
+        <p:txBody>
+          <a:bodyPr wrap="square" rtlCol="0">
+            <a:spAutoFit/>
+          </a:bodyPr>
+          <a:lstStyle/>
+          <a:p>
+            <a:pPr algn="ctr"/>
+            <a:r>
+              <a:rPr lang="en-US" sz="2800" i="1" dirty="0" smtClean="0">
+                <a:latin typeface="Cambria Math" panose="02040503050406030204" pitchFamily="18" charset="0"/>
+                <a:ea typeface="Cambria Math" panose="02040503050406030204" pitchFamily="18" charset="0"/>
+              </a:rPr>
+              <a:t>O</a:t>
+            </a:r>
+            <a:endParaRPr lang="en-US" sz="2800" i="1" dirty="0">
+              <a:latin typeface="Cambria Math" panose="02040503050406030204" pitchFamily="18" charset="0"/>
+              <a:ea typeface="Cambria Math" panose="02040503050406030204" pitchFamily="18" charset="0"/>
+            </a:endParaRPr>
+          </a:p>
+        </p:txBody>
+      </p:sp>
+      <mc:AlternateContent xmlns:mc="http://schemas.openxmlformats.org/markup-compatibility/2006">
+        <mc:Choice xmlns:a14="http://schemas.microsoft.com/office/drawing/2010/main" Requires="a14">
+          <p:sp>
+            <p:nvSpPr>
+              <p:cNvPr id="9" name="TextBox 8"/>
+              <p:cNvSpPr txBox="1"/>
+              <p:nvPr/>
+            </p:nvSpPr>
+            <p:spPr>
+              <a:xfrm>
+                <a:off x="4362450" y="1552575"/>
+                <a:ext cx="545983" cy="430887"/>
+              </a:xfrm>
+              <a:prstGeom prst="rect">
+                <a:avLst/>
+              </a:prstGeom>
+              <a:noFill/>
+            </p:spPr>
+            <p:txBody>
+              <a:bodyPr wrap="none" lIns="0" tIns="0" rIns="0" bIns="0" rtlCol="0">
+                <a:spAutoFit/>
+              </a:bodyPr>
+              <a:lstStyle/>
+              <a:p>
+                <a14:m>
+                  <m:oMathPara xmlns:m="http://schemas.openxmlformats.org/officeDocument/2006/math">
+                    <m:oMathParaPr>
+                      <m:jc m:val="centerGroup"/>
+                    </m:oMathParaPr>
+                    <m:oMath xmlns:m="http://schemas.openxmlformats.org/officeDocument/2006/math">
+                      <m:d>
+                        <m:dPr>
+                          <m:begChr m:val="⟨"/>
+                          <m:endChr m:val="⟩"/>
+                          <m:ctrlPr>
+                            <a:rPr lang="en-US" sz="2800" i="1" smtClean="0">
+                              <a:latin typeface="Cambria Math" panose="02040503050406030204" pitchFamily="18" charset="0"/>
+                            </a:rPr>
+                          </m:ctrlPr>
+                        </m:dPr>
+                        <m:e>
+                          <m:r>
+                            <a:rPr lang="en-US" sz="2800" b="0" i="1" smtClean="0">
+                              <a:latin typeface="Cambria Math" panose="02040503050406030204" pitchFamily="18" charset="0"/>
+                            </a:rPr>
+                            <m:t>𝑣</m:t>
+                          </m:r>
+                        </m:e>
+                      </m:d>
+                    </m:oMath>
+                  </m:oMathPara>
+                </a14:m>
+                <a:endParaRPr lang="en-US" sz="2800" dirty="0"/>
+              </a:p>
+            </p:txBody>
+          </p:sp>
+        </mc:Choice>
+        <mc:Fallback>
+          <p:sp>
+            <p:nvSpPr>
+              <p:cNvPr id="9" name="TextBox 8"/>
+              <p:cNvSpPr txBox="1">
+                <a:spLocks noRot="1" noChangeAspect="1" noMove="1" noResize="1" noEditPoints="1" noAdjustHandles="1" noChangeArrowheads="1" noChangeShapeType="1" noTextEdit="1"/>
+              </p:cNvSpPr>
+              <p:nvPr/>
+            </p:nvSpPr>
+            <p:spPr>
+              <a:xfrm>
+                <a:off x="4362450" y="1552575"/>
+                <a:ext cx="545983" cy="430887"/>
+              </a:xfrm>
+              <a:prstGeom prst="rect">
+                <a:avLst/>
+              </a:prstGeom>
+              <a:blipFill>
+                <a:blip r:embed="rId3"/>
+                <a:stretch>
+                  <a:fillRect/>
+                </a:stretch>
+              </a:blipFill>
+            </p:spPr>
+            <p:txBody>
+              <a:bodyPr/>
+              <a:lstStyle/>
+              <a:p>
+                <a:r>
+                  <a:rPr lang="en-US">
+                    <a:noFill/>
+                  </a:rPr>
+                  <a:t> </a:t>
+                </a:r>
+              </a:p>
+            </p:txBody>
+          </p:sp>
+        </mc:Fallback>
+      </mc:AlternateContent>
+      <mc:AlternateContent xmlns:mc="http://schemas.openxmlformats.org/markup-compatibility/2006">
+        <mc:Choice xmlns:a14="http://schemas.microsoft.com/office/drawing/2010/main" Requires="a14">
+          <p:sp>
+            <p:nvSpPr>
+              <p:cNvPr id="10" name="TextBox 9"/>
+              <p:cNvSpPr txBox="1"/>
+              <p:nvPr/>
+            </p:nvSpPr>
+            <p:spPr>
+              <a:xfrm>
+                <a:off x="4391025" y="4076700"/>
+                <a:ext cx="545983" cy="430887"/>
+              </a:xfrm>
+              <a:prstGeom prst="rect">
+                <a:avLst/>
+              </a:prstGeom>
+              <a:noFill/>
+            </p:spPr>
+            <p:txBody>
+              <a:bodyPr wrap="none" lIns="0" tIns="0" rIns="0" bIns="0" rtlCol="0">
+                <a:spAutoFit/>
+              </a:bodyPr>
+              <a:lstStyle/>
+              <a:p>
+                <a14:m>
+                  <m:oMathPara xmlns:m="http://schemas.openxmlformats.org/officeDocument/2006/math">
+                    <m:oMathParaPr>
+                      <m:jc m:val="centerGroup"/>
+                    </m:oMathParaPr>
+                    <m:oMath xmlns:m="http://schemas.openxmlformats.org/officeDocument/2006/math">
+                      <m:d>
+                        <m:dPr>
+                          <m:begChr m:val="⟨"/>
+                          <m:endChr m:val="⟩"/>
+                          <m:ctrlPr>
+                            <a:rPr lang="en-US" sz="2800" i="1" smtClean="0">
+                              <a:latin typeface="Cambria Math" panose="02040503050406030204" pitchFamily="18" charset="0"/>
+                            </a:rPr>
+                          </m:ctrlPr>
+                        </m:dPr>
+                        <m:e>
+                          <m:r>
+                            <a:rPr lang="en-US" sz="2800" b="0" i="1" smtClean="0">
+                              <a:latin typeface="Cambria Math" panose="02040503050406030204" pitchFamily="18" charset="0"/>
+                            </a:rPr>
+                            <m:t>𝑣</m:t>
+                          </m:r>
+                        </m:e>
+                      </m:d>
+                    </m:oMath>
+                  </m:oMathPara>
+                </a14:m>
+                <a:endParaRPr lang="en-US" sz="2800" dirty="0"/>
+              </a:p>
+            </p:txBody>
+          </p:sp>
+        </mc:Choice>
+        <mc:Fallback>
+          <p:sp>
+            <p:nvSpPr>
+              <p:cNvPr id="10" name="TextBox 9"/>
+              <p:cNvSpPr txBox="1">
+                <a:spLocks noRot="1" noChangeAspect="1" noMove="1" noResize="1" noEditPoints="1" noAdjustHandles="1" noChangeArrowheads="1" noChangeShapeType="1" noTextEdit="1"/>
+              </p:cNvSpPr>
+              <p:nvPr/>
+            </p:nvSpPr>
+            <p:spPr>
+              <a:xfrm>
+                <a:off x="4391025" y="4076700"/>
+                <a:ext cx="545983" cy="430887"/>
+              </a:xfrm>
+              <a:prstGeom prst="rect">
+                <a:avLst/>
+              </a:prstGeom>
+              <a:blipFill>
+                <a:blip r:embed="rId4"/>
+                <a:stretch>
+                  <a:fillRect/>
+                </a:stretch>
+              </a:blipFill>
+            </p:spPr>
+            <p:txBody>
+              <a:bodyPr/>
+              <a:lstStyle/>
+              <a:p>
+                <a:r>
+                  <a:rPr lang="en-US">
+                    <a:noFill/>
+                  </a:rPr>
+                  <a:t> </a:t>
+                </a:r>
+              </a:p>
+            </p:txBody>
+          </p:sp>
+        </mc:Fallback>
+      </mc:AlternateContent>
+      <p:cxnSp>
+        <p:nvCxnSpPr>
+          <p:cNvPr id="11" name="Straight Arrow Connector 10"/>
+          <p:cNvCxnSpPr/>
+          <p:nvPr/>
+        </p:nvCxnSpPr>
+        <p:spPr>
+          <a:xfrm flipV="1">
+            <a:off x="6893560" y="1064260"/>
+            <a:ext cx="7620" cy="3934460"/>
+          </a:xfrm>
+          <a:prstGeom prst="straightConnector1">
+            <a:avLst/>
+          </a:prstGeom>
+          <a:ln w="28575">
+            <a:solidFill>
+              <a:schemeClr val="accent1">
+                <a:lumMod val="75000"/>
+              </a:schemeClr>
+            </a:solidFill>
+            <a:headEnd w="lg" len="lg"/>
+            <a:tailEnd type="stealth" w="lg" len="lg"/>
+          </a:ln>
+        </p:spPr>
+        <p:style>
+          <a:lnRef idx="1">
+            <a:schemeClr val="accent1"/>
+          </a:lnRef>
+          <a:fillRef idx="0">
+            <a:schemeClr val="accent1"/>
+          </a:fillRef>
+          <a:effectRef idx="0">
+            <a:schemeClr val="accent1"/>
+          </a:effectRef>
+          <a:fontRef idx="minor">
+            <a:schemeClr val="tx1"/>
+          </a:fontRef>
+        </p:style>
+      </p:cxnSp>
+      <mc:AlternateContent xmlns:mc="http://schemas.openxmlformats.org/markup-compatibility/2006">
+        <mc:Choice xmlns:a14="http://schemas.microsoft.com/office/drawing/2010/main" Requires="a14">
+          <p:sp>
+            <p:nvSpPr>
+              <p:cNvPr id="16" name="TextBox 15"/>
+              <p:cNvSpPr txBox="1"/>
+              <p:nvPr/>
+            </p:nvSpPr>
+            <p:spPr>
+              <a:xfrm>
+                <a:off x="6969760" y="2616200"/>
+                <a:ext cx="418897" cy="430887"/>
+              </a:xfrm>
+              <a:prstGeom prst="rect">
+                <a:avLst/>
+              </a:prstGeom>
+              <a:noFill/>
+            </p:spPr>
+            <p:txBody>
+              <a:bodyPr wrap="none" lIns="0" tIns="0" rIns="0" bIns="0" rtlCol="0">
+                <a:spAutoFit/>
+              </a:bodyPr>
+              <a:lstStyle/>
+              <a:p>
+                <a14:m>
+                  <m:oMathPara xmlns:m="http://schemas.openxmlformats.org/officeDocument/2006/math">
+                    <m:oMathParaPr>
+                      <m:jc m:val="centerGroup"/>
+                    </m:oMathParaPr>
+                    <m:oMath xmlns:m="http://schemas.openxmlformats.org/officeDocument/2006/math">
+                      <m:sSub>
+                        <m:sSubPr>
+                          <m:ctrlPr>
+                            <a:rPr lang="en-US" sz="2800" i="1" smtClean="0">
+                              <a:latin typeface="Cambria Math" panose="02040503050406030204" pitchFamily="18" charset="0"/>
+                            </a:rPr>
+                          </m:ctrlPr>
+                        </m:sSubPr>
+                        <m:e>
+                          <m:r>
+                            <a:rPr lang="en-US" sz="2800" b="0" i="1" smtClean="0">
+                              <a:latin typeface="Cambria Math" panose="02040503050406030204" pitchFamily="18" charset="0"/>
+                            </a:rPr>
+                            <m:t>𝑣</m:t>
+                          </m:r>
+                        </m:e>
+                        <m:sub>
+                          <m:r>
+                            <a:rPr lang="en-US" sz="2800" b="0" i="1" smtClean="0">
+                              <a:latin typeface="Cambria Math" panose="02040503050406030204" pitchFamily="18" charset="0"/>
+                            </a:rPr>
+                            <m:t>𝑟</m:t>
+                          </m:r>
+                        </m:sub>
+                      </m:sSub>
+                    </m:oMath>
+                  </m:oMathPara>
+                </a14:m>
+                <a:endParaRPr lang="en-US" sz="2800" dirty="0"/>
+              </a:p>
+            </p:txBody>
+          </p:sp>
+        </mc:Choice>
+        <mc:Fallback>
+          <p:sp>
+            <p:nvSpPr>
+              <p:cNvPr id="16" name="TextBox 15"/>
+              <p:cNvSpPr txBox="1">
+                <a:spLocks noRot="1" noChangeAspect="1" noMove="1" noResize="1" noEditPoints="1" noAdjustHandles="1" noChangeArrowheads="1" noChangeShapeType="1" noTextEdit="1"/>
+              </p:cNvSpPr>
+              <p:nvPr/>
+            </p:nvSpPr>
+            <p:spPr>
+              <a:xfrm>
+                <a:off x="6969760" y="2616200"/>
+                <a:ext cx="418897" cy="430887"/>
+              </a:xfrm>
+              <a:prstGeom prst="rect">
+                <a:avLst/>
+              </a:prstGeom>
+              <a:blipFill>
+                <a:blip r:embed="rId5"/>
+                <a:stretch>
+                  <a:fillRect/>
+                </a:stretch>
+              </a:blipFill>
+            </p:spPr>
+            <p:txBody>
+              <a:bodyPr/>
+              <a:lstStyle/>
+              <a:p>
+                <a:r>
+                  <a:rPr lang="en-US">
+                    <a:noFill/>
+                  </a:rPr>
+                  <a:t> </a:t>
+                </a:r>
+              </a:p>
+            </p:txBody>
+          </p:sp>
+        </mc:Fallback>
+      </mc:AlternateContent>
+      <p:sp>
+        <p:nvSpPr>
+          <p:cNvPr id="17" name="TextBox 16"/>
+          <p:cNvSpPr txBox="1"/>
+          <p:nvPr/>
+        </p:nvSpPr>
+        <p:spPr>
+          <a:xfrm>
+            <a:off x="6720840" y="4916805"/>
+            <a:ext cx="561975" cy="523220"/>
+          </a:xfrm>
+          <a:prstGeom prst="rect">
+            <a:avLst/>
+          </a:prstGeom>
+          <a:noFill/>
+        </p:spPr>
+        <p:txBody>
+          <a:bodyPr wrap="square" rtlCol="0">
+            <a:spAutoFit/>
+          </a:bodyPr>
+          <a:lstStyle/>
+          <a:p>
+            <a:pPr algn="ctr"/>
+            <a:r>
+              <a:rPr lang="en-US" sz="2800" i="1" dirty="0" smtClean="0">
+                <a:latin typeface="Cambria Math" panose="02040503050406030204" pitchFamily="18" charset="0"/>
+                <a:ea typeface="Cambria Math" panose="02040503050406030204" pitchFamily="18" charset="0"/>
+              </a:rPr>
+              <a:t>A</a:t>
+            </a:r>
+            <a:endParaRPr lang="en-US" sz="2800" i="1" dirty="0">
+              <a:latin typeface="Cambria Math" panose="02040503050406030204" pitchFamily="18" charset="0"/>
+              <a:ea typeface="Cambria Math" panose="02040503050406030204" pitchFamily="18" charset="0"/>
+            </a:endParaRPr>
+          </a:p>
+        </p:txBody>
+      </p:sp>
+      <p:sp>
+        <p:nvSpPr>
+          <p:cNvPr id="18" name="TextBox 17"/>
+          <p:cNvSpPr txBox="1"/>
+          <p:nvPr/>
+        </p:nvSpPr>
+        <p:spPr>
+          <a:xfrm>
+            <a:off x="6720840" y="598805"/>
+            <a:ext cx="561975" cy="523220"/>
+          </a:xfrm>
+          <a:prstGeom prst="rect">
+            <a:avLst/>
+          </a:prstGeom>
+          <a:noFill/>
+        </p:spPr>
+        <p:txBody>
+          <a:bodyPr wrap="square" rtlCol="0">
+            <a:spAutoFit/>
+          </a:bodyPr>
+          <a:lstStyle/>
+          <a:p>
+            <a:pPr algn="ctr"/>
+            <a:r>
+              <a:rPr lang="en-US" sz="2800" i="1" dirty="0" smtClean="0">
+                <a:latin typeface="Cambria Math" panose="02040503050406030204" pitchFamily="18" charset="0"/>
+                <a:ea typeface="Cambria Math" panose="02040503050406030204" pitchFamily="18" charset="0"/>
+              </a:rPr>
+              <a:t>B</a:t>
+            </a:r>
+            <a:endParaRPr lang="en-US" sz="2800" i="1" dirty="0">
+              <a:latin typeface="Cambria Math" panose="02040503050406030204" pitchFamily="18" charset="0"/>
+              <a:ea typeface="Cambria Math" panose="02040503050406030204" pitchFamily="18" charset="0"/>
+            </a:endParaRPr>
+          </a:p>
+        </p:txBody>
+      </p:sp>
+    </p:spTree>
+    <p:extLst>
+      <p:ext uri="{BB962C8B-B14F-4D97-AF65-F5344CB8AC3E}">
+        <p14:creationId xmlns:p14="http://schemas.microsoft.com/office/powerpoint/2010/main" val="3750295835"/>
       </p:ext>
     </p:extLst>
   </p:cSld>
